--- a/presentation/deck.pptx
+++ b/presentation/deck.pptx
@@ -4,28 +4,25 @@
   <p:sldMasterIdLst>
     <p:sldMasterId id="2147483648" r:id="rId1"/>
   </p:sldMasterIdLst>
-  <p:notesMasterIdLst>
-    <p:notesMasterId r:id="rId18"/>
-  </p:notesMasterIdLst>
   <p:sldIdLst>
-    <p:sldId id="256" r:id="rId2"/>
-    <p:sldId id="257" r:id="rId3"/>
-    <p:sldId id="258" r:id="rId4"/>
-    <p:sldId id="259" r:id="rId5"/>
-    <p:sldId id="260" r:id="rId6"/>
-    <p:sldId id="261" r:id="rId7"/>
-    <p:sldId id="262" r:id="rId8"/>
-    <p:sldId id="263" r:id="rId9"/>
-    <p:sldId id="264" r:id="rId10"/>
-    <p:sldId id="265" r:id="rId11"/>
-    <p:sldId id="266" r:id="rId12"/>
-    <p:sldId id="267" r:id="rId13"/>
-    <p:sldId id="268" r:id="rId14"/>
-    <p:sldId id="269" r:id="rId15"/>
-    <p:sldId id="270" r:id="rId16"/>
-    <p:sldId id="271" r:id="rId17"/>
+    <p:sldId id="256" r:id="rId7"/>
+    <p:sldId id="257" r:id="rId9"/>
+    <p:sldId id="258" r:id="rId10"/>
+    <p:sldId id="259" r:id="rId11"/>
+    <p:sldId id="260" r:id="rId12"/>
+    <p:sldId id="261" r:id="rId13"/>
+    <p:sldId id="262" r:id="rId14"/>
+    <p:sldId id="263" r:id="rId15"/>
+    <p:sldId id="264" r:id="rId16"/>
+    <p:sldId id="265" r:id="rId17"/>
+    <p:sldId id="266" r:id="rId18"/>
+    <p:sldId id="267" r:id="rId19"/>
+    <p:sldId id="268" r:id="rId20"/>
+    <p:sldId id="269" r:id="rId21"/>
+    <p:sldId id="270" r:id="rId22"/>
+    <p:sldId id="271" r:id="rId23"/>
   </p:sldIdLst>
-  <p:sldSz cx="12192000" cy="6858000"/>
+  <p:sldSz cx="12191695" cy="6858000" type="screen4x3"/>
   <p:notesSz cx="6858000" cy="9144000"/>
   <p:defaultTextStyle>
     <a:defPPr>
@@ -122,27 +119,11 @@
       </a:defRPr>
     </a:lvl9pPr>
   </p:defaultTextStyle>
-  <p:extLst>
-    <p:ext uri="{EFAFB233-063F-42B5-8137-9DF3F51BA10A}">
-      <p15:sldGuideLst xmlns:p15="http://schemas.microsoft.com/office/powerpoint/2012/main">
-        <p15:guide id="1" orient="horz" pos="2160">
-          <p15:clr>
-            <a:srgbClr val="A4A3A4"/>
-          </p15:clr>
-        </p15:guide>
-        <p15:guide id="2" pos="2880">
-          <p15:clr>
-            <a:srgbClr val="A4A3A4"/>
-          </p15:clr>
-        </p15:guide>
-      </p15:sldGuideLst>
-    </p:ext>
-  </p:extLst>
 </p:presentation>
 </file>
 
 <file path=ppt/notesMasters/notesMaster1.xml><?xml version="1.0" encoding="utf-8"?>
-<p:notesMaster xmlns:a="http://schemas.openxmlformats.org/drawingml/2006/main" xmlns:r="http://schemas.openxmlformats.org/officeDocument/2006/relationships" xmlns:p="http://schemas.openxmlformats.org/presentationml/2006/main">
+<p:notesMaster xmlns:a="http://schemas.openxmlformats.org/drawingml/2006/main" xmlns:p="http://schemas.openxmlformats.org/presentationml/2006/main" xmlns:r="http://schemas.openxmlformats.org/officeDocument/2006/relationships">
   <p:cSld>
     <p:bg>
       <p:bgRef idx="1001">
@@ -163,16 +144,241 @@
           <a:chExt cx="0" cy="0"/>
         </a:xfrm>
       </p:grpSpPr>
+      <p:sp>
+        <p:nvSpPr>
+          <p:cNvPr id="2" name="Header Placeholder 1"/>
+          <p:cNvSpPr>
+            <a:spLocks noGrp="1"/>
+          </p:cNvSpPr>
+          <p:nvPr>
+            <p:ph type="hdr" sz="quarter"/>
+          </p:nvPr>
+        </p:nvSpPr>
+        <p:spPr>
+          <a:xfrm>
+            <a:off x="0" y="0"/>
+            <a:ext cx="2971800" cy="457200"/>
+          </a:xfrm>
+          <a:prstGeom prst="rect">
+            <a:avLst/>
+          </a:prstGeom>
+        </p:spPr>
+        <p:txBody>
+          <a:bodyPr vert="horz" lIns="91440" tIns="45720" rIns="91440" bIns="45720" rtlCol="0"/>
+          <a:lstStyle>
+            <a:lvl1pPr algn="l">
+              <a:defRPr sz="1200"/>
+            </a:lvl1pPr>
+          </a:lstStyle>
+          <a:p>
+            <a:endParaRPr lang="en-US"/>
+          </a:p>
+        </p:txBody>
+      </p:sp>
+      <p:sp>
+        <p:nvSpPr>
+          <p:cNvPr id="3" name="Date Placeholder 2"/>
+          <p:cNvSpPr>
+            <a:spLocks noGrp="1"/>
+          </p:cNvSpPr>
+          <p:nvPr>
+            <p:ph type="dt" idx="1"/>
+          </p:nvPr>
+        </p:nvSpPr>
+        <p:spPr>
+          <a:xfrm>
+            <a:off x="3884613" y="0"/>
+            <a:ext cx="2971800" cy="457200"/>
+          </a:xfrm>
+          <a:prstGeom prst="rect">
+            <a:avLst/>
+          </a:prstGeom>
+        </p:spPr>
+        <p:txBody>
+          <a:bodyPr vert="horz" lIns="91440" tIns="45720" rIns="91440" bIns="45720" rtlCol="0"/>
+          <a:lstStyle>
+            <a:lvl1pPr algn="r">
+              <a:defRPr sz="1200"/>
+            </a:lvl1pPr>
+          </a:lstStyle>
+          <a:p>
+            <a:fld id="{0F89C1C7-3DCD-1040-A9CF-14679D8B5DDD}" type="datetimeFigureOut">
+              <a:rPr lang="en-US" smtClean="0"/>
+              <a:t>10/17/16</a:t>
+            </a:fld>
+            <a:endParaRPr lang="en-US"/>
+          </a:p>
+        </p:txBody>
+      </p:sp>
+      <p:sp>
+        <p:nvSpPr>
+          <p:cNvPr id="4" name="Slide Image Placeholder 3"/>
+          <p:cNvSpPr>
+            <a:spLocks noGrp="1" noRot="1" noChangeAspect="1"/>
+          </p:cNvSpPr>
+          <p:nvPr>
+            <p:ph type="sldImg" idx="2"/>
+          </p:nvPr>
+        </p:nvSpPr>
+        <p:spPr>
+          <a:xfrm>
+            <a:off x="1143000" y="685800"/>
+            <a:ext cx="4572000" cy="3429000"/>
+          </a:xfrm>
+          <a:prstGeom prst="rect">
+            <a:avLst/>
+          </a:prstGeom>
+          <a:noFill/>
+          <a:ln w="12700">
+            <a:solidFill>
+              <a:prstClr val="black"/>
+            </a:solidFill>
+          </a:ln>
+        </p:spPr>
+        <p:txBody>
+          <a:bodyPr vert="horz" lIns="91440" tIns="45720" rIns="91440" bIns="45720" rtlCol="0" anchor="ctr"/>
+          <a:lstStyle/>
+          <a:p>
+            <a:endParaRPr lang="en-US"/>
+          </a:p>
+        </p:txBody>
+      </p:sp>
+      <p:sp>
+        <p:nvSpPr>
+          <p:cNvPr id="5" name="Notes Placeholder 4"/>
+          <p:cNvSpPr>
+            <a:spLocks noGrp="1"/>
+          </p:cNvSpPr>
+          <p:nvPr>
+            <p:ph type="body" sz="quarter" idx="3"/>
+          </p:nvPr>
+        </p:nvSpPr>
+        <p:spPr>
+          <a:xfrm>
+            <a:off x="685800" y="4343400"/>
+            <a:ext cx="5486400" cy="4114800"/>
+          </a:xfrm>
+          <a:prstGeom prst="rect">
+            <a:avLst/>
+          </a:prstGeom>
+        </p:spPr>
+        <p:txBody>
+          <a:bodyPr vert="horz" lIns="91440" tIns="45720" rIns="91440" bIns="45720" rtlCol="0"/>
+          <a:lstStyle/>
+          <a:p>
+            <a:pPr lvl="0"/>
+            <a:r>
+              <a:rPr lang="en-US" smtClean="0"/>
+              <a:t>Click to edit Master text styles</a:t>
+            </a:r>
+          </a:p>
+          <a:p>
+            <a:pPr lvl="1"/>
+            <a:r>
+              <a:rPr lang="en-US" smtClean="0"/>
+              <a:t>Second level</a:t>
+            </a:r>
+          </a:p>
+          <a:p>
+            <a:pPr lvl="2"/>
+            <a:r>
+              <a:rPr lang="en-US" smtClean="0"/>
+              <a:t>Third level</a:t>
+            </a:r>
+          </a:p>
+          <a:p>
+            <a:pPr lvl="3"/>
+            <a:r>
+              <a:rPr lang="en-US" smtClean="0"/>
+              <a:t>Fourth level</a:t>
+            </a:r>
+          </a:p>
+          <a:p>
+            <a:pPr lvl="4"/>
+            <a:r>
+              <a:rPr lang="en-US" smtClean="0"/>
+              <a:t>Fifth level</a:t>
+            </a:r>
+            <a:endParaRPr lang="en-US"/>
+          </a:p>
+        </p:txBody>
+      </p:sp>
+      <p:sp>
+        <p:nvSpPr>
+          <p:cNvPr id="6" name="Footer Placeholder 5"/>
+          <p:cNvSpPr>
+            <a:spLocks noGrp="1"/>
+          </p:cNvSpPr>
+          <p:nvPr>
+            <p:ph type="ftr" sz="quarter" idx="4"/>
+          </p:nvPr>
+        </p:nvSpPr>
+        <p:spPr>
+          <a:xfrm>
+            <a:off x="0" y="8685213"/>
+            <a:ext cx="2971800" cy="457200"/>
+          </a:xfrm>
+          <a:prstGeom prst="rect">
+            <a:avLst/>
+          </a:prstGeom>
+        </p:spPr>
+        <p:txBody>
+          <a:bodyPr vert="horz" lIns="91440" tIns="45720" rIns="91440" bIns="45720" rtlCol="0" anchor="b"/>
+          <a:lstStyle>
+            <a:lvl1pPr algn="l">
+              <a:defRPr sz="1200"/>
+            </a:lvl1pPr>
+          </a:lstStyle>
+          <a:p>
+            <a:endParaRPr lang="en-US"/>
+          </a:p>
+        </p:txBody>
+      </p:sp>
+      <p:sp>
+        <p:nvSpPr>
+          <p:cNvPr id="7" name="Slide Number Placeholder 6"/>
+          <p:cNvSpPr>
+            <a:spLocks noGrp="1"/>
+          </p:cNvSpPr>
+          <p:nvPr>
+            <p:ph type="sldNum" sz="quarter" idx="5"/>
+          </p:nvPr>
+        </p:nvSpPr>
+        <p:spPr>
+          <a:xfrm>
+            <a:off x="3884613" y="8685213"/>
+            <a:ext cx="2971800" cy="457200"/>
+          </a:xfrm>
+          <a:prstGeom prst="rect">
+            <a:avLst/>
+          </a:prstGeom>
+        </p:spPr>
+        <p:txBody>
+          <a:bodyPr vert="horz" lIns="91440" tIns="45720" rIns="91440" bIns="45720" rtlCol="0" anchor="b"/>
+          <a:lstStyle>
+            <a:lvl1pPr algn="r">
+              <a:defRPr sz="1200"/>
+            </a:lvl1pPr>
+          </a:lstStyle>
+          <a:p>
+            <a:fld id="{BB5E49A5-4136-284D-997B-48E1D791AD67}" type="slidenum">
+              <a:rPr lang="en-US" smtClean="0"/>
+              <a:t>‹#›</a:t>
+            </a:fld>
+            <a:endParaRPr lang="en-US"/>
+          </a:p>
+        </p:txBody>
+      </p:sp>
     </p:spTree>
     <p:extLst>
       <p:ext uri="{BB962C8B-B14F-4D97-AF65-F5344CB8AC3E}">
-        <p14:creationId xmlns:p14="http://schemas.microsoft.com/office/powerpoint/2010/main" val="3640203838"/>
+        <p14:creationId xmlns:p14="http://schemas.microsoft.com/office/powerpoint/2010/main" val="2623252185"/>
       </p:ext>
     </p:extLst>
   </p:cSld>
   <p:clrMap bg1="lt1" tx1="dk1" bg2="lt2" tx2="dk2" accent1="accent1" accent2="accent2" accent3="accent3" accent4="accent4" accent5="accent5" accent6="accent6" hlink="hlink" folHlink="folHlink"/>
   <p:notesStyle>
-    <a:lvl1pPr marL="0" algn="l" defTabSz="914400" rtl="0" eaLnBrk="1" latinLnBrk="0" hangingPunct="1">
+    <a:lvl1pPr marL="0" algn="l" defTabSz="457200" rtl="0" eaLnBrk="1" latinLnBrk="0" hangingPunct="1">
       <a:defRPr sz="1200" kern="1200">
         <a:solidFill>
           <a:schemeClr val="tx1"/>
@@ -182,7 +388,7 @@
         <a:cs typeface="+mn-cs"/>
       </a:defRPr>
     </a:lvl1pPr>
-    <a:lvl2pPr marL="457200" algn="l" defTabSz="914400" rtl="0" eaLnBrk="1" latinLnBrk="0" hangingPunct="1">
+    <a:lvl2pPr marL="457200" algn="l" defTabSz="457200" rtl="0" eaLnBrk="1" latinLnBrk="0" hangingPunct="1">
       <a:defRPr sz="1200" kern="1200">
         <a:solidFill>
           <a:schemeClr val="tx1"/>
@@ -192,7 +398,7 @@
         <a:cs typeface="+mn-cs"/>
       </a:defRPr>
     </a:lvl2pPr>
-    <a:lvl3pPr marL="914400" algn="l" defTabSz="914400" rtl="0" eaLnBrk="1" latinLnBrk="0" hangingPunct="1">
+    <a:lvl3pPr marL="914400" algn="l" defTabSz="457200" rtl="0" eaLnBrk="1" latinLnBrk="0" hangingPunct="1">
       <a:defRPr sz="1200" kern="1200">
         <a:solidFill>
           <a:schemeClr val="tx1"/>
@@ -202,7 +408,7 @@
         <a:cs typeface="+mn-cs"/>
       </a:defRPr>
     </a:lvl3pPr>
-    <a:lvl4pPr marL="1371600" algn="l" defTabSz="914400" rtl="0" eaLnBrk="1" latinLnBrk="0" hangingPunct="1">
+    <a:lvl4pPr marL="1371600" algn="l" defTabSz="457200" rtl="0" eaLnBrk="1" latinLnBrk="0" hangingPunct="1">
       <a:defRPr sz="1200" kern="1200">
         <a:solidFill>
           <a:schemeClr val="tx1"/>
@@ -212,7 +418,7 @@
         <a:cs typeface="+mn-cs"/>
       </a:defRPr>
     </a:lvl4pPr>
-    <a:lvl5pPr marL="1828800" algn="l" defTabSz="914400" rtl="0" eaLnBrk="1" latinLnBrk="0" hangingPunct="1">
+    <a:lvl5pPr marL="1828800" algn="l" defTabSz="457200" rtl="0" eaLnBrk="1" latinLnBrk="0" hangingPunct="1">
       <a:defRPr sz="1200" kern="1200">
         <a:solidFill>
           <a:schemeClr val="tx1"/>
@@ -222,7 +428,7 @@
         <a:cs typeface="+mn-cs"/>
       </a:defRPr>
     </a:lvl5pPr>
-    <a:lvl6pPr marL="2286000" algn="l" defTabSz="914400" rtl="0" eaLnBrk="1" latinLnBrk="0" hangingPunct="1">
+    <a:lvl6pPr marL="2286000" algn="l" defTabSz="457200" rtl="0" eaLnBrk="1" latinLnBrk="0" hangingPunct="1">
       <a:defRPr sz="1200" kern="1200">
         <a:solidFill>
           <a:schemeClr val="tx1"/>
@@ -232,7 +438,7 @@
         <a:cs typeface="+mn-cs"/>
       </a:defRPr>
     </a:lvl6pPr>
-    <a:lvl7pPr marL="2743200" algn="l" defTabSz="914400" rtl="0" eaLnBrk="1" latinLnBrk="0" hangingPunct="1">
+    <a:lvl7pPr marL="2743200" algn="l" defTabSz="457200" rtl="0" eaLnBrk="1" latinLnBrk="0" hangingPunct="1">
       <a:defRPr sz="1200" kern="1200">
         <a:solidFill>
           <a:schemeClr val="tx1"/>
@@ -242,7 +448,7 @@
         <a:cs typeface="+mn-cs"/>
       </a:defRPr>
     </a:lvl7pPr>
-    <a:lvl8pPr marL="3200400" algn="l" defTabSz="914400" rtl="0" eaLnBrk="1" latinLnBrk="0" hangingPunct="1">
+    <a:lvl8pPr marL="3200400" algn="l" defTabSz="457200" rtl="0" eaLnBrk="1" latinLnBrk="0" hangingPunct="1">
       <a:defRPr sz="1200" kern="1200">
         <a:solidFill>
           <a:schemeClr val="tx1"/>
@@ -252,7 +458,7 @@
         <a:cs typeface="+mn-cs"/>
       </a:defRPr>
     </a:lvl8pPr>
-    <a:lvl9pPr marL="3657600" algn="l" defTabSz="914400" rtl="0" eaLnBrk="1" latinLnBrk="0" hangingPunct="1">
+    <a:lvl9pPr marL="3657600" algn="l" defTabSz="457200" rtl="0" eaLnBrk="1" latinLnBrk="0" hangingPunct="1">
       <a:defRPr sz="1200" kern="1200">
         <a:solidFill>
           <a:schemeClr val="tx1"/>
@@ -267,7 +473,7 @@
 </file>
 
 <file path=ppt/notesSlides/notesSlide1.xml><?xml version="1.0" encoding="utf-8"?>
-<p:notes xmlns:a="http://schemas.openxmlformats.org/drawingml/2006/main" xmlns:r="http://schemas.openxmlformats.org/officeDocument/2006/relationships" xmlns:p="http://schemas.openxmlformats.org/presentationml/2006/main">
+<p:notes xmlns:a="http://schemas.openxmlformats.org/drawingml/2006/main" xmlns:p="http://schemas.openxmlformats.org/presentationml/2006/main" xmlns:r="http://schemas.openxmlformats.org/officeDocument/2006/relationships">
   <p:cSld>
     <p:spTree>
       <p:nvGrpSpPr>
@@ -287,7 +493,7 @@
         <p:nvSpPr>
           <p:cNvPr id="2" name="Slide Image Placeholder 1"/>
           <p:cNvSpPr>
-            <a:spLocks noGrp="1" noRot="1" noChangeAspect="1"/>
+            <a:spLocks noGrp="1"/>
           </p:cNvSpPr>
           <p:nvPr>
             <p:ph type="sldImg" idx="2"/>
@@ -302,7 +508,7 @@
             <a:spLocks noGrp="1"/>
           </p:cNvSpPr>
           <p:nvPr>
-            <p:ph type="body" sz="quarter" idx="3"/>
+            <p:ph type="body" idx="3" sz="quarter"/>
           </p:nvPr>
         </p:nvSpPr>
         <p:spPr/>
@@ -333,7 +539,7 @@
             <a:spLocks noGrp="1"/>
           </p:cNvSpPr>
           <p:nvPr>
-            <p:ph type="sldNum" sz="quarter" idx="5"/>
+            <p:ph type="sldNum" idx="5" sz="quarter"/>
           </p:nvPr>
         </p:nvSpPr>
         <p:spPr/>
@@ -347,7 +553,7 @@
 </file>
 
 <file path=ppt/notesSlides/notesSlide10.xml><?xml version="1.0" encoding="utf-8"?>
-<p:notes xmlns:a="http://schemas.openxmlformats.org/drawingml/2006/main" xmlns:r="http://schemas.openxmlformats.org/officeDocument/2006/relationships" xmlns:p="http://schemas.openxmlformats.org/presentationml/2006/main">
+<p:notes xmlns:a="http://schemas.openxmlformats.org/drawingml/2006/main" xmlns:p="http://schemas.openxmlformats.org/presentationml/2006/main" xmlns:r="http://schemas.openxmlformats.org/officeDocument/2006/relationships">
   <p:cSld>
     <p:spTree>
       <p:nvGrpSpPr>
@@ -367,7 +573,7 @@
         <p:nvSpPr>
           <p:cNvPr id="2" name="Slide Image Placeholder 1"/>
           <p:cNvSpPr>
-            <a:spLocks noGrp="1" noRot="1" noChangeAspect="1"/>
+            <a:spLocks noGrp="1"/>
           </p:cNvSpPr>
           <p:nvPr>
             <p:ph type="sldImg" idx="2"/>
@@ -382,7 +588,7 @@
             <a:spLocks noGrp="1"/>
           </p:cNvSpPr>
           <p:nvPr>
-            <p:ph type="body" sz="quarter" idx="3"/>
+            <p:ph type="body" idx="3" sz="quarter"/>
           </p:nvPr>
         </p:nvSpPr>
         <p:spPr/>
@@ -413,7 +619,7 @@
             <a:spLocks noGrp="1"/>
           </p:cNvSpPr>
           <p:nvPr>
-            <p:ph type="sldNum" sz="quarter" idx="5"/>
+            <p:ph type="sldNum" idx="5" sz="quarter"/>
           </p:nvPr>
         </p:nvSpPr>
         <p:spPr/>
@@ -427,7 +633,7 @@
 </file>
 
 <file path=ppt/notesSlides/notesSlide11.xml><?xml version="1.0" encoding="utf-8"?>
-<p:notes xmlns:a="http://schemas.openxmlformats.org/drawingml/2006/main" xmlns:r="http://schemas.openxmlformats.org/officeDocument/2006/relationships" xmlns:p="http://schemas.openxmlformats.org/presentationml/2006/main">
+<p:notes xmlns:a="http://schemas.openxmlformats.org/drawingml/2006/main" xmlns:p="http://schemas.openxmlformats.org/presentationml/2006/main" xmlns:r="http://schemas.openxmlformats.org/officeDocument/2006/relationships">
   <p:cSld>
     <p:spTree>
       <p:nvGrpSpPr>
@@ -447,7 +653,7 @@
         <p:nvSpPr>
           <p:cNvPr id="2" name="Slide Image Placeholder 1"/>
           <p:cNvSpPr>
-            <a:spLocks noGrp="1" noRot="1" noChangeAspect="1"/>
+            <a:spLocks noGrp="1"/>
           </p:cNvSpPr>
           <p:nvPr>
             <p:ph type="sldImg" idx="2"/>
@@ -462,7 +668,7 @@
             <a:spLocks noGrp="1"/>
           </p:cNvSpPr>
           <p:nvPr>
-            <p:ph type="body" sz="quarter" idx="3"/>
+            <p:ph type="body" idx="3" sz="quarter"/>
           </p:nvPr>
         </p:nvSpPr>
         <p:spPr/>
@@ -476,12 +682,12 @@
           </a:p>
           <a:p>
             <a:r>
-              <a:t>New-hire: met for Permanent (88.0%) and Manager (91.1%) hires; 148 of 225 early leavers left voluntarily; about 1,982 mature hires at the same rate would settle it.</a:t>
-            </a:r>
-          </a:p>
-          <a:p>
-            <a:r>
-              <a:t>Turnover 2025 by country: RO 6.7%, IE 6.3%, BG 6.1% are inconclusive.</a:t>
+              <a:t>New-hire, descriptive: met for Permanent (88.0%) and Manager (91.1%) hires, from 9 segment checks without correction; only Manager survives Bonferroni; 148 of 225 early leavers left voluntarily; about 1,982 mature hires at the same rate would settle it.</a:t>
+            </a:r>
+          </a:p>
+          <a:p>
+            <a:r>
+              <a:t>Turnover 2025 by country: RO 6.7%, IE 6.3%, BG 6.1% and IT 5.0% are inconclusive.</a:t>
             </a:r>
           </a:p>
           <a:p>
@@ -503,7 +709,7 @@
             <a:spLocks noGrp="1"/>
           </p:cNvSpPr>
           <p:nvPr>
-            <p:ph type="sldNum" sz="quarter" idx="5"/>
+            <p:ph type="sldNum" idx="5" sz="quarter"/>
           </p:nvPr>
         </p:nvSpPr>
         <p:spPr/>
@@ -517,7 +723,7 @@
 </file>
 
 <file path=ppt/notesSlides/notesSlide12.xml><?xml version="1.0" encoding="utf-8"?>
-<p:notes xmlns:a="http://schemas.openxmlformats.org/drawingml/2006/main" xmlns:r="http://schemas.openxmlformats.org/officeDocument/2006/relationships" xmlns:p="http://schemas.openxmlformats.org/presentationml/2006/main">
+<p:notes xmlns:a="http://schemas.openxmlformats.org/drawingml/2006/main" xmlns:p="http://schemas.openxmlformats.org/presentationml/2006/main" xmlns:r="http://schemas.openxmlformats.org/officeDocument/2006/relationships">
   <p:cSld>
     <p:spTree>
       <p:nvGrpSpPr>
@@ -537,7 +743,7 @@
         <p:nvSpPr>
           <p:cNvPr id="2" name="Slide Image Placeholder 1"/>
           <p:cNvSpPr>
-            <a:spLocks noGrp="1" noRot="1" noChangeAspect="1"/>
+            <a:spLocks noGrp="1"/>
           </p:cNvSpPr>
           <p:nvPr>
             <p:ph type="sldImg" idx="2"/>
@@ -552,7 +758,7 @@
             <a:spLocks noGrp="1"/>
           </p:cNvSpPr>
           <p:nvPr>
-            <p:ph type="body" sz="quarter" idx="3"/>
+            <p:ph type="body" idx="3" sz="quarter"/>
           </p:nvPr>
         </p:nvSpPr>
         <p:spPr/>
@@ -571,7 +777,17 @@
           </a:p>
           <a:p>
             <a:r>
-              <a:t>Time check: unemployment vs time within countries rho -0.71 (D-79). Pooled and time-adjusted views are descriptive only.</a:t>
+              <a:t>Time check: unemployment vs time within countries rho -0.71 (D-79). Time-adjusted view: unemployment barely moves (-0.10 -&gt; -0.11) but GDP flips sign (senior +0.27 -&gt; -0.46, turnover -0.27 -&gt; +0.36). Pooled and time-adjusted views are descriptive only.</a:t>
+            </a:r>
+          </a:p>
+          <a:p>
+            <a:r>
+              <a:t>Power (80%, Holm level 0.05/4): n=108 detects |rho| &gt; 0.31, n=30 &gt; 0.57, n=24 &gt; 0.62. Bootstrap ranges are exploratory: the same country appears many times.</a:t>
+            </a:r>
+          </a:p>
+          <a:p>
+            <a:r>
+              <a:t>Caveats (no conclusion changes): p-values ignore the G-1 degrees of freedom used by demeaning (turnover x inflation 0.03 -&gt; ~0.05); 90 GDP rows hold 25 distinct values; near-ties after demeaning move some rho in the 2nd decimal.</a:t>
             </a:r>
           </a:p>
           <a:p>
@@ -593,7 +809,7 @@
             <a:spLocks noGrp="1"/>
           </p:cNvSpPr>
           <p:nvPr>
-            <p:ph type="sldNum" sz="quarter" idx="5"/>
+            <p:ph type="sldNum" idx="5" sz="quarter"/>
           </p:nvPr>
         </p:nvSpPr>
         <p:spPr/>
@@ -607,7 +823,7 @@
 </file>
 
 <file path=ppt/notesSlides/notesSlide13.xml><?xml version="1.0" encoding="utf-8"?>
-<p:notes xmlns:a="http://schemas.openxmlformats.org/drawingml/2006/main" xmlns:r="http://schemas.openxmlformats.org/officeDocument/2006/relationships" xmlns:p="http://schemas.openxmlformats.org/presentationml/2006/main">
+<p:notes xmlns:a="http://schemas.openxmlformats.org/drawingml/2006/main" xmlns:p="http://schemas.openxmlformats.org/presentationml/2006/main" xmlns:r="http://schemas.openxmlformats.org/officeDocument/2006/relationships">
   <p:cSld>
     <p:spTree>
       <p:nvGrpSpPr>
@@ -627,7 +843,7 @@
         <p:nvSpPr>
           <p:cNvPr id="2" name="Slide Image Placeholder 1"/>
           <p:cNvSpPr>
-            <a:spLocks noGrp="1" noRot="1" noChangeAspect="1"/>
+            <a:spLocks noGrp="1"/>
           </p:cNvSpPr>
           <p:nvPr>
             <p:ph type="sldImg" idx="2"/>
@@ -642,7 +858,7 @@
             <a:spLocks noGrp="1"/>
           </p:cNvSpPr>
           <p:nvPr>
-            <p:ph type="body" sz="quarter" idx="3"/>
+            <p:ph type="body" idx="3" sz="quarter"/>
           </p:nvPr>
         </p:nvSpPr>
         <p:spPr/>
@@ -673,7 +889,7 @@
             <a:spLocks noGrp="1"/>
           </p:cNvSpPr>
           <p:nvPr>
-            <p:ph type="sldNum" sz="quarter" idx="5"/>
+            <p:ph type="sldNum" idx="5" sz="quarter"/>
           </p:nvPr>
         </p:nvSpPr>
         <p:spPr/>
@@ -687,7 +903,7 @@
 </file>
 
 <file path=ppt/notesSlides/notesSlide14.xml><?xml version="1.0" encoding="utf-8"?>
-<p:notes xmlns:a="http://schemas.openxmlformats.org/drawingml/2006/main" xmlns:r="http://schemas.openxmlformats.org/officeDocument/2006/relationships" xmlns:p="http://schemas.openxmlformats.org/presentationml/2006/main">
+<p:notes xmlns:a="http://schemas.openxmlformats.org/drawingml/2006/main" xmlns:p="http://schemas.openxmlformats.org/presentationml/2006/main" xmlns:r="http://schemas.openxmlformats.org/officeDocument/2006/relationships">
   <p:cSld>
     <p:spTree>
       <p:nvGrpSpPr>
@@ -707,7 +923,7 @@
         <p:nvSpPr>
           <p:cNvPr id="2" name="Slide Image Placeholder 1"/>
           <p:cNvSpPr>
-            <a:spLocks noGrp="1" noRot="1" noChangeAspect="1"/>
+            <a:spLocks noGrp="1"/>
           </p:cNvSpPr>
           <p:nvPr>
             <p:ph type="sldImg" idx="2"/>
@@ -722,7 +938,7 @@
             <a:spLocks noGrp="1"/>
           </p:cNvSpPr>
           <p:nvPr>
-            <p:ph type="body" sz="quarter" idx="3"/>
+            <p:ph type="body" idx="3" sz="quarter"/>
           </p:nvPr>
         </p:nvSpPr>
         <p:spPr/>
@@ -742,6 +958,11 @@
           <a:p>
             <a:r>
               <a:t>Caught: JOBRATE -&gt; JVR (D-26); C-01 wrong preview statistic, finding withdrawn, boundary tests added.</a:t>
+            </a:r>
+          </a:p>
+          <a:p>
+            <a:r>
+              <a:t>External review after submission (F-01..F-21): latest.json promoted too early (D-96), malformed answers crashed ingest (D-97), publish not all-or-nothing (D-98); plus smaller fixes (D-99). 24 tests added.</a:t>
             </a:r>
           </a:p>
           <a:p>
@@ -758,7 +979,7 @@
             <a:spLocks noGrp="1"/>
           </p:cNvSpPr>
           <p:nvPr>
-            <p:ph type="sldNum" sz="quarter" idx="5"/>
+            <p:ph type="sldNum" idx="5" sz="quarter"/>
           </p:nvPr>
         </p:nvSpPr>
         <p:spPr/>
@@ -772,7 +993,7 @@
 </file>
 
 <file path=ppt/notesSlides/notesSlide15.xml><?xml version="1.0" encoding="utf-8"?>
-<p:notes xmlns:a="http://schemas.openxmlformats.org/drawingml/2006/main" xmlns:r="http://schemas.openxmlformats.org/officeDocument/2006/relationships" xmlns:p="http://schemas.openxmlformats.org/presentationml/2006/main">
+<p:notes xmlns:a="http://schemas.openxmlformats.org/drawingml/2006/main" xmlns:p="http://schemas.openxmlformats.org/presentationml/2006/main" xmlns:r="http://schemas.openxmlformats.org/officeDocument/2006/relationships">
   <p:cSld>
     <p:spTree>
       <p:nvGrpSpPr>
@@ -792,7 +1013,7 @@
         <p:nvSpPr>
           <p:cNvPr id="2" name="Slide Image Placeholder 1"/>
           <p:cNvSpPr>
-            <a:spLocks noGrp="1" noRot="1" noChangeAspect="1"/>
+            <a:spLocks noGrp="1"/>
           </p:cNvSpPr>
           <p:nvPr>
             <p:ph type="sldImg" idx="2"/>
@@ -807,7 +1028,7 @@
             <a:spLocks noGrp="1"/>
           </p:cNvSpPr>
           <p:nvPr>
-            <p:ph type="body" sz="quarter" idx="3"/>
+            <p:ph type="body" idx="3" sz="quarter"/>
           </p:nvPr>
         </p:nvSpPr>
         <p:spPr/>
@@ -838,7 +1059,7 @@
             <a:spLocks noGrp="1"/>
           </p:cNvSpPr>
           <p:nvPr>
-            <p:ph type="sldNum" sz="quarter" idx="5"/>
+            <p:ph type="sldNum" idx="5" sz="quarter"/>
           </p:nvPr>
         </p:nvSpPr>
         <p:spPr/>
@@ -852,7 +1073,7 @@
 </file>
 
 <file path=ppt/notesSlides/notesSlide16.xml><?xml version="1.0" encoding="utf-8"?>
-<p:notes xmlns:a="http://schemas.openxmlformats.org/drawingml/2006/main" xmlns:r="http://schemas.openxmlformats.org/officeDocument/2006/relationships" xmlns:p="http://schemas.openxmlformats.org/presentationml/2006/main">
+<p:notes xmlns:a="http://schemas.openxmlformats.org/drawingml/2006/main" xmlns:p="http://schemas.openxmlformats.org/presentationml/2006/main" xmlns:r="http://schemas.openxmlformats.org/officeDocument/2006/relationships">
   <p:cSld>
     <p:spTree>
       <p:nvGrpSpPr>
@@ -872,7 +1093,7 @@
         <p:nvSpPr>
           <p:cNvPr id="2" name="Slide Image Placeholder 1"/>
           <p:cNvSpPr>
-            <a:spLocks noGrp="1" noRot="1" noChangeAspect="1"/>
+            <a:spLocks noGrp="1"/>
           </p:cNvSpPr>
           <p:nvPr>
             <p:ph type="sldImg" idx="2"/>
@@ -887,7 +1108,7 @@
             <a:spLocks noGrp="1"/>
           </p:cNvSpPr>
           <p:nvPr>
-            <p:ph type="body" sz="quarter" idx="3"/>
+            <p:ph type="body" idx="3" sz="quarter"/>
           </p:nvPr>
         </p:nvSpPr>
         <p:spPr/>
@@ -918,7 +1139,7 @@
             <a:spLocks noGrp="1"/>
           </p:cNvSpPr>
           <p:nvPr>
-            <p:ph type="sldNum" sz="quarter" idx="5"/>
+            <p:ph type="sldNum" idx="5" sz="quarter"/>
           </p:nvPr>
         </p:nvSpPr>
         <p:spPr/>
@@ -932,7 +1153,7 @@
 </file>
 
 <file path=ppt/notesSlides/notesSlide2.xml><?xml version="1.0" encoding="utf-8"?>
-<p:notes xmlns:a="http://schemas.openxmlformats.org/drawingml/2006/main" xmlns:r="http://schemas.openxmlformats.org/officeDocument/2006/relationships" xmlns:p="http://schemas.openxmlformats.org/presentationml/2006/main">
+<p:notes xmlns:a="http://schemas.openxmlformats.org/drawingml/2006/main" xmlns:p="http://schemas.openxmlformats.org/presentationml/2006/main" xmlns:r="http://schemas.openxmlformats.org/officeDocument/2006/relationships">
   <p:cSld>
     <p:spTree>
       <p:nvGrpSpPr>
@@ -952,7 +1173,7 @@
         <p:nvSpPr>
           <p:cNvPr id="2" name="Slide Image Placeholder 1"/>
           <p:cNvSpPr>
-            <a:spLocks noGrp="1" noRot="1" noChangeAspect="1"/>
+            <a:spLocks noGrp="1"/>
           </p:cNvSpPr>
           <p:nvPr>
             <p:ph type="sldImg" idx="2"/>
@@ -967,7 +1188,7 @@
             <a:spLocks noGrp="1"/>
           </p:cNvSpPr>
           <p:nvPr>
-            <p:ph type="body" sz="quarter" idx="3"/>
+            <p:ph type="body" idx="3" sz="quarter"/>
           </p:nvPr>
         </p:nvSpPr>
         <p:spPr/>
@@ -1003,7 +1224,7 @@
             <a:spLocks noGrp="1"/>
           </p:cNvSpPr>
           <p:nvPr>
-            <p:ph type="sldNum" sz="quarter" idx="5"/>
+            <p:ph type="sldNum" idx="5" sz="quarter"/>
           </p:nvPr>
         </p:nvSpPr>
         <p:spPr/>
@@ -1017,7 +1238,7 @@
 </file>
 
 <file path=ppt/notesSlides/notesSlide3.xml><?xml version="1.0" encoding="utf-8"?>
-<p:notes xmlns:a="http://schemas.openxmlformats.org/drawingml/2006/main" xmlns:r="http://schemas.openxmlformats.org/officeDocument/2006/relationships" xmlns:p="http://schemas.openxmlformats.org/presentationml/2006/main">
+<p:notes xmlns:a="http://schemas.openxmlformats.org/drawingml/2006/main" xmlns:p="http://schemas.openxmlformats.org/presentationml/2006/main" xmlns:r="http://schemas.openxmlformats.org/officeDocument/2006/relationships">
   <p:cSld>
     <p:spTree>
       <p:nvGrpSpPr>
@@ -1037,7 +1258,7 @@
         <p:nvSpPr>
           <p:cNvPr id="2" name="Slide Image Placeholder 1"/>
           <p:cNvSpPr>
-            <a:spLocks noGrp="1" noRot="1" noChangeAspect="1"/>
+            <a:spLocks noGrp="1"/>
           </p:cNvSpPr>
           <p:nvPr>
             <p:ph type="sldImg" idx="2"/>
@@ -1052,7 +1273,7 @@
             <a:spLocks noGrp="1"/>
           </p:cNvSpPr>
           <p:nvPr>
-            <p:ph type="body" sz="quarter" idx="3"/>
+            <p:ph type="body" idx="3" sz="quarter"/>
           </p:nvPr>
         </p:nvSpPr>
         <p:spPr/>
@@ -1088,7 +1309,7 @@
             <a:spLocks noGrp="1"/>
           </p:cNvSpPr>
           <p:nvPr>
-            <p:ph type="sldNum" sz="quarter" idx="5"/>
+            <p:ph type="sldNum" idx="5" sz="quarter"/>
           </p:nvPr>
         </p:nvSpPr>
         <p:spPr/>
@@ -1102,7 +1323,7 @@
 </file>
 
 <file path=ppt/notesSlides/notesSlide4.xml><?xml version="1.0" encoding="utf-8"?>
-<p:notes xmlns:a="http://schemas.openxmlformats.org/drawingml/2006/main" xmlns:r="http://schemas.openxmlformats.org/officeDocument/2006/relationships" xmlns:p="http://schemas.openxmlformats.org/presentationml/2006/main">
+<p:notes xmlns:a="http://schemas.openxmlformats.org/drawingml/2006/main" xmlns:p="http://schemas.openxmlformats.org/presentationml/2006/main" xmlns:r="http://schemas.openxmlformats.org/officeDocument/2006/relationships">
   <p:cSld>
     <p:spTree>
       <p:nvGrpSpPr>
@@ -1122,7 +1343,7 @@
         <p:nvSpPr>
           <p:cNvPr id="2" name="Slide Image Placeholder 1"/>
           <p:cNvSpPr>
-            <a:spLocks noGrp="1" noRot="1" noChangeAspect="1"/>
+            <a:spLocks noGrp="1"/>
           </p:cNvSpPr>
           <p:nvPr>
             <p:ph type="sldImg" idx="2"/>
@@ -1137,7 +1358,7 @@
             <a:spLocks noGrp="1"/>
           </p:cNvSpPr>
           <p:nvPr>
-            <p:ph type="body" sz="quarter" idx="3"/>
+            <p:ph type="body" idx="3" sz="quarter"/>
           </p:nvPr>
         </p:nvSpPr>
         <p:spPr/>
@@ -1173,7 +1394,7 @@
             <a:spLocks noGrp="1"/>
           </p:cNvSpPr>
           <p:nvPr>
-            <p:ph type="sldNum" sz="quarter" idx="5"/>
+            <p:ph type="sldNum" idx="5" sz="quarter"/>
           </p:nvPr>
         </p:nvSpPr>
         <p:spPr/>
@@ -1187,7 +1408,7 @@
 </file>
 
 <file path=ppt/notesSlides/notesSlide5.xml><?xml version="1.0" encoding="utf-8"?>
-<p:notes xmlns:a="http://schemas.openxmlformats.org/drawingml/2006/main" xmlns:r="http://schemas.openxmlformats.org/officeDocument/2006/relationships" xmlns:p="http://schemas.openxmlformats.org/presentationml/2006/main">
+<p:notes xmlns:a="http://schemas.openxmlformats.org/drawingml/2006/main" xmlns:p="http://schemas.openxmlformats.org/presentationml/2006/main" xmlns:r="http://schemas.openxmlformats.org/officeDocument/2006/relationships">
   <p:cSld>
     <p:spTree>
       <p:nvGrpSpPr>
@@ -1207,7 +1428,7 @@
         <p:nvSpPr>
           <p:cNvPr id="2" name="Slide Image Placeholder 1"/>
           <p:cNvSpPr>
-            <a:spLocks noGrp="1" noRot="1" noChangeAspect="1"/>
+            <a:spLocks noGrp="1"/>
           </p:cNvSpPr>
           <p:nvPr>
             <p:ph type="sldImg" idx="2"/>
@@ -1222,7 +1443,7 @@
             <a:spLocks noGrp="1"/>
           </p:cNvSpPr>
           <p:nvPr>
-            <p:ph type="body" sz="quarter" idx="3"/>
+            <p:ph type="body" idx="3" sz="quarter"/>
           </p:nvPr>
         </p:nvSpPr>
         <p:spPr/>
@@ -1258,7 +1479,7 @@
             <a:spLocks noGrp="1"/>
           </p:cNvSpPr>
           <p:nvPr>
-            <p:ph type="sldNum" sz="quarter" idx="5"/>
+            <p:ph type="sldNum" idx="5" sz="quarter"/>
           </p:nvPr>
         </p:nvSpPr>
         <p:spPr/>
@@ -1272,7 +1493,7 @@
 </file>
 
 <file path=ppt/notesSlides/notesSlide6.xml><?xml version="1.0" encoding="utf-8"?>
-<p:notes xmlns:a="http://schemas.openxmlformats.org/drawingml/2006/main" xmlns:r="http://schemas.openxmlformats.org/officeDocument/2006/relationships" xmlns:p="http://schemas.openxmlformats.org/presentationml/2006/main">
+<p:notes xmlns:a="http://schemas.openxmlformats.org/drawingml/2006/main" xmlns:p="http://schemas.openxmlformats.org/presentationml/2006/main" xmlns:r="http://schemas.openxmlformats.org/officeDocument/2006/relationships">
   <p:cSld>
     <p:spTree>
       <p:nvGrpSpPr>
@@ -1292,7 +1513,7 @@
         <p:nvSpPr>
           <p:cNvPr id="2" name="Slide Image Placeholder 1"/>
           <p:cNvSpPr>
-            <a:spLocks noGrp="1" noRot="1" noChangeAspect="1"/>
+            <a:spLocks noGrp="1"/>
           </p:cNvSpPr>
           <p:nvPr>
             <p:ph type="sldImg" idx="2"/>
@@ -1307,7 +1528,7 @@
             <a:spLocks noGrp="1"/>
           </p:cNvSpPr>
           <p:nvPr>
-            <p:ph type="body" sz="quarter" idx="3"/>
+            <p:ph type="body" idx="3" sz="quarter"/>
           </p:nvPr>
         </p:nvSpPr>
         <p:spPr/>
@@ -1321,7 +1542,17 @@
           </a:p>
           <a:p>
             <a:r>
-              <a:t>Ingestion: timeouts and 3 retries with backoff (D-47); HTTP 200 with no observations counts as a failure.</a:t>
+              <a:t>Ingestion: timeouts and 3 retries with backoff (D-47); HTTP 200 with no observations, or with a body that cannot be read, counts as a failure (D-97).</a:t>
+            </a:r>
+          </a:p>
+          <a:p>
+            <a:r>
+              <a:t>latest.json moves only after publish succeeded (D-96); publish moves all three layers or rolls back (D-98); a failed run is always written to run_summary.json (D-98).</a:t>
+            </a:r>
+          </a:p>
+          <a:p>
+            <a:r>
+              <a:t>These three came from an external review after submission (F-01..F-03); each was reproduced with a failing test first.</a:t>
             </a:r>
           </a:p>
           <a:p>
@@ -1348,7 +1579,7 @@
             <a:spLocks noGrp="1"/>
           </p:cNvSpPr>
           <p:nvPr>
-            <p:ph type="sldNum" sz="quarter" idx="5"/>
+            <p:ph type="sldNum" idx="5" sz="quarter"/>
           </p:nvPr>
         </p:nvSpPr>
         <p:spPr/>
@@ -1362,7 +1593,7 @@
 </file>
 
 <file path=ppt/notesSlides/notesSlide7.xml><?xml version="1.0" encoding="utf-8"?>
-<p:notes xmlns:a="http://schemas.openxmlformats.org/drawingml/2006/main" xmlns:r="http://schemas.openxmlformats.org/officeDocument/2006/relationships" xmlns:p="http://schemas.openxmlformats.org/presentationml/2006/main">
+<p:notes xmlns:a="http://schemas.openxmlformats.org/drawingml/2006/main" xmlns:p="http://schemas.openxmlformats.org/presentationml/2006/main" xmlns:r="http://schemas.openxmlformats.org/officeDocument/2006/relationships">
   <p:cSld>
     <p:spTree>
       <p:nvGrpSpPr>
@@ -1382,7 +1613,7 @@
         <p:nvSpPr>
           <p:cNvPr id="2" name="Slide Image Placeholder 1"/>
           <p:cNvSpPr>
-            <a:spLocks noGrp="1" noRot="1" noChangeAspect="1"/>
+            <a:spLocks noGrp="1"/>
           </p:cNvSpPr>
           <p:nvPr>
             <p:ph type="sldImg" idx="2"/>
@@ -1397,7 +1628,7 @@
             <a:spLocks noGrp="1"/>
           </p:cNvSpPr>
           <p:nvPr>
-            <p:ph type="body" sz="quarter" idx="3"/>
+            <p:ph type="body" idx="3" sz="quarter"/>
           </p:nvPr>
         </p:nvSpPr>
         <p:spPr/>
@@ -1428,7 +1659,7 @@
             <a:spLocks noGrp="1"/>
           </p:cNvSpPr>
           <p:nvPr>
-            <p:ph type="sldNum" sz="quarter" idx="5"/>
+            <p:ph type="sldNum" idx="5" sz="quarter"/>
           </p:nvPr>
         </p:nvSpPr>
         <p:spPr/>
@@ -1442,7 +1673,7 @@
 </file>
 
 <file path=ppt/notesSlides/notesSlide8.xml><?xml version="1.0" encoding="utf-8"?>
-<p:notes xmlns:a="http://schemas.openxmlformats.org/drawingml/2006/main" xmlns:r="http://schemas.openxmlformats.org/officeDocument/2006/relationships" xmlns:p="http://schemas.openxmlformats.org/presentationml/2006/main">
+<p:notes xmlns:a="http://schemas.openxmlformats.org/drawingml/2006/main" xmlns:p="http://schemas.openxmlformats.org/presentationml/2006/main" xmlns:r="http://schemas.openxmlformats.org/officeDocument/2006/relationships">
   <p:cSld>
     <p:spTree>
       <p:nvGrpSpPr>
@@ -1462,7 +1693,7 @@
         <p:nvSpPr>
           <p:cNvPr id="2" name="Slide Image Placeholder 1"/>
           <p:cNvSpPr>
-            <a:spLocks noGrp="1" noRot="1" noChangeAspect="1"/>
+            <a:spLocks noGrp="1"/>
           </p:cNvSpPr>
           <p:nvPr>
             <p:ph type="sldImg" idx="2"/>
@@ -1477,7 +1708,7 @@
             <a:spLocks noGrp="1"/>
           </p:cNvSpPr>
           <p:nvPr>
-            <p:ph type="body" sz="quarter" idx="3"/>
+            <p:ph type="body" idx="3" sz="quarter"/>
           </p:nvPr>
         </p:nvSpPr>
         <p:spPr/>
@@ -1518,7 +1749,7 @@
             <a:spLocks noGrp="1"/>
           </p:cNvSpPr>
           <p:nvPr>
-            <p:ph type="sldNum" sz="quarter" idx="5"/>
+            <p:ph type="sldNum" idx="5" sz="quarter"/>
           </p:nvPr>
         </p:nvSpPr>
         <p:spPr/>
@@ -1532,7 +1763,7 @@
 </file>
 
 <file path=ppt/notesSlides/notesSlide9.xml><?xml version="1.0" encoding="utf-8"?>
-<p:notes xmlns:a="http://schemas.openxmlformats.org/drawingml/2006/main" xmlns:r="http://schemas.openxmlformats.org/officeDocument/2006/relationships" xmlns:p="http://schemas.openxmlformats.org/presentationml/2006/main">
+<p:notes xmlns:a="http://schemas.openxmlformats.org/drawingml/2006/main" xmlns:p="http://schemas.openxmlformats.org/presentationml/2006/main" xmlns:r="http://schemas.openxmlformats.org/officeDocument/2006/relationships">
   <p:cSld>
     <p:spTree>
       <p:nvGrpSpPr>
@@ -1552,7 +1783,7 @@
         <p:nvSpPr>
           <p:cNvPr id="2" name="Slide Image Placeholder 1"/>
           <p:cNvSpPr>
-            <a:spLocks noGrp="1" noRot="1" noChangeAspect="1"/>
+            <a:spLocks noGrp="1"/>
           </p:cNvSpPr>
           <p:nvPr>
             <p:ph type="sldImg" idx="2"/>
@@ -1567,7 +1798,7 @@
             <a:spLocks noGrp="1"/>
           </p:cNvSpPr>
           <p:nvPr>
-            <p:ph type="body" sz="quarter" idx="3"/>
+            <p:ph type="body" idx="3" sz="quarter"/>
           </p:nvPr>
         </p:nvSpPr>
         <p:spPr/>
@@ -1603,7 +1834,7 @@
             <a:spLocks noGrp="1"/>
           </p:cNvSpPr>
           <p:nvPr>
-            <p:ph type="sldNum" sz="quarter" idx="5"/>
+            <p:ph type="sldNum" idx="5" sz="quarter"/>
           </p:nvPr>
         </p:nvSpPr>
         <p:spPr/>
@@ -1654,9 +1885,10 @@
           <a:lstStyle/>
           <a:p>
             <a:r>
-              <a:rPr lang="en-US"/>
+              <a:rPr lang="en-US" smtClean="0"/>
               <a:t>Click to edit Master title style</a:t>
             </a:r>
+            <a:endParaRPr lang="en-US"/>
           </a:p>
         </p:txBody>
       </p:sp>
@@ -1772,9 +2004,10 @@
           </a:lstStyle>
           <a:p>
             <a:r>
-              <a:rPr lang="en-US"/>
+              <a:rPr lang="en-US" smtClean="0"/>
               <a:t>Click to edit Master subtitle style</a:t>
             </a:r>
+            <a:endParaRPr lang="en-US"/>
           </a:p>
         </p:txBody>
       </p:sp>
@@ -1795,7 +2028,7 @@
           <a:p>
             <a:fld id="{5BCAD085-E8A6-8845-BD4E-CB4CCA059FC4}" type="datetimeFigureOut">
               <a:rPr lang="en-US" smtClean="0"/>
-              <a:t>9/30/2026</a:t>
+              <a:t>1/27/13</a:t>
             </a:fld>
             <a:endParaRPr lang="en-US"/>
           </a:p>
@@ -1889,9 +2122,10 @@
           <a:lstStyle/>
           <a:p>
             <a:r>
-              <a:rPr lang="en-US"/>
+              <a:rPr lang="en-US" smtClean="0"/>
               <a:t>Click to edit Master title style</a:t>
             </a:r>
+            <a:endParaRPr lang="en-US"/>
           </a:p>
         </p:txBody>
       </p:sp>
@@ -1912,37 +2146,38 @@
           <a:p>
             <a:pPr lvl="0"/>
             <a:r>
-              <a:rPr lang="en-US"/>
+              <a:rPr lang="en-US" smtClean="0"/>
               <a:t>Click to edit Master text styles</a:t>
             </a:r>
           </a:p>
           <a:p>
             <a:pPr lvl="1"/>
             <a:r>
-              <a:rPr lang="en-US"/>
+              <a:rPr lang="en-US" smtClean="0"/>
               <a:t>Second level</a:t>
             </a:r>
           </a:p>
           <a:p>
             <a:pPr lvl="2"/>
             <a:r>
-              <a:rPr lang="en-US"/>
+              <a:rPr lang="en-US" smtClean="0"/>
               <a:t>Third level</a:t>
             </a:r>
           </a:p>
           <a:p>
             <a:pPr lvl="3"/>
             <a:r>
-              <a:rPr lang="en-US"/>
+              <a:rPr lang="en-US" smtClean="0"/>
               <a:t>Fourth level</a:t>
             </a:r>
           </a:p>
           <a:p>
             <a:pPr lvl="4"/>
             <a:r>
-              <a:rPr lang="en-US"/>
+              <a:rPr lang="en-US" smtClean="0"/>
               <a:t>Fifth level</a:t>
             </a:r>
+            <a:endParaRPr lang="en-US"/>
           </a:p>
         </p:txBody>
       </p:sp>
@@ -1963,7 +2198,7 @@
           <a:p>
             <a:fld id="{5BCAD085-E8A6-8845-BD4E-CB4CCA059FC4}" type="datetimeFigureOut">
               <a:rPr lang="en-US" smtClean="0"/>
-              <a:t>9/30/2026</a:t>
+              <a:t>1/27/13</a:t>
             </a:fld>
             <a:endParaRPr lang="en-US"/>
           </a:p>
@@ -2062,9 +2297,10 @@
           <a:lstStyle/>
           <a:p>
             <a:r>
-              <a:rPr lang="en-US"/>
+              <a:rPr lang="en-US" smtClean="0"/>
               <a:t>Click to edit Master title style</a:t>
             </a:r>
+            <a:endParaRPr lang="en-US"/>
           </a:p>
         </p:txBody>
       </p:sp>
@@ -2090,37 +2326,38 @@
           <a:p>
             <a:pPr lvl="0"/>
             <a:r>
-              <a:rPr lang="en-US"/>
+              <a:rPr lang="en-US" smtClean="0"/>
               <a:t>Click to edit Master text styles</a:t>
             </a:r>
           </a:p>
           <a:p>
             <a:pPr lvl="1"/>
             <a:r>
-              <a:rPr lang="en-US"/>
+              <a:rPr lang="en-US" smtClean="0"/>
               <a:t>Second level</a:t>
             </a:r>
           </a:p>
           <a:p>
             <a:pPr lvl="2"/>
             <a:r>
-              <a:rPr lang="en-US"/>
+              <a:rPr lang="en-US" smtClean="0"/>
               <a:t>Third level</a:t>
             </a:r>
           </a:p>
           <a:p>
             <a:pPr lvl="3"/>
             <a:r>
-              <a:rPr lang="en-US"/>
+              <a:rPr lang="en-US" smtClean="0"/>
               <a:t>Fourth level</a:t>
             </a:r>
           </a:p>
           <a:p>
             <a:pPr lvl="4"/>
             <a:r>
-              <a:rPr lang="en-US"/>
+              <a:rPr lang="en-US" smtClean="0"/>
               <a:t>Fifth level</a:t>
             </a:r>
+            <a:endParaRPr lang="en-US"/>
           </a:p>
         </p:txBody>
       </p:sp>
@@ -2141,7 +2378,7 @@
           <a:p>
             <a:fld id="{5BCAD085-E8A6-8845-BD4E-CB4CCA059FC4}" type="datetimeFigureOut">
               <a:rPr lang="en-US" smtClean="0"/>
-              <a:t>9/30/2026</a:t>
+              <a:t>1/27/13</a:t>
             </a:fld>
             <a:endParaRPr lang="en-US"/>
           </a:p>
@@ -2235,9 +2472,10 @@
           <a:lstStyle/>
           <a:p>
             <a:r>
-              <a:rPr lang="en-US"/>
+              <a:rPr lang="en-US" smtClean="0"/>
               <a:t>Click to edit Master title style</a:t>
             </a:r>
+            <a:endParaRPr lang="en-US"/>
           </a:p>
         </p:txBody>
       </p:sp>
@@ -2258,37 +2496,38 @@
           <a:p>
             <a:pPr lvl="0"/>
             <a:r>
-              <a:rPr lang="en-US"/>
+              <a:rPr lang="en-US" smtClean="0"/>
               <a:t>Click to edit Master text styles</a:t>
             </a:r>
           </a:p>
           <a:p>
             <a:pPr lvl="1"/>
             <a:r>
-              <a:rPr lang="en-US"/>
+              <a:rPr lang="en-US" smtClean="0"/>
               <a:t>Second level</a:t>
             </a:r>
           </a:p>
           <a:p>
             <a:pPr lvl="2"/>
             <a:r>
-              <a:rPr lang="en-US"/>
+              <a:rPr lang="en-US" smtClean="0"/>
               <a:t>Third level</a:t>
             </a:r>
           </a:p>
           <a:p>
             <a:pPr lvl="3"/>
             <a:r>
-              <a:rPr lang="en-US"/>
+              <a:rPr lang="en-US" smtClean="0"/>
               <a:t>Fourth level</a:t>
             </a:r>
           </a:p>
           <a:p>
             <a:pPr lvl="4"/>
             <a:r>
-              <a:rPr lang="en-US"/>
+              <a:rPr lang="en-US" smtClean="0"/>
               <a:t>Fifth level</a:t>
             </a:r>
+            <a:endParaRPr lang="en-US"/>
           </a:p>
         </p:txBody>
       </p:sp>
@@ -2309,7 +2548,7 @@
           <a:p>
             <a:fld id="{5BCAD085-E8A6-8845-BD4E-CB4CCA059FC4}" type="datetimeFigureOut">
               <a:rPr lang="en-US" smtClean="0"/>
-              <a:t>9/30/2026</a:t>
+              <a:t>1/27/13</a:t>
             </a:fld>
             <a:endParaRPr lang="en-US"/>
           </a:p>
@@ -2412,9 +2651,10 @@
           </a:lstStyle>
           <a:p>
             <a:r>
-              <a:rPr lang="en-US"/>
+              <a:rPr lang="en-US" smtClean="0"/>
               <a:t>Click to edit Master title style</a:t>
             </a:r>
+            <a:endParaRPr lang="en-US"/>
           </a:p>
         </p:txBody>
       </p:sp>
@@ -2531,7 +2771,7 @@
           <a:p>
             <a:pPr lvl="0"/>
             <a:r>
-              <a:rPr lang="en-US"/>
+              <a:rPr lang="en-US" smtClean="0"/>
               <a:t>Click to edit Master text styles</a:t>
             </a:r>
           </a:p>
@@ -2554,7 +2794,7 @@
           <a:p>
             <a:fld id="{5BCAD085-E8A6-8845-BD4E-CB4CCA059FC4}" type="datetimeFigureOut">
               <a:rPr lang="en-US" smtClean="0"/>
-              <a:t>9/30/2026</a:t>
+              <a:t>1/27/13</a:t>
             </a:fld>
             <a:endParaRPr lang="en-US"/>
           </a:p>
@@ -2648,9 +2888,10 @@
           <a:lstStyle/>
           <a:p>
             <a:r>
-              <a:rPr lang="en-US"/>
+              <a:rPr lang="en-US" smtClean="0"/>
               <a:t>Click to edit Master title style</a:t>
             </a:r>
+            <a:endParaRPr lang="en-US"/>
           </a:p>
         </p:txBody>
       </p:sp>
@@ -2704,37 +2945,38 @@
           <a:p>
             <a:pPr lvl="0"/>
             <a:r>
-              <a:rPr lang="en-US"/>
+              <a:rPr lang="en-US" smtClean="0"/>
               <a:t>Click to edit Master text styles</a:t>
             </a:r>
           </a:p>
           <a:p>
             <a:pPr lvl="1"/>
             <a:r>
-              <a:rPr lang="en-US"/>
+              <a:rPr lang="en-US" smtClean="0"/>
               <a:t>Second level</a:t>
             </a:r>
           </a:p>
           <a:p>
             <a:pPr lvl="2"/>
             <a:r>
-              <a:rPr lang="en-US"/>
+              <a:rPr lang="en-US" smtClean="0"/>
               <a:t>Third level</a:t>
             </a:r>
           </a:p>
           <a:p>
             <a:pPr lvl="3"/>
             <a:r>
-              <a:rPr lang="en-US"/>
+              <a:rPr lang="en-US" smtClean="0"/>
               <a:t>Fourth level</a:t>
             </a:r>
           </a:p>
           <a:p>
             <a:pPr lvl="4"/>
             <a:r>
-              <a:rPr lang="en-US"/>
+              <a:rPr lang="en-US" smtClean="0"/>
               <a:t>Fifth level</a:t>
             </a:r>
+            <a:endParaRPr lang="en-US"/>
           </a:p>
         </p:txBody>
       </p:sp>
@@ -2788,37 +3030,38 @@
           <a:p>
             <a:pPr lvl="0"/>
             <a:r>
-              <a:rPr lang="en-US"/>
+              <a:rPr lang="en-US" smtClean="0"/>
               <a:t>Click to edit Master text styles</a:t>
             </a:r>
           </a:p>
           <a:p>
             <a:pPr lvl="1"/>
             <a:r>
-              <a:rPr lang="en-US"/>
+              <a:rPr lang="en-US" smtClean="0"/>
               <a:t>Second level</a:t>
             </a:r>
           </a:p>
           <a:p>
             <a:pPr lvl="2"/>
             <a:r>
-              <a:rPr lang="en-US"/>
+              <a:rPr lang="en-US" smtClean="0"/>
               <a:t>Third level</a:t>
             </a:r>
           </a:p>
           <a:p>
             <a:pPr lvl="3"/>
             <a:r>
-              <a:rPr lang="en-US"/>
+              <a:rPr lang="en-US" smtClean="0"/>
               <a:t>Fourth level</a:t>
             </a:r>
           </a:p>
           <a:p>
             <a:pPr lvl="4"/>
             <a:r>
-              <a:rPr lang="en-US"/>
+              <a:rPr lang="en-US" smtClean="0"/>
               <a:t>Fifth level</a:t>
             </a:r>
+            <a:endParaRPr lang="en-US"/>
           </a:p>
         </p:txBody>
       </p:sp>
@@ -2839,7 +3082,7 @@
           <a:p>
             <a:fld id="{5BCAD085-E8A6-8845-BD4E-CB4CCA059FC4}" type="datetimeFigureOut">
               <a:rPr lang="en-US" smtClean="0"/>
-              <a:t>9/30/2026</a:t>
+              <a:t>1/27/13</a:t>
             </a:fld>
             <a:endParaRPr lang="en-US"/>
           </a:p>
@@ -2937,9 +3180,10 @@
           </a:lstStyle>
           <a:p>
             <a:r>
-              <a:rPr lang="en-US"/>
+              <a:rPr lang="en-US" smtClean="0"/>
               <a:t>Click to edit Master title style</a:t>
             </a:r>
+            <a:endParaRPr lang="en-US"/>
           </a:p>
         </p:txBody>
       </p:sp>
@@ -3002,7 +3246,7 @@
           <a:p>
             <a:pPr lvl="0"/>
             <a:r>
-              <a:rPr lang="en-US"/>
+              <a:rPr lang="en-US" smtClean="0"/>
               <a:t>Click to edit Master text styles</a:t>
             </a:r>
           </a:p>
@@ -3058,37 +3302,38 @@
           <a:p>
             <a:pPr lvl="0"/>
             <a:r>
-              <a:rPr lang="en-US"/>
+              <a:rPr lang="en-US" smtClean="0"/>
               <a:t>Click to edit Master text styles</a:t>
             </a:r>
           </a:p>
           <a:p>
             <a:pPr lvl="1"/>
             <a:r>
-              <a:rPr lang="en-US"/>
+              <a:rPr lang="en-US" smtClean="0"/>
               <a:t>Second level</a:t>
             </a:r>
           </a:p>
           <a:p>
             <a:pPr lvl="2"/>
             <a:r>
-              <a:rPr lang="en-US"/>
+              <a:rPr lang="en-US" smtClean="0"/>
               <a:t>Third level</a:t>
             </a:r>
           </a:p>
           <a:p>
             <a:pPr lvl="3"/>
             <a:r>
-              <a:rPr lang="en-US"/>
+              <a:rPr lang="en-US" smtClean="0"/>
               <a:t>Fourth level</a:t>
             </a:r>
           </a:p>
           <a:p>
             <a:pPr lvl="4"/>
             <a:r>
-              <a:rPr lang="en-US"/>
+              <a:rPr lang="en-US" smtClean="0"/>
               <a:t>Fifth level</a:t>
             </a:r>
+            <a:endParaRPr lang="en-US"/>
           </a:p>
         </p:txBody>
       </p:sp>
@@ -3151,7 +3396,7 @@
           <a:p>
             <a:pPr lvl="0"/>
             <a:r>
-              <a:rPr lang="en-US"/>
+              <a:rPr lang="en-US" smtClean="0"/>
               <a:t>Click to edit Master text styles</a:t>
             </a:r>
           </a:p>
@@ -3207,37 +3452,38 @@
           <a:p>
             <a:pPr lvl="0"/>
             <a:r>
-              <a:rPr lang="en-US"/>
+              <a:rPr lang="en-US" smtClean="0"/>
               <a:t>Click to edit Master text styles</a:t>
             </a:r>
           </a:p>
           <a:p>
             <a:pPr lvl="1"/>
             <a:r>
-              <a:rPr lang="en-US"/>
+              <a:rPr lang="en-US" smtClean="0"/>
               <a:t>Second level</a:t>
             </a:r>
           </a:p>
           <a:p>
             <a:pPr lvl="2"/>
             <a:r>
-              <a:rPr lang="en-US"/>
+              <a:rPr lang="en-US" smtClean="0"/>
               <a:t>Third level</a:t>
             </a:r>
           </a:p>
           <a:p>
             <a:pPr lvl="3"/>
             <a:r>
-              <a:rPr lang="en-US"/>
+              <a:rPr lang="en-US" smtClean="0"/>
               <a:t>Fourth level</a:t>
             </a:r>
           </a:p>
           <a:p>
             <a:pPr lvl="4"/>
             <a:r>
-              <a:rPr lang="en-US"/>
+              <a:rPr lang="en-US" smtClean="0"/>
               <a:t>Fifth level</a:t>
             </a:r>
+            <a:endParaRPr lang="en-US"/>
           </a:p>
         </p:txBody>
       </p:sp>
@@ -3258,7 +3504,7 @@
           <a:p>
             <a:fld id="{5BCAD085-E8A6-8845-BD4E-CB4CCA059FC4}" type="datetimeFigureOut">
               <a:rPr lang="en-US" smtClean="0"/>
-              <a:t>9/30/2026</a:t>
+              <a:t>1/27/13</a:t>
             </a:fld>
             <a:endParaRPr lang="en-US"/>
           </a:p>
@@ -3352,9 +3598,10 @@
           <a:lstStyle/>
           <a:p>
             <a:r>
-              <a:rPr lang="en-US"/>
+              <a:rPr lang="en-US" smtClean="0"/>
               <a:t>Click to edit Master title style</a:t>
             </a:r>
+            <a:endParaRPr lang="en-US"/>
           </a:p>
         </p:txBody>
       </p:sp>
@@ -3375,7 +3622,7 @@
           <a:p>
             <a:fld id="{5BCAD085-E8A6-8845-BD4E-CB4CCA059FC4}" type="datetimeFigureOut">
               <a:rPr lang="en-US" smtClean="0"/>
-              <a:t>9/30/2026</a:t>
+              <a:t>1/27/13</a:t>
             </a:fld>
             <a:endParaRPr lang="en-US"/>
           </a:p>
@@ -3470,7 +3717,7 @@
           <a:p>
             <a:fld id="{5BCAD085-E8A6-8845-BD4E-CB4CCA059FC4}" type="datetimeFigureOut">
               <a:rPr lang="en-US" smtClean="0"/>
-              <a:t>9/30/2026</a:t>
+              <a:t>1/27/13</a:t>
             </a:fld>
             <a:endParaRPr lang="en-US"/>
           </a:p>
@@ -3573,9 +3820,10 @@
           </a:lstStyle>
           <a:p>
             <a:r>
-              <a:rPr lang="en-US"/>
+              <a:rPr lang="en-US" smtClean="0"/>
               <a:t>Click to edit Master title style</a:t>
             </a:r>
+            <a:endParaRPr lang="en-US"/>
           </a:p>
         </p:txBody>
       </p:sp>
@@ -3629,37 +3877,38 @@
           <a:p>
             <a:pPr lvl="0"/>
             <a:r>
-              <a:rPr lang="en-US"/>
+              <a:rPr lang="en-US" smtClean="0"/>
               <a:t>Click to edit Master text styles</a:t>
             </a:r>
           </a:p>
           <a:p>
             <a:pPr lvl="1"/>
             <a:r>
-              <a:rPr lang="en-US"/>
+              <a:rPr lang="en-US" smtClean="0"/>
               <a:t>Second level</a:t>
             </a:r>
           </a:p>
           <a:p>
             <a:pPr lvl="2"/>
             <a:r>
-              <a:rPr lang="en-US"/>
+              <a:rPr lang="en-US" smtClean="0"/>
               <a:t>Third level</a:t>
             </a:r>
           </a:p>
           <a:p>
             <a:pPr lvl="3"/>
             <a:r>
-              <a:rPr lang="en-US"/>
+              <a:rPr lang="en-US" smtClean="0"/>
               <a:t>Fourth level</a:t>
             </a:r>
           </a:p>
           <a:p>
             <a:pPr lvl="4"/>
             <a:r>
-              <a:rPr lang="en-US"/>
+              <a:rPr lang="en-US" smtClean="0"/>
               <a:t>Fifth level</a:t>
             </a:r>
+            <a:endParaRPr lang="en-US"/>
           </a:p>
         </p:txBody>
       </p:sp>
@@ -3722,7 +3971,7 @@
           <a:p>
             <a:pPr lvl="0"/>
             <a:r>
-              <a:rPr lang="en-US"/>
+              <a:rPr lang="en-US" smtClean="0"/>
               <a:t>Click to edit Master text styles</a:t>
             </a:r>
           </a:p>
@@ -3745,7 +3994,7 @@
           <a:p>
             <a:fld id="{5BCAD085-E8A6-8845-BD4E-CB4CCA059FC4}" type="datetimeFigureOut">
               <a:rPr lang="en-US" smtClean="0"/>
-              <a:t>9/30/2026</a:t>
+              <a:t>1/27/13</a:t>
             </a:fld>
             <a:endParaRPr lang="en-US"/>
           </a:p>
@@ -3848,9 +4097,10 @@
           </a:lstStyle>
           <a:p>
             <a:r>
-              <a:rPr lang="en-US"/>
+              <a:rPr lang="en-US" smtClean="0"/>
               <a:t>Click to edit Master title style</a:t>
             </a:r>
+            <a:endParaRPr lang="en-US"/>
           </a:p>
         </p:txBody>
       </p:sp>
@@ -3974,7 +4224,7 @@
           <a:p>
             <a:pPr lvl="0"/>
             <a:r>
-              <a:rPr lang="en-US"/>
+              <a:rPr lang="en-US" smtClean="0"/>
               <a:t>Click to edit Master text styles</a:t>
             </a:r>
           </a:p>
@@ -3997,7 +4247,7 @@
           <a:p>
             <a:fld id="{5BCAD085-E8A6-8845-BD4E-CB4CCA059FC4}" type="datetimeFigureOut">
               <a:rPr lang="en-US" smtClean="0"/>
-              <a:t>9/30/2026</a:t>
+              <a:t>1/27/13</a:t>
             </a:fld>
             <a:endParaRPr lang="en-US"/>
           </a:p>
@@ -4106,9 +4356,10 @@
           <a:lstStyle/>
           <a:p>
             <a:r>
-              <a:rPr lang="en-US"/>
+              <a:rPr lang="en-US" smtClean="0"/>
               <a:t>Click to edit Master title style</a:t>
             </a:r>
+            <a:endParaRPr lang="en-US"/>
           </a:p>
         </p:txBody>
       </p:sp>
@@ -4139,37 +4390,38 @@
           <a:p>
             <a:pPr lvl="0"/>
             <a:r>
-              <a:rPr lang="en-US"/>
+              <a:rPr lang="en-US" smtClean="0"/>
               <a:t>Click to edit Master text styles</a:t>
             </a:r>
           </a:p>
           <a:p>
             <a:pPr lvl="1"/>
             <a:r>
-              <a:rPr lang="en-US"/>
+              <a:rPr lang="en-US" smtClean="0"/>
               <a:t>Second level</a:t>
             </a:r>
           </a:p>
           <a:p>
             <a:pPr lvl="2"/>
             <a:r>
-              <a:rPr lang="en-US"/>
+              <a:rPr lang="en-US" smtClean="0"/>
               <a:t>Third level</a:t>
             </a:r>
           </a:p>
           <a:p>
             <a:pPr lvl="3"/>
             <a:r>
-              <a:rPr lang="en-US"/>
+              <a:rPr lang="en-US" smtClean="0"/>
               <a:t>Fourth level</a:t>
             </a:r>
           </a:p>
           <a:p>
             <a:pPr lvl="4"/>
             <a:r>
-              <a:rPr lang="en-US"/>
+              <a:rPr lang="en-US" smtClean="0"/>
               <a:t>Fifth level</a:t>
             </a:r>
+            <a:endParaRPr lang="en-US"/>
           </a:p>
         </p:txBody>
       </p:sp>
@@ -4208,7 +4460,7 @@
           <a:p>
             <a:fld id="{5BCAD085-E8A6-8845-BD4E-CB4CCA059FC4}" type="datetimeFigureOut">
               <a:rPr lang="en-US" smtClean="0"/>
-              <a:t>9/30/2026</a:t>
+              <a:t>1/27/13</a:t>
             </a:fld>
             <a:endParaRPr lang="en-US"/>
           </a:p>
@@ -4567,7 +4819,7 @@
 </file>
 
 <file path=ppt/slides/slide1.xml><?xml version="1.0" encoding="utf-8"?>
-<p:sld xmlns:a="http://schemas.openxmlformats.org/drawingml/2006/main" xmlns:r="http://schemas.openxmlformats.org/officeDocument/2006/relationships" xmlns:p="http://schemas.openxmlformats.org/presentationml/2006/main">
+<p:sld xmlns:a="http://schemas.openxmlformats.org/drawingml/2006/main" xmlns:p="http://schemas.openxmlformats.org/presentationml/2006/main" xmlns:r="http://schemas.openxmlformats.org/officeDocument/2006/relationships">
   <p:cSld>
     <p:bg>
       <p:bgPr>
@@ -4583,14 +4835,7 @@
         <p:cNvGrpSpPr/>
         <p:nvPr/>
       </p:nvGrpSpPr>
-      <p:grpSpPr>
-        <a:xfrm>
-          <a:off x="0" y="0"/>
-          <a:ext cx="0" cy="0"/>
-          <a:chOff x="0" y="0"/>
-          <a:chExt cx="0" cy="0"/>
-        </a:xfrm>
-      </p:grpSpPr>
+      <p:grpSpPr/>
       <p:sp>
         <p:nvSpPr>
           <p:cNvPr id="2" name="TextBox 1"/>
@@ -4608,7 +4853,7 @@
           <a:noFill/>
         </p:spPr>
         <p:txBody>
-          <a:bodyPr wrap="square" lIns="18288" tIns="18288" rIns="18288" bIns="18288" anchor="t">
+          <a:bodyPr wrap="square" anchor="t" lIns="18288" rIns="18288" tIns="18288" bIns="18288">
             <a:spAutoFit/>
           </a:bodyPr>
           <a:lstStyle/>
@@ -4647,7 +4892,7 @@
           <a:noFill/>
         </p:spPr>
         <p:txBody>
-          <a:bodyPr wrap="square" lIns="18288" tIns="18288" rIns="18288" bIns="18288" anchor="t">
+          <a:bodyPr wrap="square" anchor="t" lIns="18288" rIns="18288" tIns="18288" bIns="18288">
             <a:spAutoFit/>
           </a:bodyPr>
           <a:lstStyle/>
@@ -4686,7 +4931,7 @@
           <a:noFill/>
         </p:spPr>
         <p:txBody>
-          <a:bodyPr wrap="square" lIns="18288" tIns="18288" rIns="18288" bIns="18288" anchor="t">
+          <a:bodyPr wrap="square" anchor="t" lIns="18288" rIns="18288" tIns="18288" bIns="18288">
             <a:spAutoFit/>
           </a:bodyPr>
           <a:lstStyle/>
@@ -4725,7 +4970,7 @@
           <a:noFill/>
         </p:spPr>
         <p:txBody>
-          <a:bodyPr wrap="square" lIns="18288" tIns="18288" rIns="18288" bIns="18288" anchor="t">
+          <a:bodyPr wrap="square" anchor="t" lIns="18288" rIns="18288" tIns="18288" bIns="18288">
             <a:spAutoFit/>
           </a:bodyPr>
           <a:lstStyle/>
@@ -4764,7 +5009,7 @@
           <a:noFill/>
         </p:spPr>
         <p:txBody>
-          <a:bodyPr wrap="square" lIns="18288" tIns="18288" rIns="18288" bIns="18288" anchor="t">
+          <a:bodyPr wrap="square" anchor="t" lIns="18288" rIns="18288" tIns="18288" bIns="18288">
             <a:spAutoFit/>
           </a:bodyPr>
           <a:lstStyle/>
@@ -4803,7 +5048,7 @@
           <a:noFill/>
         </p:spPr>
         <p:txBody>
-          <a:bodyPr wrap="square" lIns="18288" tIns="18288" rIns="18288" bIns="18288" anchor="t">
+          <a:bodyPr wrap="square" anchor="t" lIns="18288" rIns="18288" tIns="18288" bIns="18288">
             <a:spAutoFit/>
           </a:bodyPr>
           <a:lstStyle/>
@@ -4864,11 +5109,10 @@
           </a:fontRef>
         </p:style>
         <p:txBody>
-          <a:bodyPr wrap="square" lIns="109728" tIns="54864" rIns="109728" bIns="54864" rtlCol="0" anchor="ctr"/>
+          <a:bodyPr rtlCol="0" anchor="ctr" wrap="square" lIns="109728" rIns="109728" tIns="54864" bIns="54864"/>
           <a:lstStyle/>
           <a:p>
             <a:pPr algn="ctr"/>
-            <a:endParaRPr/>
           </a:p>
         </p:txBody>
       </p:sp>
@@ -4889,7 +5133,7 @@
           <a:noFill/>
         </p:spPr>
         <p:txBody>
-          <a:bodyPr wrap="square" lIns="18288" tIns="18288" rIns="18288" bIns="18288" anchor="t">
+          <a:bodyPr wrap="square" anchor="t" lIns="18288" rIns="18288" tIns="18288" bIns="18288">
             <a:spAutoFit/>
           </a:bodyPr>
           <a:lstStyle/>
@@ -4928,7 +5172,7 @@
           <a:noFill/>
         </p:spPr>
         <p:txBody>
-          <a:bodyPr wrap="square" lIns="18288" tIns="18288" rIns="18288" bIns="18288" anchor="t">
+          <a:bodyPr wrap="square" anchor="t" lIns="18288" rIns="18288" tIns="18288" bIns="18288">
             <a:spAutoFit/>
           </a:bodyPr>
           <a:lstStyle/>
@@ -5002,7 +5246,7 @@
           <a:noFill/>
         </p:spPr>
         <p:txBody>
-          <a:bodyPr wrap="square" lIns="18288" tIns="18288" rIns="18288" bIns="18288" anchor="t">
+          <a:bodyPr wrap="square" anchor="t" lIns="18288" rIns="18288" tIns="18288" bIns="18288">
             <a:spAutoFit/>
           </a:bodyPr>
           <a:lstStyle/>
@@ -5041,7 +5285,7 @@
           <a:noFill/>
         </p:spPr>
         <p:txBody>
-          <a:bodyPr wrap="square" lIns="18288" tIns="18288" rIns="18288" bIns="18288" anchor="t">
+          <a:bodyPr wrap="square" anchor="t" lIns="18288" rIns="18288" tIns="18288" bIns="18288">
             <a:spAutoFit/>
           </a:bodyPr>
           <a:lstStyle/>
@@ -5115,7 +5359,7 @@
           <a:noFill/>
         </p:spPr>
         <p:txBody>
-          <a:bodyPr wrap="square" lIns="18288" tIns="18288" rIns="18288" bIns="18288" anchor="t">
+          <a:bodyPr wrap="square" anchor="t" lIns="18288" rIns="18288" tIns="18288" bIns="18288">
             <a:spAutoFit/>
           </a:bodyPr>
           <a:lstStyle/>
@@ -5154,7 +5398,7 @@
           <a:noFill/>
         </p:spPr>
         <p:txBody>
-          <a:bodyPr wrap="square" lIns="18288" tIns="18288" rIns="18288" bIns="18288" anchor="t">
+          <a:bodyPr wrap="square" anchor="t" lIns="18288" rIns="18288" tIns="18288" bIns="18288">
             <a:spAutoFit/>
           </a:bodyPr>
           <a:lstStyle/>
@@ -5228,7 +5472,7 @@
           <a:noFill/>
         </p:spPr>
         <p:txBody>
-          <a:bodyPr wrap="square" lIns="18288" tIns="18288" rIns="18288" bIns="18288" anchor="t">
+          <a:bodyPr wrap="square" anchor="t" lIns="18288" rIns="18288" tIns="18288" bIns="18288">
             <a:spAutoFit/>
           </a:bodyPr>
           <a:lstStyle/>
@@ -5267,7 +5511,7 @@
           <a:noFill/>
         </p:spPr>
         <p:txBody>
-          <a:bodyPr wrap="square" lIns="18288" tIns="18288" rIns="18288" bIns="18288" anchor="t">
+          <a:bodyPr wrap="square" anchor="t" lIns="18288" rIns="18288" tIns="18288" bIns="18288">
             <a:spAutoFit/>
           </a:bodyPr>
           <a:lstStyle/>
@@ -5306,7 +5550,7 @@
           <a:noFill/>
         </p:spPr>
         <p:txBody>
-          <a:bodyPr wrap="square" lIns="18288" tIns="18288" rIns="18288" bIns="18288" anchor="t">
+          <a:bodyPr wrap="square" anchor="t" lIns="18288" rIns="18288" tIns="18288" bIns="18288">
             <a:spAutoFit/>
           </a:bodyPr>
           <a:lstStyle/>
@@ -5337,7 +5581,7 @@
 </file>
 
 <file path=ppt/slides/slide10.xml><?xml version="1.0" encoding="utf-8"?>
-<p:sld xmlns:a="http://schemas.openxmlformats.org/drawingml/2006/main" xmlns:r="http://schemas.openxmlformats.org/officeDocument/2006/relationships" xmlns:p="http://schemas.openxmlformats.org/presentationml/2006/main">
+<p:sld xmlns:a="http://schemas.openxmlformats.org/drawingml/2006/main" xmlns:p="http://schemas.openxmlformats.org/presentationml/2006/main" xmlns:r="http://schemas.openxmlformats.org/officeDocument/2006/relationships">
   <p:cSld>
     <p:bg>
       <p:bgPr>
@@ -5353,14 +5597,7 @@
         <p:cNvGrpSpPr/>
         <p:nvPr/>
       </p:nvGrpSpPr>
-      <p:grpSpPr>
-        <a:xfrm>
-          <a:off x="0" y="0"/>
-          <a:ext cx="0" cy="0"/>
-          <a:chOff x="0" y="0"/>
-          <a:chExt cx="0" cy="0"/>
-        </a:xfrm>
-      </p:grpSpPr>
+      <p:grpSpPr/>
       <p:sp>
         <p:nvSpPr>
           <p:cNvPr id="2" name="TextBox 1"/>
@@ -5378,7 +5615,7 @@
           <a:noFill/>
         </p:spPr>
         <p:txBody>
-          <a:bodyPr wrap="square" lIns="18288" tIns="18288" rIns="18288" bIns="18288" anchor="t">
+          <a:bodyPr wrap="square" anchor="t" lIns="18288" rIns="18288" tIns="18288" bIns="18288">
             <a:spAutoFit/>
           </a:bodyPr>
           <a:lstStyle/>
@@ -5417,7 +5654,7 @@
           <a:noFill/>
         </p:spPr>
         <p:txBody>
-          <a:bodyPr wrap="square" lIns="18288" tIns="18288" rIns="18288" bIns="18288" anchor="t">
+          <a:bodyPr wrap="square" anchor="t" lIns="18288" rIns="18288" tIns="18288" bIns="18288">
             <a:spAutoFit/>
           </a:bodyPr>
           <a:lstStyle/>
@@ -5456,7 +5693,7 @@
           <a:noFill/>
         </p:spPr>
         <p:txBody>
-          <a:bodyPr wrap="square" lIns="18288" tIns="18288" rIns="18288" bIns="18288" anchor="t">
+          <a:bodyPr wrap="square" anchor="t" lIns="18288" rIns="18288" tIns="18288" bIns="18288">
             <a:spAutoFit/>
           </a:bodyPr>
           <a:lstStyle/>
@@ -5519,11 +5756,10 @@
           </a:fontRef>
         </p:style>
         <p:txBody>
-          <a:bodyPr wrap="square" lIns="109728" tIns="54864" rIns="109728" bIns="54864" rtlCol="0" anchor="ctr"/>
+          <a:bodyPr rtlCol="0" anchor="ctr" wrap="square" lIns="109728" rIns="109728" tIns="54864" bIns="54864"/>
           <a:lstStyle/>
           <a:p>
             <a:pPr algn="ctr"/>
-            <a:endParaRPr/>
           </a:p>
         </p:txBody>
       </p:sp>
@@ -5536,7 +5772,7 @@
           <p:nvPr/>
         </p:nvPicPr>
         <p:blipFill>
-          <a:blip r:embed="rId3"/>
+          <a:blip r:embed="rId2"/>
           <a:stretch>
             <a:fillRect/>
           </a:stretch>
@@ -5592,7 +5828,7 @@
           </a:fontRef>
         </p:style>
         <p:txBody>
-          <a:bodyPr wrap="square" lIns="109728" tIns="54864" rIns="109728" bIns="54864" rtlCol="0" anchor="ctr"/>
+          <a:bodyPr rtlCol="0" anchor="ctr" wrap="square" lIns="109728" rIns="109728" tIns="54864" bIns="54864"/>
           <a:lstStyle/>
           <a:p>
             <a:pPr algn="l">
@@ -5669,7 +5905,7 @@
           </a:fontRef>
         </p:style>
         <p:txBody>
-          <a:bodyPr wrap="square" lIns="109728" tIns="54864" rIns="109728" bIns="54864" rtlCol="0" anchor="ctr"/>
+          <a:bodyPr rtlCol="0" anchor="ctr" wrap="square" lIns="109728" rIns="109728" tIns="54864" bIns="54864"/>
           <a:lstStyle/>
           <a:p>
             <a:pPr algn="l">
@@ -5746,7 +5982,7 @@
           </a:fontRef>
         </p:style>
         <p:txBody>
-          <a:bodyPr wrap="square" lIns="109728" tIns="54864" rIns="109728" bIns="54864" rtlCol="0" anchor="ctr"/>
+          <a:bodyPr rtlCol="0" anchor="ctr" wrap="square" lIns="109728" rIns="109728" tIns="54864" bIns="54864"/>
           <a:lstStyle/>
           <a:p>
             <a:pPr algn="l">
@@ -5823,7 +6059,7 @@
           </a:fontRef>
         </p:style>
         <p:txBody>
-          <a:bodyPr wrap="square" lIns="109728" tIns="54864" rIns="109728" bIns="54864" rtlCol="0" anchor="ctr"/>
+          <a:bodyPr rtlCol="0" anchor="ctr" wrap="square" lIns="109728" rIns="109728" tIns="54864" bIns="54864"/>
           <a:lstStyle/>
           <a:p>
             <a:pPr algn="l">
@@ -5876,7 +6112,7 @@
           <a:noFill/>
         </p:spPr>
         <p:txBody>
-          <a:bodyPr wrap="square" lIns="18288" tIns="18288" rIns="18288" bIns="18288" anchor="t">
+          <a:bodyPr wrap="square" anchor="t" lIns="18288" rIns="18288" tIns="18288" bIns="18288">
             <a:spAutoFit/>
           </a:bodyPr>
           <a:lstStyle/>
@@ -5907,7 +6143,7 @@
 </file>
 
 <file path=ppt/slides/slide11.xml><?xml version="1.0" encoding="utf-8"?>
-<p:sld xmlns:a="http://schemas.openxmlformats.org/drawingml/2006/main" xmlns:r="http://schemas.openxmlformats.org/officeDocument/2006/relationships" xmlns:p="http://schemas.openxmlformats.org/presentationml/2006/main">
+<p:sld xmlns:a="http://schemas.openxmlformats.org/drawingml/2006/main" xmlns:p="http://schemas.openxmlformats.org/presentationml/2006/main" xmlns:r="http://schemas.openxmlformats.org/officeDocument/2006/relationships">
   <p:cSld>
     <p:bg>
       <p:bgPr>
@@ -5923,14 +6159,7 @@
         <p:cNvGrpSpPr/>
         <p:nvPr/>
       </p:nvGrpSpPr>
-      <p:grpSpPr>
-        <a:xfrm>
-          <a:off x="0" y="0"/>
-          <a:ext cx="0" cy="0"/>
-          <a:chOff x="0" y="0"/>
-          <a:chExt cx="0" cy="0"/>
-        </a:xfrm>
-      </p:grpSpPr>
+      <p:grpSpPr/>
       <p:sp>
         <p:nvSpPr>
           <p:cNvPr id="2" name="TextBox 1"/>
@@ -5948,7 +6177,7 @@
           <a:noFill/>
         </p:spPr>
         <p:txBody>
-          <a:bodyPr wrap="square" lIns="18288" tIns="18288" rIns="18288" bIns="18288" anchor="t">
+          <a:bodyPr wrap="square" anchor="t" lIns="18288" rIns="18288" tIns="18288" bIns="18288">
             <a:spAutoFit/>
           </a:bodyPr>
           <a:lstStyle/>
@@ -5987,7 +6216,7 @@
           <a:noFill/>
         </p:spPr>
         <p:txBody>
-          <a:bodyPr wrap="square" lIns="18288" tIns="18288" rIns="18288" bIns="18288" anchor="t">
+          <a:bodyPr wrap="square" anchor="t" lIns="18288" rIns="18288" tIns="18288" bIns="18288">
             <a:spAutoFit/>
           </a:bodyPr>
           <a:lstStyle/>
@@ -6026,7 +6255,7 @@
           <a:noFill/>
         </p:spPr>
         <p:txBody>
-          <a:bodyPr wrap="square" lIns="18288" tIns="18288" rIns="18288" bIns="18288" anchor="t">
+          <a:bodyPr wrap="square" anchor="t" lIns="18288" rIns="18288" tIns="18288" bIns="18288">
             <a:spAutoFit/>
           </a:bodyPr>
           <a:lstStyle/>
@@ -6089,11 +6318,10 @@
           </a:fontRef>
         </p:style>
         <p:txBody>
-          <a:bodyPr wrap="square" lIns="109728" tIns="54864" rIns="109728" bIns="54864" rtlCol="0" anchor="ctr"/>
+          <a:bodyPr rtlCol="0" anchor="ctr" wrap="square" lIns="109728" rIns="109728" tIns="54864" bIns="54864"/>
           <a:lstStyle/>
           <a:p>
             <a:pPr algn="ctr"/>
-            <a:endParaRPr/>
           </a:p>
         </p:txBody>
       </p:sp>
@@ -6114,7 +6342,7 @@
           <a:noFill/>
         </p:spPr>
         <p:txBody>
-          <a:bodyPr wrap="square" lIns="18288" tIns="18288" rIns="18288" bIns="18288" anchor="t">
+          <a:bodyPr wrap="square" anchor="t" lIns="18288" rIns="18288" tIns="18288" bIns="18288">
             <a:spAutoFit/>
           </a:bodyPr>
           <a:lstStyle/>
@@ -6153,7 +6381,7 @@
           <a:noFill/>
         </p:spPr>
         <p:txBody>
-          <a:bodyPr wrap="square" lIns="18288" tIns="18288" rIns="18288" bIns="18288" anchor="t">
+          <a:bodyPr wrap="square" anchor="t" lIns="18288" rIns="18288" tIns="18288" bIns="18288">
             <a:spAutoFit/>
           </a:bodyPr>
           <a:lstStyle/>
@@ -6214,7 +6442,7 @@
           </a:fontRef>
         </p:style>
         <p:txBody>
-          <a:bodyPr wrap="square" lIns="109728" tIns="54864" rIns="109728" bIns="54864" rtlCol="0" anchor="ctr"/>
+          <a:bodyPr rtlCol="0" anchor="ctr" wrap="square" lIns="109728" rIns="109728" tIns="54864" bIns="54864"/>
           <a:lstStyle/>
           <a:p>
             <a:pPr algn="ctr">
@@ -6251,7 +6479,7 @@
           <a:noFill/>
         </p:spPr>
         <p:txBody>
-          <a:bodyPr wrap="square" lIns="18288" tIns="18288" rIns="18288" bIns="18288" anchor="t">
+          <a:bodyPr wrap="square" anchor="t" lIns="18288" rIns="18288" tIns="18288" bIns="18288">
             <a:spAutoFit/>
           </a:bodyPr>
           <a:lstStyle/>
@@ -6314,11 +6542,10 @@
           </a:fontRef>
         </p:style>
         <p:txBody>
-          <a:bodyPr wrap="square" lIns="109728" tIns="54864" rIns="109728" bIns="54864" rtlCol="0" anchor="ctr"/>
+          <a:bodyPr rtlCol="0" anchor="ctr" wrap="square" lIns="109728" rIns="109728" tIns="54864" bIns="54864"/>
           <a:lstStyle/>
           <a:p>
             <a:pPr algn="ctr"/>
-            <a:endParaRPr/>
           </a:p>
         </p:txBody>
       </p:sp>
@@ -6339,7 +6566,7 @@
           <a:noFill/>
         </p:spPr>
         <p:txBody>
-          <a:bodyPr wrap="square" lIns="18288" tIns="18288" rIns="18288" bIns="18288" anchor="t">
+          <a:bodyPr wrap="square" anchor="t" lIns="18288" rIns="18288" tIns="18288" bIns="18288">
             <a:spAutoFit/>
           </a:bodyPr>
           <a:lstStyle/>
@@ -6378,7 +6605,7 @@
           <a:noFill/>
         </p:spPr>
         <p:txBody>
-          <a:bodyPr wrap="square" lIns="18288" tIns="18288" rIns="18288" bIns="18288" anchor="t">
+          <a:bodyPr wrap="square" anchor="t" lIns="18288" rIns="18288" tIns="18288" bIns="18288">
             <a:spAutoFit/>
           </a:bodyPr>
           <a:lstStyle/>
@@ -6439,7 +6666,7 @@
           </a:fontRef>
         </p:style>
         <p:txBody>
-          <a:bodyPr wrap="square" lIns="109728" tIns="54864" rIns="109728" bIns="54864" rtlCol="0" anchor="ctr"/>
+          <a:bodyPr rtlCol="0" anchor="ctr" wrap="square" lIns="109728" rIns="109728" tIns="54864" bIns="54864"/>
           <a:lstStyle/>
           <a:p>
             <a:pPr algn="ctr">
@@ -6476,7 +6703,7 @@
           <a:noFill/>
         </p:spPr>
         <p:txBody>
-          <a:bodyPr wrap="square" lIns="18288" tIns="18288" rIns="18288" bIns="18288" anchor="t">
+          <a:bodyPr wrap="square" anchor="t" lIns="18288" rIns="18288" tIns="18288" bIns="18288">
             <a:spAutoFit/>
           </a:bodyPr>
           <a:lstStyle/>
@@ -6539,11 +6766,10 @@
           </a:fontRef>
         </p:style>
         <p:txBody>
-          <a:bodyPr wrap="square" lIns="109728" tIns="54864" rIns="109728" bIns="54864" rtlCol="0" anchor="ctr"/>
+          <a:bodyPr rtlCol="0" anchor="ctr" wrap="square" lIns="109728" rIns="109728" tIns="54864" bIns="54864"/>
           <a:lstStyle/>
           <a:p>
             <a:pPr algn="ctr"/>
-            <a:endParaRPr/>
           </a:p>
         </p:txBody>
       </p:sp>
@@ -6564,7 +6790,7 @@
           <a:noFill/>
         </p:spPr>
         <p:txBody>
-          <a:bodyPr wrap="square" lIns="18288" tIns="18288" rIns="18288" bIns="18288" anchor="t">
+          <a:bodyPr wrap="square" anchor="t" lIns="18288" rIns="18288" tIns="18288" bIns="18288">
             <a:spAutoFit/>
           </a:bodyPr>
           <a:lstStyle/>
@@ -6603,7 +6829,7 @@
           <a:noFill/>
         </p:spPr>
         <p:txBody>
-          <a:bodyPr wrap="square" lIns="18288" tIns="18288" rIns="18288" bIns="18288" anchor="t">
+          <a:bodyPr wrap="square" anchor="t" lIns="18288" rIns="18288" tIns="18288" bIns="18288">
             <a:spAutoFit/>
           </a:bodyPr>
           <a:lstStyle/>
@@ -6664,7 +6890,7 @@
           </a:fontRef>
         </p:style>
         <p:txBody>
-          <a:bodyPr wrap="square" lIns="109728" tIns="54864" rIns="109728" bIns="54864" rtlCol="0" anchor="ctr"/>
+          <a:bodyPr rtlCol="0" anchor="ctr" wrap="square" lIns="109728" rIns="109728" tIns="54864" bIns="54864"/>
           <a:lstStyle/>
           <a:p>
             <a:pPr algn="ctr">
@@ -6701,7 +6927,7 @@
           <a:noFill/>
         </p:spPr>
         <p:txBody>
-          <a:bodyPr wrap="square" lIns="18288" tIns="18288" rIns="18288" bIns="18288" anchor="t">
+          <a:bodyPr wrap="square" anchor="t" lIns="18288" rIns="18288" tIns="18288" bIns="18288">
             <a:spAutoFit/>
           </a:bodyPr>
           <a:lstStyle/>
@@ -6764,7 +6990,7 @@
           </a:fontRef>
         </p:style>
         <p:txBody>
-          <a:bodyPr wrap="square" lIns="109728" tIns="54864" rIns="109728" bIns="54864" rtlCol="0" anchor="ctr"/>
+          <a:bodyPr rtlCol="0" anchor="ctr" wrap="square" lIns="109728" rIns="109728" tIns="54864" bIns="54864"/>
           <a:lstStyle/>
           <a:p>
             <a:pPr algn="l">
@@ -6809,7 +7035,7 @@
 </file>
 
 <file path=ppt/slides/slide12.xml><?xml version="1.0" encoding="utf-8"?>
-<p:sld xmlns:a="http://schemas.openxmlformats.org/drawingml/2006/main" xmlns:r="http://schemas.openxmlformats.org/officeDocument/2006/relationships" xmlns:p="http://schemas.openxmlformats.org/presentationml/2006/main">
+<p:sld xmlns:a="http://schemas.openxmlformats.org/drawingml/2006/main" xmlns:p="http://schemas.openxmlformats.org/presentationml/2006/main" xmlns:r="http://schemas.openxmlformats.org/officeDocument/2006/relationships">
   <p:cSld>
     <p:bg>
       <p:bgPr>
@@ -6825,14 +7051,7 @@
         <p:cNvGrpSpPr/>
         <p:nvPr/>
       </p:nvGrpSpPr>
-      <p:grpSpPr>
-        <a:xfrm>
-          <a:off x="0" y="0"/>
-          <a:ext cx="0" cy="0"/>
-          <a:chOff x="0" y="0"/>
-          <a:chExt cx="0" cy="0"/>
-        </a:xfrm>
-      </p:grpSpPr>
+      <p:grpSpPr/>
       <p:sp>
         <p:nvSpPr>
           <p:cNvPr id="2" name="TextBox 1"/>
@@ -6850,7 +7069,7 @@
           <a:noFill/>
         </p:spPr>
         <p:txBody>
-          <a:bodyPr wrap="square" lIns="18288" tIns="18288" rIns="18288" bIns="18288" anchor="t">
+          <a:bodyPr wrap="square" anchor="t" lIns="18288" rIns="18288" tIns="18288" bIns="18288">
             <a:spAutoFit/>
           </a:bodyPr>
           <a:lstStyle/>
@@ -6889,7 +7108,7 @@
           <a:noFill/>
         </p:spPr>
         <p:txBody>
-          <a:bodyPr wrap="square" lIns="18288" tIns="18288" rIns="18288" bIns="18288" anchor="t">
+          <a:bodyPr wrap="square" anchor="t" lIns="18288" rIns="18288" tIns="18288" bIns="18288">
             <a:spAutoFit/>
           </a:bodyPr>
           <a:lstStyle/>
@@ -6928,7 +7147,7 @@
           <a:noFill/>
         </p:spPr>
         <p:txBody>
-          <a:bodyPr wrap="square" lIns="18288" tIns="18288" rIns="18288" bIns="18288" anchor="t">
+          <a:bodyPr wrap="square" anchor="t" lIns="18288" rIns="18288" tIns="18288" bIns="18288">
             <a:spAutoFit/>
           </a:bodyPr>
           <a:lstStyle/>
@@ -6991,7 +7210,7 @@
           </a:fontRef>
         </p:style>
         <p:txBody>
-          <a:bodyPr wrap="square" lIns="109728" tIns="54864" rIns="109728" bIns="54864" rtlCol="0" anchor="ctr"/>
+          <a:bodyPr rtlCol="0" anchor="ctr" wrap="square" lIns="109728" rIns="109728" tIns="54864" bIns="54864"/>
           <a:lstStyle/>
           <a:p>
             <a:pPr algn="ctr">
@@ -7068,7 +7287,7 @@
           </a:fontRef>
         </p:style>
         <p:txBody>
-          <a:bodyPr wrap="square" lIns="109728" tIns="54864" rIns="109728" bIns="54864" rtlCol="0" anchor="ctr"/>
+          <a:bodyPr rtlCol="0" anchor="ctr" wrap="square" lIns="109728" rIns="109728" tIns="54864" bIns="54864"/>
           <a:lstStyle/>
           <a:p>
             <a:pPr algn="ctr">
@@ -7181,7 +7400,7 @@
           </a:fontRef>
         </p:style>
         <p:txBody>
-          <a:bodyPr wrap="square" lIns="109728" tIns="54864" rIns="109728" bIns="54864" rtlCol="0" anchor="ctr"/>
+          <a:bodyPr rtlCol="0" anchor="ctr" wrap="square" lIns="109728" rIns="109728" tIns="54864" bIns="54864"/>
           <a:lstStyle/>
           <a:p>
             <a:pPr algn="ctr">
@@ -7294,7 +7513,7 @@
           </a:fontRef>
         </p:style>
         <p:txBody>
-          <a:bodyPr wrap="square" lIns="109728" tIns="54864" rIns="109728" bIns="54864" rtlCol="0" anchor="ctr"/>
+          <a:bodyPr rtlCol="0" anchor="ctr" wrap="square" lIns="109728" rIns="109728" tIns="54864" bIns="54864"/>
           <a:lstStyle/>
           <a:p>
             <a:pPr algn="ctr">
@@ -7383,7 +7602,7 @@
           <a:noFill/>
         </p:spPr>
         <p:txBody>
-          <a:bodyPr wrap="square" lIns="18288" tIns="18288" rIns="18288" bIns="18288" anchor="t">
+          <a:bodyPr wrap="square" anchor="t" lIns="18288" rIns="18288" tIns="18288" bIns="18288">
             <a:spAutoFit/>
           </a:bodyPr>
           <a:lstStyle/>
@@ -7422,7 +7641,7 @@
           <a:noFill/>
         </p:spPr>
         <p:txBody>
-          <a:bodyPr wrap="square" lIns="18288" tIns="18288" rIns="18288" bIns="18288" anchor="t">
+          <a:bodyPr wrap="square" anchor="t" lIns="18288" rIns="18288" tIns="18288" bIns="18288">
             <a:spAutoFit/>
           </a:bodyPr>
           <a:lstStyle/>
@@ -7461,7 +7680,7 @@
           <a:noFill/>
         </p:spPr>
         <p:txBody>
-          <a:bodyPr wrap="square" lIns="18288" tIns="18288" rIns="18288" bIns="18288" anchor="t">
+          <a:bodyPr wrap="square" anchor="t" lIns="18288" rIns="18288" tIns="18288" bIns="18288">
             <a:spAutoFit/>
           </a:bodyPr>
           <a:lstStyle/>
@@ -7500,7 +7719,7 @@
           <a:noFill/>
         </p:spPr>
         <p:txBody>
-          <a:bodyPr wrap="square" lIns="18288" tIns="18288" rIns="18288" bIns="18288" anchor="t">
+          <a:bodyPr wrap="square" anchor="t" lIns="18288" rIns="18288" tIns="18288" bIns="18288">
             <a:spAutoFit/>
           </a:bodyPr>
           <a:lstStyle/>
@@ -7539,7 +7758,7 @@
           <a:noFill/>
         </p:spPr>
         <p:txBody>
-          <a:bodyPr wrap="square" lIns="18288" tIns="18288" rIns="18288" bIns="18288" anchor="t">
+          <a:bodyPr wrap="square" anchor="t" lIns="18288" rIns="18288" tIns="18288" bIns="18288">
             <a:spAutoFit/>
           </a:bodyPr>
           <a:lstStyle/>
@@ -7600,7 +7819,7 @@
           </a:fontRef>
         </p:style>
         <p:txBody>
-          <a:bodyPr wrap="square" lIns="27432" tIns="54864" rIns="27432" bIns="54864" rtlCol="0" anchor="ctr"/>
+          <a:bodyPr rtlCol="0" anchor="ctr" wrap="square" lIns="27432" rIns="27432" tIns="54864" bIns="54864"/>
           <a:lstStyle/>
           <a:p>
             <a:pPr algn="ctr">
@@ -7675,7 +7894,7 @@
           </a:fontRef>
         </p:style>
         <p:txBody>
-          <a:bodyPr wrap="square" lIns="27432" tIns="54864" rIns="27432" bIns="54864" rtlCol="0" anchor="ctr"/>
+          <a:bodyPr rtlCol="0" anchor="ctr" wrap="square" lIns="27432" rIns="27432" tIns="54864" bIns="54864"/>
           <a:lstStyle/>
           <a:p>
             <a:pPr algn="ctr">
@@ -7750,7 +7969,7 @@
           </a:fontRef>
         </p:style>
         <p:txBody>
-          <a:bodyPr wrap="square" lIns="27432" tIns="54864" rIns="27432" bIns="54864" rtlCol="0" anchor="ctr"/>
+          <a:bodyPr rtlCol="0" anchor="ctr" wrap="square" lIns="27432" rIns="27432" tIns="54864" bIns="54864"/>
           <a:lstStyle/>
           <a:p>
             <a:pPr algn="ctr">
@@ -7825,7 +8044,7 @@
           </a:fontRef>
         </p:style>
         <p:txBody>
-          <a:bodyPr wrap="square" lIns="27432" tIns="54864" rIns="27432" bIns="54864" rtlCol="0" anchor="ctr"/>
+          <a:bodyPr rtlCol="0" anchor="ctr" wrap="square" lIns="27432" rIns="27432" tIns="54864" bIns="54864"/>
           <a:lstStyle/>
           <a:p>
             <a:pPr algn="ctr">
@@ -7878,7 +8097,7 @@
           <a:noFill/>
         </p:spPr>
         <p:txBody>
-          <a:bodyPr wrap="square" lIns="18288" tIns="18288" rIns="18288" bIns="18288" anchor="t">
+          <a:bodyPr wrap="square" anchor="t" lIns="18288" rIns="18288" tIns="18288" bIns="18288">
             <a:spAutoFit/>
           </a:bodyPr>
           <a:lstStyle/>
@@ -7939,7 +8158,7 @@
           </a:fontRef>
         </p:style>
         <p:txBody>
-          <a:bodyPr wrap="square" lIns="27432" tIns="54864" rIns="27432" bIns="54864" rtlCol="0" anchor="ctr"/>
+          <a:bodyPr rtlCol="0" anchor="ctr" wrap="square" lIns="27432" rIns="27432" tIns="54864" bIns="54864"/>
           <a:lstStyle/>
           <a:p>
             <a:pPr algn="ctr">
@@ -8014,7 +8233,7 @@
           </a:fontRef>
         </p:style>
         <p:txBody>
-          <a:bodyPr wrap="square" lIns="27432" tIns="54864" rIns="27432" bIns="54864" rtlCol="0" anchor="ctr"/>
+          <a:bodyPr rtlCol="0" anchor="ctr" wrap="square" lIns="27432" rIns="27432" tIns="54864" bIns="54864"/>
           <a:lstStyle/>
           <a:p>
             <a:pPr algn="ctr">
@@ -8089,7 +8308,7 @@
           </a:fontRef>
         </p:style>
         <p:txBody>
-          <a:bodyPr wrap="square" lIns="27432" tIns="54864" rIns="27432" bIns="54864" rtlCol="0" anchor="ctr"/>
+          <a:bodyPr rtlCol="0" anchor="ctr" wrap="square" lIns="27432" rIns="27432" tIns="54864" bIns="54864"/>
           <a:lstStyle/>
           <a:p>
             <a:pPr algn="ctr">
@@ -8164,7 +8383,7 @@
           </a:fontRef>
         </p:style>
         <p:txBody>
-          <a:bodyPr wrap="square" lIns="27432" tIns="54864" rIns="27432" bIns="54864" rtlCol="0" anchor="ctr"/>
+          <a:bodyPr rtlCol="0" anchor="ctr" wrap="square" lIns="27432" rIns="27432" tIns="54864" bIns="54864"/>
           <a:lstStyle/>
           <a:p>
             <a:pPr algn="ctr">
@@ -8217,7 +8436,7 @@
           <a:noFill/>
         </p:spPr>
         <p:txBody>
-          <a:bodyPr wrap="square" lIns="18288" tIns="18288" rIns="18288" bIns="18288" anchor="t">
+          <a:bodyPr wrap="square" anchor="t" lIns="18288" rIns="18288" tIns="18288" bIns="18288">
             <a:spAutoFit/>
           </a:bodyPr>
           <a:lstStyle/>
@@ -8278,7 +8497,7 @@
           </a:fontRef>
         </p:style>
         <p:txBody>
-          <a:bodyPr wrap="square" lIns="27432" tIns="54864" rIns="27432" bIns="54864" rtlCol="0" anchor="ctr"/>
+          <a:bodyPr rtlCol="0" anchor="ctr" wrap="square" lIns="27432" rIns="27432" tIns="54864" bIns="54864"/>
           <a:lstStyle/>
           <a:p>
             <a:pPr algn="ctr">
@@ -8355,7 +8574,7 @@
           </a:fontRef>
         </p:style>
         <p:txBody>
-          <a:bodyPr wrap="square" lIns="27432" tIns="54864" rIns="27432" bIns="54864" rtlCol="0" anchor="ctr"/>
+          <a:bodyPr rtlCol="0" anchor="ctr" wrap="square" lIns="27432" rIns="27432" tIns="54864" bIns="54864"/>
           <a:lstStyle/>
           <a:p>
             <a:pPr algn="ctr">
@@ -8430,7 +8649,7 @@
           </a:fontRef>
         </p:style>
         <p:txBody>
-          <a:bodyPr wrap="square" lIns="27432" tIns="54864" rIns="27432" bIns="54864" rtlCol="0" anchor="ctr"/>
+          <a:bodyPr rtlCol="0" anchor="ctr" wrap="square" lIns="27432" rIns="27432" tIns="54864" bIns="54864"/>
           <a:lstStyle/>
           <a:p>
             <a:pPr algn="ctr">
@@ -8505,7 +8724,7 @@
           </a:fontRef>
         </p:style>
         <p:txBody>
-          <a:bodyPr wrap="square" lIns="27432" tIns="54864" rIns="27432" bIns="54864" rtlCol="0" anchor="ctr"/>
+          <a:bodyPr rtlCol="0" anchor="ctr" wrap="square" lIns="27432" rIns="27432" tIns="54864" bIns="54864"/>
           <a:lstStyle/>
           <a:p>
             <a:pPr algn="ctr">
@@ -8558,7 +8777,7 @@
           <a:noFill/>
         </p:spPr>
         <p:txBody>
-          <a:bodyPr wrap="square" lIns="18288" tIns="18288" rIns="18288" bIns="18288" anchor="t">
+          <a:bodyPr wrap="square" anchor="t" lIns="18288" rIns="18288" tIns="18288" bIns="18288">
             <a:spAutoFit/>
           </a:bodyPr>
           <a:lstStyle/>
@@ -8597,12 +8816,12 @@
           <a:noFill/>
         </p:spPr>
         <p:txBody>
-          <a:bodyPr wrap="square" lIns="18288" tIns="18288" rIns="18288" bIns="18288" anchor="t">
+          <a:bodyPr wrap="square" anchor="t" lIns="18288" rIns="18288" tIns="18288" bIns="18288">
             <a:spAutoFit/>
           </a:bodyPr>
           <a:lstStyle/>
           <a:p>
-            <a:pPr marL="274320" indent="-274320" algn="l">
+            <a:pPr algn="l" marL="274320" indent="-274320">
               <a:spcAft>
                 <a:spcPts val="1000"/>
               </a:spcAft>
@@ -8620,7 +8839,7 @@
             </a:r>
           </a:p>
           <a:p>
-            <a:pPr marL="274320" indent="-274320" algn="l">
+            <a:pPr algn="l" marL="274320" indent="-274320">
               <a:spcAft>
                 <a:spcPts val="1000"/>
               </a:spcAft>
@@ -8634,11 +8853,11 @@
                 </a:solidFill>
                 <a:latin typeface="Segoe UI"/>
               </a:rPr>
-              <a:t>A steady fall in unemployment over time: time itself could explain a pattern</a:t>
-            </a:r>
-          </a:p>
-          <a:p>
-            <a:pPr marL="274320" indent="-274320" algn="l">
+              <a:t>Most signals trend over time; removing the time trend even flips the GDP results</a:t>
+            </a:r>
+          </a:p>
+          <a:p>
+            <a:pPr algn="l" marL="274320" indent="-274320">
               <a:spcAft>
                 <a:spcPts val="1000"/>
               </a:spcAft>
@@ -8652,11 +8871,11 @@
                 </a:solidFill>
                 <a:latin typeface="Segoe UI"/>
               </a:rPr>
-              <a:t>Ranges marked exploratory, since the same country appears many times</a:t>
-            </a:r>
-          </a:p>
-          <a:p>
-            <a:pPr marL="274320" indent="-274320" algn="l">
+              <a:t>Small samples: with 24–30 rows, only |ρ| above about 0.6 was detectable</a:t>
+            </a:r>
+          </a:p>
+          <a:p>
+            <a:pPr algn="l" marL="274320" indent="-274320">
               <a:spcAft>
                 <a:spcPts val="1000"/>
               </a:spcAft>
@@ -8684,7 +8903,7 @@
 </file>
 
 <file path=ppt/slides/slide13.xml><?xml version="1.0" encoding="utf-8"?>
-<p:sld xmlns:a="http://schemas.openxmlformats.org/drawingml/2006/main" xmlns:r="http://schemas.openxmlformats.org/officeDocument/2006/relationships" xmlns:p="http://schemas.openxmlformats.org/presentationml/2006/main">
+<p:sld xmlns:a="http://schemas.openxmlformats.org/drawingml/2006/main" xmlns:p="http://schemas.openxmlformats.org/presentationml/2006/main" xmlns:r="http://schemas.openxmlformats.org/officeDocument/2006/relationships">
   <p:cSld>
     <p:bg>
       <p:bgPr>
@@ -8700,14 +8919,7 @@
         <p:cNvGrpSpPr/>
         <p:nvPr/>
       </p:nvGrpSpPr>
-      <p:grpSpPr>
-        <a:xfrm>
-          <a:off x="0" y="0"/>
-          <a:ext cx="0" cy="0"/>
-          <a:chOff x="0" y="0"/>
-          <a:chExt cx="0" cy="0"/>
-        </a:xfrm>
-      </p:grpSpPr>
+      <p:grpSpPr/>
       <p:sp>
         <p:nvSpPr>
           <p:cNvPr id="2" name="TextBox 1"/>
@@ -8725,7 +8937,7 @@
           <a:noFill/>
         </p:spPr>
         <p:txBody>
-          <a:bodyPr wrap="square" lIns="18288" tIns="18288" rIns="18288" bIns="18288" anchor="t">
+          <a:bodyPr wrap="square" anchor="t" lIns="18288" rIns="18288" tIns="18288" bIns="18288">
             <a:spAutoFit/>
           </a:bodyPr>
           <a:lstStyle/>
@@ -8764,7 +8976,7 @@
           <a:noFill/>
         </p:spPr>
         <p:txBody>
-          <a:bodyPr wrap="square" lIns="18288" tIns="18288" rIns="18288" bIns="18288" anchor="t">
+          <a:bodyPr wrap="square" anchor="t" lIns="18288" rIns="18288" tIns="18288" bIns="18288">
             <a:spAutoFit/>
           </a:bodyPr>
           <a:lstStyle/>
@@ -8803,7 +9015,7 @@
           <a:noFill/>
         </p:spPr>
         <p:txBody>
-          <a:bodyPr wrap="square" lIns="18288" tIns="18288" rIns="18288" bIns="18288" anchor="t">
+          <a:bodyPr wrap="square" anchor="t" lIns="18288" rIns="18288" tIns="18288" bIns="18288">
             <a:spAutoFit/>
           </a:bodyPr>
           <a:lstStyle/>
@@ -8864,7 +9076,7 @@
           </a:fontRef>
         </p:style>
         <p:txBody>
-          <a:bodyPr wrap="square" lIns="109728" tIns="54864" rIns="109728" bIns="54864" rtlCol="0" anchor="ctr"/>
+          <a:bodyPr rtlCol="0" anchor="ctr" wrap="square" lIns="109728" rIns="109728" tIns="54864" bIns="54864"/>
           <a:lstStyle/>
           <a:p>
             <a:pPr algn="ctr">
@@ -8901,12 +9113,12 @@
           <a:noFill/>
         </p:spPr>
         <p:txBody>
-          <a:bodyPr wrap="square" lIns="18288" tIns="18288" rIns="18288" bIns="18288" anchor="t">
+          <a:bodyPr wrap="square" anchor="t" lIns="18288" rIns="18288" tIns="18288" bIns="18288">
             <a:spAutoFit/>
           </a:bodyPr>
           <a:lstStyle/>
           <a:p>
-            <a:pPr marL="274320" indent="-274320" algn="l">
+            <a:pPr algn="l" marL="274320" indent="-274320">
               <a:spcAft>
                 <a:spcPts val="1400"/>
               </a:spcAft>
@@ -8924,7 +9136,7 @@
             </a:r>
           </a:p>
           <a:p>
-            <a:pPr marL="274320" indent="-274320" algn="l">
+            <a:pPr algn="l" marL="274320" indent="-274320">
               <a:spcAft>
                 <a:spcPts val="1400"/>
               </a:spcAft>
@@ -8942,7 +9154,7 @@
             </a:r>
           </a:p>
           <a:p>
-            <a:pPr marL="274320" indent="-274320" algn="l">
+            <a:pPr algn="l" marL="274320" indent="-274320">
               <a:spcAft>
                 <a:spcPts val="1400"/>
               </a:spcAft>
@@ -8960,7 +9172,7 @@
             </a:r>
           </a:p>
           <a:p>
-            <a:pPr marL="274320" indent="-274320" algn="l">
+            <a:pPr algn="l" marL="274320" indent="-274320">
               <a:spcAft>
                 <a:spcPts val="1400"/>
               </a:spcAft>
@@ -9018,7 +9230,7 @@
           </a:fontRef>
         </p:style>
         <p:txBody>
-          <a:bodyPr wrap="square" lIns="109728" tIns="54864" rIns="109728" bIns="54864" rtlCol="0" anchor="ctr"/>
+          <a:bodyPr rtlCol="0" anchor="ctr" wrap="square" lIns="109728" rIns="109728" tIns="54864" bIns="54864"/>
           <a:lstStyle/>
           <a:p>
             <a:pPr algn="ctr">
@@ -9055,12 +9267,12 @@
           <a:noFill/>
         </p:spPr>
         <p:txBody>
-          <a:bodyPr wrap="square" lIns="18288" tIns="18288" rIns="18288" bIns="18288" anchor="t">
+          <a:bodyPr wrap="square" anchor="t" lIns="18288" rIns="18288" tIns="18288" bIns="18288">
             <a:spAutoFit/>
           </a:bodyPr>
           <a:lstStyle/>
           <a:p>
-            <a:pPr marL="274320" indent="-274320" algn="l">
+            <a:pPr algn="l" marL="274320" indent="-274320">
               <a:spcAft>
                 <a:spcPts val="1400"/>
               </a:spcAft>
@@ -9078,7 +9290,7 @@
             </a:r>
           </a:p>
           <a:p>
-            <a:pPr marL="274320" indent="-274320" algn="l">
+            <a:pPr algn="l" marL="274320" indent="-274320">
               <a:spcAft>
                 <a:spcPts val="1400"/>
               </a:spcAft>
@@ -9096,7 +9308,7 @@
             </a:r>
           </a:p>
           <a:p>
-            <a:pPr marL="274320" indent="-274320" algn="l">
+            <a:pPr algn="l" marL="274320" indent="-274320">
               <a:spcAft>
                 <a:spcPts val="1400"/>
               </a:spcAft>
@@ -9114,7 +9326,7 @@
             </a:r>
           </a:p>
           <a:p>
-            <a:pPr marL="274320" indent="-274320" algn="l">
+            <a:pPr algn="l" marL="274320" indent="-274320">
               <a:spcAft>
                 <a:spcPts val="1400"/>
               </a:spcAft>
@@ -9142,7 +9354,7 @@
 </file>
 
 <file path=ppt/slides/slide14.xml><?xml version="1.0" encoding="utf-8"?>
-<p:sld xmlns:a="http://schemas.openxmlformats.org/drawingml/2006/main" xmlns:r="http://schemas.openxmlformats.org/officeDocument/2006/relationships" xmlns:p="http://schemas.openxmlformats.org/presentationml/2006/main">
+<p:sld xmlns:a="http://schemas.openxmlformats.org/drawingml/2006/main" xmlns:p="http://schemas.openxmlformats.org/presentationml/2006/main" xmlns:r="http://schemas.openxmlformats.org/officeDocument/2006/relationships">
   <p:cSld>
     <p:bg>
       <p:bgPr>
@@ -9158,14 +9370,7 @@
         <p:cNvGrpSpPr/>
         <p:nvPr/>
       </p:nvGrpSpPr>
-      <p:grpSpPr>
-        <a:xfrm>
-          <a:off x="0" y="0"/>
-          <a:ext cx="0" cy="0"/>
-          <a:chOff x="0" y="0"/>
-          <a:chExt cx="0" cy="0"/>
-        </a:xfrm>
-      </p:grpSpPr>
+      <p:grpSpPr/>
       <p:sp>
         <p:nvSpPr>
           <p:cNvPr id="2" name="TextBox 1"/>
@@ -9183,7 +9388,7 @@
           <a:noFill/>
         </p:spPr>
         <p:txBody>
-          <a:bodyPr wrap="square" lIns="18288" tIns="18288" rIns="18288" bIns="18288" anchor="t">
+          <a:bodyPr wrap="square" anchor="t" lIns="18288" rIns="18288" tIns="18288" bIns="18288">
             <a:spAutoFit/>
           </a:bodyPr>
           <a:lstStyle/>
@@ -9222,7 +9427,7 @@
           <a:noFill/>
         </p:spPr>
         <p:txBody>
-          <a:bodyPr wrap="square" lIns="18288" tIns="18288" rIns="18288" bIns="18288" anchor="t">
+          <a:bodyPr wrap="square" anchor="t" lIns="18288" rIns="18288" tIns="18288" bIns="18288">
             <a:spAutoFit/>
           </a:bodyPr>
           <a:lstStyle/>
@@ -9261,7 +9466,7 @@
           <a:noFill/>
         </p:spPr>
         <p:txBody>
-          <a:bodyPr wrap="square" lIns="18288" tIns="18288" rIns="18288" bIns="18288" anchor="t">
+          <a:bodyPr wrap="square" anchor="t" lIns="18288" rIns="18288" tIns="18288" bIns="18288">
             <a:spAutoFit/>
           </a:bodyPr>
           <a:lstStyle/>
@@ -9324,7 +9529,7 @@
           </a:fontRef>
         </p:style>
         <p:txBody>
-          <a:bodyPr wrap="square" lIns="109728" tIns="54864" rIns="109728" bIns="54864" rtlCol="0" anchor="ctr"/>
+          <a:bodyPr rtlCol="0" anchor="ctr" wrap="square" lIns="109728" rIns="109728" tIns="54864" bIns="54864"/>
           <a:lstStyle/>
           <a:p>
             <a:pPr algn="ctr">
@@ -9394,7 +9599,7 @@
           </a:fontRef>
         </p:style>
         <p:txBody>
-          <a:bodyPr wrap="square" lIns="109728" tIns="54864" rIns="109728" bIns="54864" rtlCol="0" anchor="ctr"/>
+          <a:bodyPr rtlCol="0" anchor="ctr" wrap="square" lIns="109728" rIns="109728" tIns="54864" bIns="54864"/>
           <a:lstStyle/>
           <a:p>
             <a:pPr algn="ctr">
@@ -9409,7 +9614,16 @@
                 </a:solidFill>
                 <a:latin typeface="Segoe UI"/>
               </a:rPr>
-              <a:t>Me: one decision per multiple-choice question</a:t>
+              <a:t>Me:</a:t>
+            </a:r>
+            <a:r>
+              <a:rPr sz="1350" b="1" i="0">
+                <a:solidFill>
+                  <a:srgbClr val="1C1C1A"/>
+                </a:solidFill>
+                <a:latin typeface="Segoe UI"/>
+              </a:rPr>
+              <a:t> one decision per multiple-choice question</a:t>
             </a:r>
           </a:p>
         </p:txBody>
@@ -9455,7 +9669,7 @@
           </a:fontRef>
         </p:style>
         <p:txBody>
-          <a:bodyPr wrap="square" lIns="109728" tIns="54864" rIns="109728" bIns="54864" rtlCol="0" anchor="ctr"/>
+          <a:bodyPr rtlCol="0" anchor="ctr" wrap="square" lIns="109728" rIns="109728" tIns="54864" bIns="54864"/>
           <a:lstStyle/>
           <a:p>
             <a:pPr algn="ctr">
@@ -9525,7 +9739,7 @@
           </a:fontRef>
         </p:style>
         <p:txBody>
-          <a:bodyPr wrap="square" lIns="109728" tIns="54864" rIns="109728" bIns="54864" rtlCol="0" anchor="ctr"/>
+          <a:bodyPr rtlCol="0" anchor="ctr" wrap="square" lIns="109728" rIns="109728" tIns="54864" bIns="54864"/>
           <a:lstStyle/>
           <a:p>
             <a:pPr algn="ctr">
@@ -9540,7 +9754,16 @@
                 </a:solidFill>
                 <a:latin typeface="Segoe UI"/>
               </a:rPr>
-              <a:t>Me: checks on the running result</a:t>
+              <a:t>Me:</a:t>
+            </a:r>
+            <a:r>
+              <a:rPr sz="1350" b="1" i="0">
+                <a:solidFill>
+                  <a:srgbClr val="1C1C1A"/>
+                </a:solidFill>
+                <a:latin typeface="Segoe UI"/>
+              </a:rPr>
+              <a:t> checks on the running result</a:t>
             </a:r>
           </a:p>
         </p:txBody>
@@ -9706,7 +9929,7 @@
           <a:noFill/>
         </p:spPr>
         <p:txBody>
-          <a:bodyPr wrap="square" lIns="18288" tIns="18288" rIns="18288" bIns="18288" anchor="t">
+          <a:bodyPr wrap="square" anchor="t" lIns="18288" rIns="18288" tIns="18288" bIns="18288">
             <a:spAutoFit/>
           </a:bodyPr>
           <a:lstStyle/>
@@ -9745,7 +9968,7 @@
           <a:noFill/>
         </p:spPr>
         <p:txBody>
-          <a:bodyPr wrap="square" lIns="18288" tIns="18288" rIns="18288" bIns="18288" anchor="t">
+          <a:bodyPr wrap="square" anchor="t" lIns="18288" rIns="18288" tIns="18288" bIns="18288">
             <a:spAutoFit/>
           </a:bodyPr>
           <a:lstStyle/>
@@ -9784,12 +10007,12 @@
           <a:noFill/>
         </p:spPr>
         <p:txBody>
-          <a:bodyPr wrap="square" lIns="18288" tIns="18288" rIns="18288" bIns="18288" anchor="t">
+          <a:bodyPr wrap="square" anchor="t" lIns="18288" rIns="18288" tIns="18288" bIns="18288">
             <a:spAutoFit/>
           </a:bodyPr>
           <a:lstStyle/>
           <a:p>
-            <a:pPr marL="274320" indent="-274320" algn="l">
+            <a:pPr algn="l" marL="274320" indent="-274320">
               <a:spcAft>
                 <a:spcPts val="700"/>
               </a:spcAft>
@@ -9807,7 +10030,7 @@
             </a:r>
           </a:p>
           <a:p>
-            <a:pPr marL="274320" indent="-274320" algn="l">
+            <a:pPr algn="l" marL="274320" indent="-274320">
               <a:spcAft>
                 <a:spcPts val="700"/>
               </a:spcAft>
@@ -9825,7 +10048,7 @@
             </a:r>
           </a:p>
           <a:p>
-            <a:pPr marL="274320" indent="-274320" algn="l">
+            <a:pPr algn="l" marL="274320" indent="-274320">
               <a:spcAft>
                 <a:spcPts val="700"/>
               </a:spcAft>
@@ -9843,7 +10066,7 @@
             </a:r>
           </a:p>
           <a:p>
-            <a:pPr marL="274320" indent="-274320" algn="l">
+            <a:pPr algn="l" marL="274320" indent="-274320">
               <a:spcAft>
                 <a:spcPts val="700"/>
               </a:spcAft>
@@ -9879,7 +10102,7 @@
           <a:noFill/>
         </p:spPr>
         <p:txBody>
-          <a:bodyPr wrap="square" lIns="18288" tIns="18288" rIns="18288" bIns="18288" anchor="t">
+          <a:bodyPr wrap="square" anchor="t" lIns="18288" rIns="18288" tIns="18288" bIns="18288">
             <a:spAutoFit/>
           </a:bodyPr>
           <a:lstStyle/>
@@ -9918,12 +10141,12 @@
           <a:noFill/>
         </p:spPr>
         <p:txBody>
-          <a:bodyPr wrap="square" lIns="18288" tIns="18288" rIns="18288" bIns="18288" anchor="t">
+          <a:bodyPr wrap="square" anchor="t" lIns="18288" rIns="18288" tIns="18288" bIns="18288">
             <a:spAutoFit/>
           </a:bodyPr>
           <a:lstStyle/>
           <a:p>
-            <a:pPr marL="274320" indent="-274320" algn="l">
+            <a:pPr algn="l" marL="274320" indent="-274320">
               <a:spcAft>
                 <a:spcPts val="700"/>
               </a:spcAft>
@@ -9941,7 +10164,7 @@
             </a:r>
           </a:p>
           <a:p>
-            <a:pPr marL="274320" indent="-274320" algn="l">
+            <a:pPr algn="l" marL="274320" indent="-274320">
               <a:spcAft>
                 <a:spcPts val="700"/>
               </a:spcAft>
@@ -9956,6 +10179,24 @@
                 <a:latin typeface="Segoe UI"/>
               </a:rPr>
               <a:t>A wrong preview statistic (8.3% instead of 6.6%); the finding withdrawn</a:t>
+            </a:r>
+          </a:p>
+          <a:p>
+            <a:pPr algn="l" marL="274320" indent="-274320">
+              <a:spcAft>
+                <a:spcPts val="700"/>
+              </a:spcAft>
+              <a:buFont typeface="Arial"/>
+              <a:buChar char="•"/>
+            </a:pPr>
+            <a:r>
+              <a:rPr sz="1350" b="0" i="0">
+                <a:solidFill>
+                  <a:srgbClr val="1C1C1A"/>
+                </a:solidFill>
+                <a:latin typeface="Segoe UI"/>
+              </a:rPr>
+              <a:t>An external review: 3 failure-path defects, each reproduced by a test, then fixed</a:t>
             </a:r>
           </a:p>
         </p:txBody>
@@ -9969,7 +10210,7 @@
 </file>
 
 <file path=ppt/slides/slide15.xml><?xml version="1.0" encoding="utf-8"?>
-<p:sld xmlns:a="http://schemas.openxmlformats.org/drawingml/2006/main" xmlns:r="http://schemas.openxmlformats.org/officeDocument/2006/relationships" xmlns:p="http://schemas.openxmlformats.org/presentationml/2006/main">
+<p:sld xmlns:a="http://schemas.openxmlformats.org/drawingml/2006/main" xmlns:p="http://schemas.openxmlformats.org/presentationml/2006/main" xmlns:r="http://schemas.openxmlformats.org/officeDocument/2006/relationships">
   <p:cSld>
     <p:bg>
       <p:bgPr>
@@ -9985,14 +10226,7 @@
         <p:cNvGrpSpPr/>
         <p:nvPr/>
       </p:nvGrpSpPr>
-      <p:grpSpPr>
-        <a:xfrm>
-          <a:off x="0" y="0"/>
-          <a:ext cx="0" cy="0"/>
-          <a:chOff x="0" y="0"/>
-          <a:chExt cx="0" cy="0"/>
-        </a:xfrm>
-      </p:grpSpPr>
+      <p:grpSpPr/>
       <p:sp>
         <p:nvSpPr>
           <p:cNvPr id="2" name="TextBox 1"/>
@@ -10010,7 +10244,7 @@
           <a:noFill/>
         </p:spPr>
         <p:txBody>
-          <a:bodyPr wrap="square" lIns="18288" tIns="18288" rIns="18288" bIns="18288" anchor="t">
+          <a:bodyPr wrap="square" anchor="t" lIns="18288" rIns="18288" tIns="18288" bIns="18288">
             <a:spAutoFit/>
           </a:bodyPr>
           <a:lstStyle/>
@@ -10049,7 +10283,7 @@
           <a:noFill/>
         </p:spPr>
         <p:txBody>
-          <a:bodyPr wrap="square" lIns="18288" tIns="18288" rIns="18288" bIns="18288" anchor="t">
+          <a:bodyPr wrap="square" anchor="t" lIns="18288" rIns="18288" tIns="18288" bIns="18288">
             <a:spAutoFit/>
           </a:bodyPr>
           <a:lstStyle/>
@@ -10088,7 +10322,7 @@
           <a:noFill/>
         </p:spPr>
         <p:txBody>
-          <a:bodyPr wrap="square" lIns="18288" tIns="18288" rIns="18288" bIns="18288" anchor="t">
+          <a:bodyPr wrap="square" anchor="t" lIns="18288" rIns="18288" tIns="18288" bIns="18288">
             <a:spAutoFit/>
           </a:bodyPr>
           <a:lstStyle/>
@@ -10151,7 +10385,7 @@
           </a:fontRef>
         </p:style>
         <p:txBody>
-          <a:bodyPr wrap="square" lIns="109728" tIns="54864" rIns="109728" bIns="54864" rtlCol="0" anchor="ctr"/>
+          <a:bodyPr rtlCol="0" anchor="ctr" wrap="square" lIns="109728" rIns="109728" tIns="54864" bIns="54864"/>
           <a:lstStyle/>
           <a:p>
             <a:pPr algn="ctr">
@@ -10228,7 +10462,7 @@
           </a:fontRef>
         </p:style>
         <p:txBody>
-          <a:bodyPr wrap="square" lIns="109728" tIns="54864" rIns="109728" bIns="54864" rtlCol="0" anchor="ctr"/>
+          <a:bodyPr rtlCol="0" anchor="ctr" wrap="square" lIns="109728" rIns="109728" tIns="54864" bIns="54864"/>
           <a:lstStyle/>
           <a:p>
             <a:pPr algn="ctr">
@@ -10341,7 +10575,7 @@
           </a:fontRef>
         </p:style>
         <p:txBody>
-          <a:bodyPr wrap="square" lIns="109728" tIns="54864" rIns="109728" bIns="54864" rtlCol="0" anchor="ctr"/>
+          <a:bodyPr rtlCol="0" anchor="ctr" wrap="square" lIns="109728" rIns="109728" tIns="54864" bIns="54864"/>
           <a:lstStyle/>
           <a:p>
             <a:pPr algn="ctr">
@@ -10452,7 +10686,7 @@
           </a:fontRef>
         </p:style>
         <p:txBody>
-          <a:bodyPr wrap="square" lIns="109728" tIns="54864" rIns="109728" bIns="54864" rtlCol="0" anchor="ctr"/>
+          <a:bodyPr rtlCol="0" anchor="ctr" wrap="square" lIns="109728" rIns="109728" tIns="54864" bIns="54864"/>
           <a:lstStyle/>
           <a:p>
             <a:pPr algn="ctr">
@@ -10489,7 +10723,7 @@
           <a:noFill/>
         </p:spPr>
         <p:txBody>
-          <a:bodyPr wrap="square" lIns="18288" tIns="18288" rIns="18288" bIns="18288" anchor="t">
+          <a:bodyPr wrap="square" anchor="t" lIns="18288" rIns="18288" tIns="18288" bIns="18288">
             <a:spAutoFit/>
           </a:bodyPr>
           <a:lstStyle/>
@@ -10550,7 +10784,7 @@
           </a:fontRef>
         </p:style>
         <p:txBody>
-          <a:bodyPr wrap="square" lIns="109728" tIns="54864" rIns="109728" bIns="54864" rtlCol="0" anchor="ctr"/>
+          <a:bodyPr rtlCol="0" anchor="ctr" wrap="square" lIns="109728" rIns="109728" tIns="54864" bIns="54864"/>
           <a:lstStyle/>
           <a:p>
             <a:pPr algn="ctr">
@@ -10587,12 +10821,12 @@
           <a:noFill/>
         </p:spPr>
         <p:txBody>
-          <a:bodyPr wrap="square" lIns="18288" tIns="18288" rIns="18288" bIns="18288" anchor="t">
+          <a:bodyPr wrap="square" anchor="t" lIns="18288" rIns="18288" tIns="18288" bIns="18288">
             <a:spAutoFit/>
           </a:bodyPr>
           <a:lstStyle/>
           <a:p>
-            <a:pPr marL="274320" indent="-274320" algn="l">
+            <a:pPr algn="l" marL="274320" indent="-274320">
               <a:spcAft>
                 <a:spcPts val="1000"/>
               </a:spcAft>
@@ -10610,7 +10844,7 @@
             </a:r>
           </a:p>
           <a:p>
-            <a:pPr marL="274320" indent="-274320" algn="l">
+            <a:pPr algn="l" marL="274320" indent="-274320">
               <a:spcAft>
                 <a:spcPts val="1000"/>
               </a:spcAft>
@@ -10628,7 +10862,7 @@
             </a:r>
           </a:p>
           <a:p>
-            <a:pPr marL="274320" indent="-274320" algn="l">
+            <a:pPr algn="l" marL="274320" indent="-274320">
               <a:spcAft>
                 <a:spcPts val="1000"/>
               </a:spcAft>
@@ -10646,7 +10880,7 @@
             </a:r>
           </a:p>
           <a:p>
-            <a:pPr marL="274320" indent="-274320" algn="l">
+            <a:pPr algn="l" marL="274320" indent="-274320">
               <a:spcAft>
                 <a:spcPts val="1000"/>
               </a:spcAft>
@@ -10674,7 +10908,7 @@
 </file>
 
 <file path=ppt/slides/slide16.xml><?xml version="1.0" encoding="utf-8"?>
-<p:sld xmlns:a="http://schemas.openxmlformats.org/drawingml/2006/main" xmlns:r="http://schemas.openxmlformats.org/officeDocument/2006/relationships" xmlns:p="http://schemas.openxmlformats.org/presentationml/2006/main">
+<p:sld xmlns:a="http://schemas.openxmlformats.org/drawingml/2006/main" xmlns:p="http://schemas.openxmlformats.org/presentationml/2006/main" xmlns:r="http://schemas.openxmlformats.org/officeDocument/2006/relationships">
   <p:cSld>
     <p:bg>
       <p:bgPr>
@@ -10690,14 +10924,7 @@
         <p:cNvGrpSpPr/>
         <p:nvPr/>
       </p:nvGrpSpPr>
-      <p:grpSpPr>
-        <a:xfrm>
-          <a:off x="0" y="0"/>
-          <a:ext cx="0" cy="0"/>
-          <a:chOff x="0" y="0"/>
-          <a:chExt cx="0" cy="0"/>
-        </a:xfrm>
-      </p:grpSpPr>
+      <p:grpSpPr/>
       <p:sp>
         <p:nvSpPr>
           <p:cNvPr id="2" name="TextBox 1"/>
@@ -10715,7 +10942,7 @@
           <a:noFill/>
         </p:spPr>
         <p:txBody>
-          <a:bodyPr wrap="square" lIns="18288" tIns="18288" rIns="18288" bIns="18288" anchor="t">
+          <a:bodyPr wrap="square" anchor="t" lIns="18288" rIns="18288" tIns="18288" bIns="18288">
             <a:spAutoFit/>
           </a:bodyPr>
           <a:lstStyle/>
@@ -10754,7 +10981,7 @@
           <a:noFill/>
         </p:spPr>
         <p:txBody>
-          <a:bodyPr wrap="square" lIns="18288" tIns="18288" rIns="18288" bIns="18288" anchor="t">
+          <a:bodyPr wrap="square" anchor="t" lIns="18288" rIns="18288" tIns="18288" bIns="18288">
             <a:spAutoFit/>
           </a:bodyPr>
           <a:lstStyle/>
@@ -10793,7 +11020,7 @@
           <a:noFill/>
         </p:spPr>
         <p:txBody>
-          <a:bodyPr wrap="square" lIns="18288" tIns="18288" rIns="18288" bIns="18288" anchor="t">
+          <a:bodyPr wrap="square" anchor="t" lIns="18288" rIns="18288" tIns="18288" bIns="18288">
             <a:spAutoFit/>
           </a:bodyPr>
           <a:lstStyle/>
@@ -10854,11 +11081,10 @@
           </a:fontRef>
         </p:style>
         <p:txBody>
-          <a:bodyPr wrap="square" lIns="109728" tIns="54864" rIns="109728" bIns="54864" rtlCol="0" anchor="ctr"/>
+          <a:bodyPr rtlCol="0" anchor="ctr" wrap="square" lIns="109728" rIns="109728" tIns="54864" bIns="54864"/>
           <a:lstStyle/>
           <a:p>
             <a:pPr algn="ctr"/>
-            <a:endParaRPr/>
           </a:p>
         </p:txBody>
       </p:sp>
@@ -10879,7 +11105,7 @@
           <a:noFill/>
         </p:spPr>
         <p:txBody>
-          <a:bodyPr wrap="square" lIns="18288" tIns="18288" rIns="18288" bIns="18288" anchor="t">
+          <a:bodyPr wrap="square" anchor="t" lIns="18288" rIns="18288" tIns="18288" bIns="18288">
             <a:spAutoFit/>
           </a:bodyPr>
           <a:lstStyle/>
@@ -10918,7 +11144,7 @@
           <a:noFill/>
         </p:spPr>
         <p:txBody>
-          <a:bodyPr wrap="square" lIns="18288" tIns="18288" rIns="18288" bIns="18288" anchor="t">
+          <a:bodyPr wrap="square" anchor="t" lIns="18288" rIns="18288" tIns="18288" bIns="18288">
             <a:spAutoFit/>
           </a:bodyPr>
           <a:lstStyle/>
@@ -10979,7 +11205,7 @@
           </a:fontRef>
         </p:style>
         <p:txBody>
-          <a:bodyPr wrap="square" lIns="109728" tIns="54864" rIns="109728" bIns="54864" rtlCol="0" anchor="ctr"/>
+          <a:bodyPr rtlCol="0" anchor="ctr" wrap="square" lIns="109728" rIns="109728" tIns="54864" bIns="54864"/>
           <a:lstStyle/>
           <a:p>
             <a:pPr algn="ctr">
@@ -11016,7 +11242,7 @@
           <a:noFill/>
         </p:spPr>
         <p:txBody>
-          <a:bodyPr wrap="square" lIns="18288" tIns="18288" rIns="18288" bIns="18288" anchor="t">
+          <a:bodyPr wrap="square" anchor="t" lIns="18288" rIns="18288" tIns="18288" bIns="18288">
             <a:spAutoFit/>
           </a:bodyPr>
           <a:lstStyle/>
@@ -11077,11 +11303,10 @@
           </a:fontRef>
         </p:style>
         <p:txBody>
-          <a:bodyPr wrap="square" lIns="109728" tIns="54864" rIns="109728" bIns="54864" rtlCol="0" anchor="ctr"/>
+          <a:bodyPr rtlCol="0" anchor="ctr" wrap="square" lIns="109728" rIns="109728" tIns="54864" bIns="54864"/>
           <a:lstStyle/>
           <a:p>
             <a:pPr algn="ctr"/>
-            <a:endParaRPr/>
           </a:p>
         </p:txBody>
       </p:sp>
@@ -11102,7 +11327,7 @@
           <a:noFill/>
         </p:spPr>
         <p:txBody>
-          <a:bodyPr wrap="square" lIns="18288" tIns="18288" rIns="18288" bIns="18288" anchor="t">
+          <a:bodyPr wrap="square" anchor="t" lIns="18288" rIns="18288" tIns="18288" bIns="18288">
             <a:spAutoFit/>
           </a:bodyPr>
           <a:lstStyle/>
@@ -11141,7 +11366,7 @@
           <a:noFill/>
         </p:spPr>
         <p:txBody>
-          <a:bodyPr wrap="square" lIns="18288" tIns="18288" rIns="18288" bIns="18288" anchor="t">
+          <a:bodyPr wrap="square" anchor="t" lIns="18288" rIns="18288" tIns="18288" bIns="18288">
             <a:spAutoFit/>
           </a:bodyPr>
           <a:lstStyle/>
@@ -11202,7 +11427,7 @@
           </a:fontRef>
         </p:style>
         <p:txBody>
-          <a:bodyPr wrap="square" lIns="109728" tIns="54864" rIns="109728" bIns="54864" rtlCol="0" anchor="ctr"/>
+          <a:bodyPr rtlCol="0" anchor="ctr" wrap="square" lIns="109728" rIns="109728" tIns="54864" bIns="54864"/>
           <a:lstStyle/>
           <a:p>
             <a:pPr algn="ctr">
@@ -11239,7 +11464,7 @@
           <a:noFill/>
         </p:spPr>
         <p:txBody>
-          <a:bodyPr wrap="square" lIns="18288" tIns="18288" rIns="18288" bIns="18288" anchor="t">
+          <a:bodyPr wrap="square" anchor="t" lIns="18288" rIns="18288" tIns="18288" bIns="18288">
             <a:spAutoFit/>
           </a:bodyPr>
           <a:lstStyle/>
@@ -11300,11 +11525,10 @@
           </a:fontRef>
         </p:style>
         <p:txBody>
-          <a:bodyPr wrap="square" lIns="109728" tIns="54864" rIns="109728" bIns="54864" rtlCol="0" anchor="ctr"/>
+          <a:bodyPr rtlCol="0" anchor="ctr" wrap="square" lIns="109728" rIns="109728" tIns="54864" bIns="54864"/>
           <a:lstStyle/>
           <a:p>
             <a:pPr algn="ctr"/>
-            <a:endParaRPr/>
           </a:p>
         </p:txBody>
       </p:sp>
@@ -11325,7 +11549,7 @@
           <a:noFill/>
         </p:spPr>
         <p:txBody>
-          <a:bodyPr wrap="square" lIns="18288" tIns="18288" rIns="18288" bIns="18288" anchor="t">
+          <a:bodyPr wrap="square" anchor="t" lIns="18288" rIns="18288" tIns="18288" bIns="18288">
             <a:spAutoFit/>
           </a:bodyPr>
           <a:lstStyle/>
@@ -11364,7 +11588,7 @@
           <a:noFill/>
         </p:spPr>
         <p:txBody>
-          <a:bodyPr wrap="square" lIns="18288" tIns="18288" rIns="18288" bIns="18288" anchor="t">
+          <a:bodyPr wrap="square" anchor="t" lIns="18288" rIns="18288" tIns="18288" bIns="18288">
             <a:spAutoFit/>
           </a:bodyPr>
           <a:lstStyle/>
@@ -11425,7 +11649,7 @@
           </a:fontRef>
         </p:style>
         <p:txBody>
-          <a:bodyPr wrap="square" lIns="109728" tIns="54864" rIns="109728" bIns="54864" rtlCol="0" anchor="ctr"/>
+          <a:bodyPr rtlCol="0" anchor="ctr" wrap="square" lIns="109728" rIns="109728" tIns="54864" bIns="54864"/>
           <a:lstStyle/>
           <a:p>
             <a:pPr algn="ctr">
@@ -11462,7 +11686,7 @@
           <a:noFill/>
         </p:spPr>
         <p:txBody>
-          <a:bodyPr wrap="square" lIns="18288" tIns="18288" rIns="18288" bIns="18288" anchor="t">
+          <a:bodyPr wrap="square" anchor="t" lIns="18288" rIns="18288" tIns="18288" bIns="18288">
             <a:spAutoFit/>
           </a:bodyPr>
           <a:lstStyle/>
@@ -11523,7 +11747,7 @@
           </a:fontRef>
         </p:style>
         <p:txBody>
-          <a:bodyPr wrap="square" lIns="109728" tIns="54864" rIns="109728" bIns="54864" rtlCol="0" anchor="ctr"/>
+          <a:bodyPr rtlCol="0" anchor="ctr" wrap="square" lIns="109728" rIns="109728" tIns="54864" bIns="54864"/>
           <a:lstStyle/>
           <a:p>
             <a:pPr algn="l">
@@ -11569,7 +11793,7 @@
           <a:noFill/>
         </p:spPr>
         <p:txBody>
-          <a:bodyPr wrap="square" lIns="18288" tIns="18288" rIns="18288" bIns="18288" anchor="t">
+          <a:bodyPr wrap="square" anchor="t" lIns="18288" rIns="18288" tIns="18288" bIns="18288">
             <a:spAutoFit/>
           </a:bodyPr>
           <a:lstStyle/>
@@ -11609,7 +11833,7 @@
         <p:spPr>
           <a:xfrm>
             <a:off x="594360" y="6035040"/>
-            <a:ext cx="11002975" cy="267766"/>
+            <a:ext cx="11002975" cy="365760"/>
           </a:xfrm>
           <a:prstGeom prst="rect">
             <a:avLst/>
@@ -11617,7 +11841,7 @@
           <a:noFill/>
         </p:spPr>
         <p:txBody>
-          <a:bodyPr wrap="square" lIns="18288" tIns="18288" rIns="18288" bIns="18288" anchor="t">
+          <a:bodyPr wrap="square" anchor="t" lIns="18288" rIns="18288" tIns="18288" bIns="18288">
             <a:spAutoFit/>
           </a:bodyPr>
           <a:lstStyle/>
@@ -11634,14 +11858,8 @@
                 </a:solidFill>
                 <a:latin typeface="Segoe UI"/>
               </a:rPr>
-              <a:t>Thank you.</a:t>
-            </a:r>
-            <a:endParaRPr sz="1500" b="1" i="0" dirty="0">
-              <a:solidFill>
-                <a:srgbClr val="FFFFFF"/>
-              </a:solidFill>
-              <a:latin typeface="Segoe UI"/>
-            </a:endParaRPr>
+              <a:t>Thank you. Questions are welcome, and any file can be opened live.</a:t>
+            </a:r>
           </a:p>
         </p:txBody>
       </p:sp>
@@ -11654,7 +11872,7 @@
 </file>
 
 <file path=ppt/slides/slide2.xml><?xml version="1.0" encoding="utf-8"?>
-<p:sld xmlns:a="http://schemas.openxmlformats.org/drawingml/2006/main" xmlns:r="http://schemas.openxmlformats.org/officeDocument/2006/relationships" xmlns:p="http://schemas.openxmlformats.org/presentationml/2006/main">
+<p:sld xmlns:a="http://schemas.openxmlformats.org/drawingml/2006/main" xmlns:p="http://schemas.openxmlformats.org/presentationml/2006/main" xmlns:r="http://schemas.openxmlformats.org/officeDocument/2006/relationships">
   <p:cSld>
     <p:bg>
       <p:bgPr>
@@ -11670,14 +11888,7 @@
         <p:cNvGrpSpPr/>
         <p:nvPr/>
       </p:nvGrpSpPr>
-      <p:grpSpPr>
-        <a:xfrm>
-          <a:off x="0" y="0"/>
-          <a:ext cx="0" cy="0"/>
-          <a:chOff x="0" y="0"/>
-          <a:chExt cx="0" cy="0"/>
-        </a:xfrm>
-      </p:grpSpPr>
+      <p:grpSpPr/>
       <p:sp>
         <p:nvSpPr>
           <p:cNvPr id="2" name="TextBox 1"/>
@@ -11695,7 +11906,7 @@
           <a:noFill/>
         </p:spPr>
         <p:txBody>
-          <a:bodyPr wrap="square" lIns="18288" tIns="18288" rIns="18288" bIns="18288" anchor="t">
+          <a:bodyPr wrap="square" anchor="t" lIns="18288" rIns="18288" tIns="18288" bIns="18288">
             <a:spAutoFit/>
           </a:bodyPr>
           <a:lstStyle/>
@@ -11734,7 +11945,7 @@
           <a:noFill/>
         </p:spPr>
         <p:txBody>
-          <a:bodyPr wrap="square" lIns="18288" tIns="18288" rIns="18288" bIns="18288" anchor="t">
+          <a:bodyPr wrap="square" anchor="t" lIns="18288" rIns="18288" tIns="18288" bIns="18288">
             <a:spAutoFit/>
           </a:bodyPr>
           <a:lstStyle/>
@@ -11773,7 +11984,7 @@
           <a:noFill/>
         </p:spPr>
         <p:txBody>
-          <a:bodyPr wrap="square" lIns="18288" tIns="18288" rIns="18288" bIns="18288" anchor="t">
+          <a:bodyPr wrap="square" anchor="t" lIns="18288" rIns="18288" tIns="18288" bIns="18288">
             <a:spAutoFit/>
           </a:bodyPr>
           <a:lstStyle/>
@@ -11834,7 +12045,7 @@
           </a:fontRef>
         </p:style>
         <p:txBody>
-          <a:bodyPr wrap="square" lIns="109728" tIns="54864" rIns="109728" bIns="54864" rtlCol="0" anchor="ctr"/>
+          <a:bodyPr rtlCol="0" anchor="ctr" wrap="square" lIns="109728" rIns="109728" tIns="54864" bIns="54864"/>
           <a:lstStyle/>
           <a:p>
             <a:pPr algn="l">
@@ -11887,7 +12098,7 @@
           <a:noFill/>
         </p:spPr>
         <p:txBody>
-          <a:bodyPr wrap="square" lIns="18288" tIns="18288" rIns="18288" bIns="18288" anchor="t">
+          <a:bodyPr wrap="square" anchor="t" lIns="18288" rIns="18288" tIns="18288" bIns="18288">
             <a:spAutoFit/>
           </a:bodyPr>
           <a:lstStyle/>
@@ -11926,12 +12137,12 @@
           <a:noFill/>
         </p:spPr>
         <p:txBody>
-          <a:bodyPr wrap="square" lIns="18288" tIns="18288" rIns="18288" bIns="18288" anchor="t">
+          <a:bodyPr wrap="square" anchor="t" lIns="18288" rIns="18288" tIns="18288" bIns="18288">
             <a:spAutoFit/>
           </a:bodyPr>
           <a:lstStyle/>
           <a:p>
-            <a:pPr marL="274320" indent="-274320" algn="l">
+            <a:pPr algn="l" marL="274320" indent="-274320">
               <a:spcAft>
                 <a:spcPts val="1000"/>
               </a:spcAft>
@@ -11949,7 +12160,7 @@
             </a:r>
           </a:p>
           <a:p>
-            <a:pPr marL="274320" indent="-274320" algn="l">
+            <a:pPr algn="l" marL="274320" indent="-274320">
               <a:spcAft>
                 <a:spcPts val="1000"/>
               </a:spcAft>
@@ -11967,7 +12178,7 @@
             </a:r>
           </a:p>
           <a:p>
-            <a:pPr marL="274320" indent="-274320" algn="l">
+            <a:pPr algn="l" marL="274320" indent="-274320">
               <a:spcAft>
                 <a:spcPts val="1000"/>
               </a:spcAft>
@@ -11985,7 +12196,7 @@
             </a:r>
           </a:p>
           <a:p>
-            <a:pPr marL="274320" indent="-274320" algn="l">
+            <a:pPr algn="l" marL="274320" indent="-274320">
               <a:spcAft>
                 <a:spcPts val="1000"/>
               </a:spcAft>
@@ -12045,11 +12256,10 @@
           </a:fontRef>
         </p:style>
         <p:txBody>
-          <a:bodyPr wrap="square" lIns="109728" tIns="54864" rIns="109728" bIns="54864" rtlCol="0" anchor="ctr"/>
+          <a:bodyPr rtlCol="0" anchor="ctr" wrap="square" lIns="109728" rIns="109728" tIns="54864" bIns="54864"/>
           <a:lstStyle/>
           <a:p>
             <a:pPr algn="ctr"/>
-            <a:endParaRPr/>
           </a:p>
         </p:txBody>
       </p:sp>
@@ -12070,7 +12280,7 @@
           <a:noFill/>
         </p:spPr>
         <p:txBody>
-          <a:bodyPr wrap="square" lIns="18288" tIns="18288" rIns="18288" bIns="18288" anchor="t">
+          <a:bodyPr wrap="square" anchor="t" lIns="18288" rIns="18288" tIns="18288" bIns="18288">
             <a:spAutoFit/>
           </a:bodyPr>
           <a:lstStyle/>
@@ -12109,7 +12319,7 @@
           <a:noFill/>
         </p:spPr>
         <p:txBody>
-          <a:bodyPr wrap="square" lIns="18288" tIns="18288" rIns="18288" bIns="18288" anchor="t">
+          <a:bodyPr wrap="square" anchor="t" lIns="18288" rIns="18288" tIns="18288" bIns="18288">
             <a:spAutoFit/>
           </a:bodyPr>
           <a:lstStyle/>
@@ -12202,7 +12412,7 @@
           <a:noFill/>
         </p:spPr>
         <p:txBody>
-          <a:bodyPr wrap="square" lIns="18288" tIns="18288" rIns="18288" bIns="18288" anchor="t">
+          <a:bodyPr wrap="square" anchor="t" lIns="18288" rIns="18288" tIns="18288" bIns="18288">
             <a:spAutoFit/>
           </a:bodyPr>
           <a:lstStyle/>
@@ -12311,7 +12521,7 @@
           <a:noFill/>
         </p:spPr>
         <p:txBody>
-          <a:bodyPr wrap="square" lIns="18288" tIns="18288" rIns="18288" bIns="18288" anchor="t">
+          <a:bodyPr wrap="square" anchor="t" lIns="18288" rIns="18288" tIns="18288" bIns="18288">
             <a:spAutoFit/>
           </a:bodyPr>
           <a:lstStyle/>
@@ -12385,7 +12595,7 @@
           <a:noFill/>
         </p:spPr>
         <p:txBody>
-          <a:bodyPr wrap="square" lIns="18288" tIns="18288" rIns="18288" bIns="18288" anchor="t">
+          <a:bodyPr wrap="square" anchor="t" lIns="18288" rIns="18288" tIns="18288" bIns="18288">
             <a:spAutoFit/>
           </a:bodyPr>
           <a:lstStyle/>
@@ -12459,7 +12669,7 @@
           <a:noFill/>
         </p:spPr>
         <p:txBody>
-          <a:bodyPr wrap="square" lIns="18288" tIns="18288" rIns="18288" bIns="18288" anchor="t">
+          <a:bodyPr wrap="square" anchor="t" lIns="18288" rIns="18288" tIns="18288" bIns="18288">
             <a:spAutoFit/>
           </a:bodyPr>
           <a:lstStyle/>
@@ -12558,11 +12768,10 @@
           </a:fontRef>
         </p:style>
         <p:txBody>
-          <a:bodyPr wrap="square" lIns="109728" tIns="54864" rIns="109728" bIns="54864" rtlCol="0" anchor="ctr"/>
+          <a:bodyPr rtlCol="0" anchor="ctr" wrap="square" lIns="109728" rIns="109728" tIns="54864" bIns="54864"/>
           <a:lstStyle/>
           <a:p>
             <a:pPr algn="ctr"/>
-            <a:endParaRPr/>
           </a:p>
         </p:txBody>
       </p:sp>
@@ -12606,7 +12815,6 @@
           <a:lstStyle/>
           <a:p>
             <a:pPr algn="ctr"/>
-            <a:endParaRPr/>
           </a:p>
         </p:txBody>
       </p:sp>
@@ -12627,7 +12835,7 @@
           <a:noFill/>
         </p:spPr>
         <p:txBody>
-          <a:bodyPr wrap="square" lIns="18288" tIns="18288" rIns="18288" bIns="18288" anchor="t">
+          <a:bodyPr wrap="square" anchor="t" lIns="18288" rIns="18288" tIns="18288" bIns="18288">
             <a:spAutoFit/>
           </a:bodyPr>
           <a:lstStyle/>
@@ -12666,7 +12874,7 @@
           <a:noFill/>
         </p:spPr>
         <p:txBody>
-          <a:bodyPr wrap="square" lIns="18288" tIns="18288" rIns="18288" bIns="18288" anchor="t">
+          <a:bodyPr wrap="square" anchor="t" lIns="18288" rIns="18288" tIns="18288" bIns="18288">
             <a:spAutoFit/>
           </a:bodyPr>
           <a:lstStyle/>
@@ -12727,7 +12935,7 @@
           </a:fontRef>
         </p:style>
         <p:txBody>
-          <a:bodyPr wrap="square" lIns="109728" tIns="54864" rIns="109728" bIns="54864" rtlCol="0" anchor="ctr"/>
+          <a:bodyPr rtlCol="0" anchor="ctr" wrap="square" lIns="109728" rIns="109728" tIns="54864" bIns="54864"/>
           <a:lstStyle/>
           <a:p>
             <a:pPr algn="ctr">
@@ -12764,7 +12972,7 @@
           <a:noFill/>
         </p:spPr>
         <p:txBody>
-          <a:bodyPr wrap="square" lIns="18288" tIns="18288" rIns="18288" bIns="18288" anchor="t">
+          <a:bodyPr wrap="square" anchor="t" lIns="18288" rIns="18288" tIns="18288" bIns="18288">
             <a:spAutoFit/>
           </a:bodyPr>
           <a:lstStyle/>
@@ -12873,7 +13081,7 @@
           <a:noFill/>
         </p:spPr>
         <p:txBody>
-          <a:bodyPr wrap="square" lIns="18288" tIns="18288" rIns="18288" bIns="18288" anchor="t">
+          <a:bodyPr wrap="square" anchor="t" lIns="18288" rIns="18288" tIns="18288" bIns="18288">
             <a:spAutoFit/>
           </a:bodyPr>
           <a:lstStyle/>
@@ -12947,7 +13155,7 @@
           <a:noFill/>
         </p:spPr>
         <p:txBody>
-          <a:bodyPr wrap="square" lIns="18288" tIns="18288" rIns="18288" bIns="18288" anchor="t">
+          <a:bodyPr wrap="square" anchor="t" lIns="18288" rIns="18288" tIns="18288" bIns="18288">
             <a:spAutoFit/>
           </a:bodyPr>
           <a:lstStyle/>
@@ -13021,7 +13229,7 @@
           <a:noFill/>
         </p:spPr>
         <p:txBody>
-          <a:bodyPr wrap="square" lIns="18288" tIns="18288" rIns="18288" bIns="18288" anchor="t">
+          <a:bodyPr wrap="square" anchor="t" lIns="18288" rIns="18288" tIns="18288" bIns="18288">
             <a:spAutoFit/>
           </a:bodyPr>
           <a:lstStyle/>
@@ -13095,7 +13303,7 @@
           <a:noFill/>
         </p:spPr>
         <p:txBody>
-          <a:bodyPr wrap="square" lIns="18288" tIns="18288" rIns="18288" bIns="18288" anchor="t">
+          <a:bodyPr wrap="square" anchor="t" lIns="18288" rIns="18288" tIns="18288" bIns="18288">
             <a:spAutoFit/>
           </a:bodyPr>
           <a:lstStyle/>
@@ -13194,11 +13402,10 @@
           </a:fontRef>
         </p:style>
         <p:txBody>
-          <a:bodyPr wrap="square" lIns="109728" tIns="54864" rIns="109728" bIns="54864" rtlCol="0" anchor="ctr"/>
+          <a:bodyPr rtlCol="0" anchor="ctr" wrap="square" lIns="109728" rIns="109728" tIns="54864" bIns="54864"/>
           <a:lstStyle/>
           <a:p>
             <a:pPr algn="ctr"/>
-            <a:endParaRPr/>
           </a:p>
         </p:txBody>
       </p:sp>
@@ -13242,7 +13449,6 @@
           <a:lstStyle/>
           <a:p>
             <a:pPr algn="ctr"/>
-            <a:endParaRPr/>
           </a:p>
         </p:txBody>
       </p:sp>
@@ -13263,7 +13469,7 @@
           <a:noFill/>
         </p:spPr>
         <p:txBody>
-          <a:bodyPr wrap="square" lIns="18288" tIns="18288" rIns="18288" bIns="18288" anchor="t">
+          <a:bodyPr wrap="square" anchor="t" lIns="18288" rIns="18288" tIns="18288" bIns="18288">
             <a:spAutoFit/>
           </a:bodyPr>
           <a:lstStyle/>
@@ -13302,7 +13508,7 @@
           <a:noFill/>
         </p:spPr>
         <p:txBody>
-          <a:bodyPr wrap="square" lIns="18288" tIns="18288" rIns="18288" bIns="18288" anchor="t">
+          <a:bodyPr wrap="square" anchor="t" lIns="18288" rIns="18288" tIns="18288" bIns="18288">
             <a:spAutoFit/>
           </a:bodyPr>
           <a:lstStyle/>
@@ -13363,7 +13569,7 @@
           </a:fontRef>
         </p:style>
         <p:txBody>
-          <a:bodyPr wrap="square" lIns="109728" tIns="54864" rIns="109728" bIns="54864" rtlCol="0" anchor="ctr"/>
+          <a:bodyPr rtlCol="0" anchor="ctr" wrap="square" lIns="109728" rIns="109728" tIns="54864" bIns="54864"/>
           <a:lstStyle/>
           <a:p>
             <a:pPr algn="ctr">
@@ -13400,7 +13606,7 @@
           <a:noFill/>
         </p:spPr>
         <p:txBody>
-          <a:bodyPr wrap="square" lIns="18288" tIns="18288" rIns="18288" bIns="18288" anchor="t">
+          <a:bodyPr wrap="square" anchor="t" lIns="18288" rIns="18288" tIns="18288" bIns="18288">
             <a:spAutoFit/>
           </a:bodyPr>
           <a:lstStyle/>
@@ -13509,7 +13715,7 @@
           <a:noFill/>
         </p:spPr>
         <p:txBody>
-          <a:bodyPr wrap="square" lIns="18288" tIns="18288" rIns="18288" bIns="18288" anchor="t">
+          <a:bodyPr wrap="square" anchor="t" lIns="18288" rIns="18288" tIns="18288" bIns="18288">
             <a:spAutoFit/>
           </a:bodyPr>
           <a:lstStyle/>
@@ -13583,7 +13789,7 @@
           <a:noFill/>
         </p:spPr>
         <p:txBody>
-          <a:bodyPr wrap="square" lIns="18288" tIns="18288" rIns="18288" bIns="18288" anchor="t">
+          <a:bodyPr wrap="square" anchor="t" lIns="18288" rIns="18288" tIns="18288" bIns="18288">
             <a:spAutoFit/>
           </a:bodyPr>
           <a:lstStyle/>
@@ -13657,7 +13863,7 @@
           <a:noFill/>
         </p:spPr>
         <p:txBody>
-          <a:bodyPr wrap="square" lIns="18288" tIns="18288" rIns="18288" bIns="18288" anchor="t">
+          <a:bodyPr wrap="square" anchor="t" lIns="18288" rIns="18288" tIns="18288" bIns="18288">
             <a:spAutoFit/>
           </a:bodyPr>
           <a:lstStyle/>
@@ -13756,11 +13962,10 @@
           </a:fontRef>
         </p:style>
         <p:txBody>
-          <a:bodyPr wrap="square" lIns="109728" tIns="54864" rIns="109728" bIns="54864" rtlCol="0" anchor="ctr"/>
+          <a:bodyPr rtlCol="0" anchor="ctr" wrap="square" lIns="109728" rIns="109728" tIns="54864" bIns="54864"/>
           <a:lstStyle/>
           <a:p>
             <a:pPr algn="ctr"/>
-            <a:endParaRPr/>
           </a:p>
         </p:txBody>
       </p:sp>
@@ -13804,7 +14009,6 @@
           <a:lstStyle/>
           <a:p>
             <a:pPr algn="ctr"/>
-            <a:endParaRPr/>
           </a:p>
         </p:txBody>
       </p:sp>
@@ -13825,7 +14029,7 @@
           <a:noFill/>
         </p:spPr>
         <p:txBody>
-          <a:bodyPr wrap="square" lIns="18288" tIns="18288" rIns="18288" bIns="18288" anchor="t">
+          <a:bodyPr wrap="square" anchor="t" lIns="18288" rIns="18288" tIns="18288" bIns="18288">
             <a:spAutoFit/>
           </a:bodyPr>
           <a:lstStyle/>
@@ -13864,7 +14068,7 @@
           <a:noFill/>
         </p:spPr>
         <p:txBody>
-          <a:bodyPr wrap="square" lIns="18288" tIns="18288" rIns="18288" bIns="18288" anchor="t">
+          <a:bodyPr wrap="square" anchor="t" lIns="18288" rIns="18288" tIns="18288" bIns="18288">
             <a:spAutoFit/>
           </a:bodyPr>
           <a:lstStyle/>
@@ -13925,7 +14129,7 @@
           </a:fontRef>
         </p:style>
         <p:txBody>
-          <a:bodyPr wrap="square" lIns="109728" tIns="54864" rIns="109728" bIns="54864" rtlCol="0" anchor="ctr"/>
+          <a:bodyPr rtlCol="0" anchor="ctr" wrap="square" lIns="109728" rIns="109728" tIns="54864" bIns="54864"/>
           <a:lstStyle/>
           <a:p>
             <a:pPr algn="ctr">
@@ -13954,7 +14158,7 @@
 </file>
 
 <file path=ppt/slides/slide3.xml><?xml version="1.0" encoding="utf-8"?>
-<p:sld xmlns:a="http://schemas.openxmlformats.org/drawingml/2006/main" xmlns:r="http://schemas.openxmlformats.org/officeDocument/2006/relationships" xmlns:p="http://schemas.openxmlformats.org/presentationml/2006/main">
+<p:sld xmlns:a="http://schemas.openxmlformats.org/drawingml/2006/main" xmlns:p="http://schemas.openxmlformats.org/presentationml/2006/main" xmlns:r="http://schemas.openxmlformats.org/officeDocument/2006/relationships">
   <p:cSld>
     <p:bg>
       <p:bgPr>
@@ -13970,14 +14174,7 @@
         <p:cNvGrpSpPr/>
         <p:nvPr/>
       </p:nvGrpSpPr>
-      <p:grpSpPr>
-        <a:xfrm>
-          <a:off x="0" y="0"/>
-          <a:ext cx="0" cy="0"/>
-          <a:chOff x="0" y="0"/>
-          <a:chExt cx="0" cy="0"/>
-        </a:xfrm>
-      </p:grpSpPr>
+      <p:grpSpPr/>
       <p:sp>
         <p:nvSpPr>
           <p:cNvPr id="2" name="TextBox 1"/>
@@ -13995,7 +14192,7 @@
           <a:noFill/>
         </p:spPr>
         <p:txBody>
-          <a:bodyPr wrap="square" lIns="18288" tIns="18288" rIns="18288" bIns="18288" anchor="t">
+          <a:bodyPr wrap="square" anchor="t" lIns="18288" rIns="18288" tIns="18288" bIns="18288">
             <a:spAutoFit/>
           </a:bodyPr>
           <a:lstStyle/>
@@ -14034,7 +14231,7 @@
           <a:noFill/>
         </p:spPr>
         <p:txBody>
-          <a:bodyPr wrap="square" lIns="18288" tIns="18288" rIns="18288" bIns="18288" anchor="t">
+          <a:bodyPr wrap="square" anchor="t" lIns="18288" rIns="18288" tIns="18288" bIns="18288">
             <a:spAutoFit/>
           </a:bodyPr>
           <a:lstStyle/>
@@ -14073,7 +14270,7 @@
           <a:noFill/>
         </p:spPr>
         <p:txBody>
-          <a:bodyPr wrap="square" lIns="18288" tIns="18288" rIns="18288" bIns="18288" anchor="t">
+          <a:bodyPr wrap="square" anchor="t" lIns="18288" rIns="18288" tIns="18288" bIns="18288">
             <a:spAutoFit/>
           </a:bodyPr>
           <a:lstStyle/>
@@ -14136,11 +14333,10 @@
           </a:fontRef>
         </p:style>
         <p:txBody>
-          <a:bodyPr wrap="square" lIns="109728" tIns="54864" rIns="109728" bIns="54864" rtlCol="0" anchor="ctr"/>
+          <a:bodyPr rtlCol="0" anchor="ctr" wrap="square" lIns="109728" rIns="109728" tIns="54864" bIns="54864"/>
           <a:lstStyle/>
           <a:p>
             <a:pPr algn="ctr"/>
-            <a:endParaRPr/>
           </a:p>
         </p:txBody>
       </p:sp>
@@ -14183,7 +14379,7 @@
           </a:fontRef>
         </p:style>
         <p:txBody>
-          <a:bodyPr wrap="square" lIns="109728" tIns="54864" rIns="109728" bIns="54864" rtlCol="0" anchor="ctr"/>
+          <a:bodyPr rtlCol="0" anchor="ctr" wrap="square" lIns="109728" rIns="109728" tIns="54864" bIns="54864"/>
           <a:lstStyle/>
           <a:p>
             <a:pPr algn="ctr">
@@ -14236,12 +14432,12 @@
           <a:noFill/>
         </p:spPr>
         <p:txBody>
-          <a:bodyPr wrap="square" lIns="18288" tIns="18288" rIns="18288" bIns="18288" anchor="t">
+          <a:bodyPr wrap="square" anchor="t" lIns="18288" rIns="18288" tIns="18288" bIns="18288">
             <a:spAutoFit/>
           </a:bodyPr>
           <a:lstStyle/>
           <a:p>
-            <a:pPr marL="274320" indent="-274320" algn="l">
+            <a:pPr algn="l" marL="274320" indent="-274320">
               <a:spcAft>
                 <a:spcPts val="1400"/>
               </a:spcAft>
@@ -14259,7 +14455,7 @@
             </a:r>
           </a:p>
           <a:p>
-            <a:pPr marL="274320" indent="-274320" algn="l">
+            <a:pPr algn="l" marL="274320" indent="-274320">
               <a:spcAft>
                 <a:spcPts val="1400"/>
               </a:spcAft>
@@ -14277,7 +14473,7 @@
             </a:r>
           </a:p>
           <a:p>
-            <a:pPr marL="274320" indent="-274320" algn="l">
+            <a:pPr algn="l" marL="274320" indent="-274320">
               <a:spcAft>
                 <a:spcPts val="1400"/>
               </a:spcAft>
@@ -14355,11 +14551,10 @@
           </a:fontRef>
         </p:style>
         <p:txBody>
-          <a:bodyPr wrap="square" lIns="109728" tIns="54864" rIns="109728" bIns="54864" rtlCol="0" anchor="ctr"/>
+          <a:bodyPr rtlCol="0" anchor="ctr" wrap="square" lIns="109728" rIns="109728" tIns="54864" bIns="54864"/>
           <a:lstStyle/>
           <a:p>
             <a:pPr algn="ctr"/>
-            <a:endParaRPr/>
           </a:p>
         </p:txBody>
       </p:sp>
@@ -14402,7 +14597,7 @@
           </a:fontRef>
         </p:style>
         <p:txBody>
-          <a:bodyPr wrap="square" lIns="109728" tIns="54864" rIns="109728" bIns="54864" rtlCol="0" anchor="ctr"/>
+          <a:bodyPr rtlCol="0" anchor="ctr" wrap="square" lIns="109728" rIns="109728" tIns="54864" bIns="54864"/>
           <a:lstStyle/>
           <a:p>
             <a:pPr algn="ctr">
@@ -14455,12 +14650,12 @@
           <a:noFill/>
         </p:spPr>
         <p:txBody>
-          <a:bodyPr wrap="square" lIns="18288" tIns="18288" rIns="18288" bIns="18288" anchor="t">
+          <a:bodyPr wrap="square" anchor="t" lIns="18288" rIns="18288" tIns="18288" bIns="18288">
             <a:spAutoFit/>
           </a:bodyPr>
           <a:lstStyle/>
           <a:p>
-            <a:pPr marL="274320" indent="-274320" algn="l">
+            <a:pPr algn="l" marL="274320" indent="-274320">
               <a:spcAft>
                 <a:spcPts val="1400"/>
               </a:spcAft>
@@ -14478,7 +14673,7 @@
             </a:r>
           </a:p>
           <a:p>
-            <a:pPr marL="274320" indent="-274320" algn="l">
+            <a:pPr algn="l" marL="274320" indent="-274320">
               <a:spcAft>
                 <a:spcPts val="1400"/>
               </a:spcAft>
@@ -14505,7 +14700,7 @@
             </a:r>
           </a:p>
           <a:p>
-            <a:pPr marL="274320" indent="-274320" algn="l">
+            <a:pPr algn="l" marL="274320" indent="-274320">
               <a:spcAft>
                 <a:spcPts val="1400"/>
               </a:spcAft>
@@ -14565,11 +14760,10 @@
           </a:fontRef>
         </p:style>
         <p:txBody>
-          <a:bodyPr wrap="square" lIns="109728" tIns="54864" rIns="109728" bIns="54864" rtlCol="0" anchor="ctr"/>
+          <a:bodyPr rtlCol="0" anchor="ctr" wrap="square" lIns="109728" rIns="109728" tIns="54864" bIns="54864"/>
           <a:lstStyle/>
           <a:p>
             <a:pPr algn="ctr"/>
-            <a:endParaRPr/>
           </a:p>
         </p:txBody>
       </p:sp>
@@ -14612,7 +14806,7 @@
           </a:fontRef>
         </p:style>
         <p:txBody>
-          <a:bodyPr wrap="square" lIns="109728" tIns="54864" rIns="109728" bIns="54864" rtlCol="0" anchor="ctr"/>
+          <a:bodyPr rtlCol="0" anchor="ctr" wrap="square" lIns="109728" rIns="109728" tIns="54864" bIns="54864"/>
           <a:lstStyle/>
           <a:p>
             <a:pPr algn="ctr">
@@ -14665,12 +14859,12 @@
           <a:noFill/>
         </p:spPr>
         <p:txBody>
-          <a:bodyPr wrap="square" lIns="18288" tIns="18288" rIns="18288" bIns="18288" anchor="t">
+          <a:bodyPr wrap="square" anchor="t" lIns="18288" rIns="18288" tIns="18288" bIns="18288">
             <a:spAutoFit/>
           </a:bodyPr>
           <a:lstStyle/>
           <a:p>
-            <a:pPr marL="274320" indent="-274320" algn="l">
+            <a:pPr algn="l" marL="274320" indent="-274320">
               <a:spcAft>
                 <a:spcPts val="1400"/>
               </a:spcAft>
@@ -14688,7 +14882,7 @@
             </a:r>
           </a:p>
           <a:p>
-            <a:pPr marL="274320" indent="-274320" algn="l">
+            <a:pPr algn="l" marL="274320" indent="-274320">
               <a:spcAft>
                 <a:spcPts val="1400"/>
               </a:spcAft>
@@ -14706,7 +14900,7 @@
             </a:r>
           </a:p>
           <a:p>
-            <a:pPr marL="274320" indent="-274320" algn="l">
+            <a:pPr algn="l" marL="274320" indent="-274320">
               <a:spcAft>
                 <a:spcPts val="1400"/>
               </a:spcAft>
@@ -14734,7 +14928,7 @@
 </file>
 
 <file path=ppt/slides/slide4.xml><?xml version="1.0" encoding="utf-8"?>
-<p:sld xmlns:a="http://schemas.openxmlformats.org/drawingml/2006/main" xmlns:r="http://schemas.openxmlformats.org/officeDocument/2006/relationships" xmlns:p="http://schemas.openxmlformats.org/presentationml/2006/main">
+<p:sld xmlns:a="http://schemas.openxmlformats.org/drawingml/2006/main" xmlns:p="http://schemas.openxmlformats.org/presentationml/2006/main" xmlns:r="http://schemas.openxmlformats.org/officeDocument/2006/relationships">
   <p:cSld>
     <p:bg>
       <p:bgPr>
@@ -14750,14 +14944,7 @@
         <p:cNvGrpSpPr/>
         <p:nvPr/>
       </p:nvGrpSpPr>
-      <p:grpSpPr>
-        <a:xfrm>
-          <a:off x="0" y="0"/>
-          <a:ext cx="0" cy="0"/>
-          <a:chOff x="0" y="0"/>
-          <a:chExt cx="0" cy="0"/>
-        </a:xfrm>
-      </p:grpSpPr>
+      <p:grpSpPr/>
       <p:sp>
         <p:nvSpPr>
           <p:cNvPr id="2" name="TextBox 1"/>
@@ -14775,7 +14962,7 @@
           <a:noFill/>
         </p:spPr>
         <p:txBody>
-          <a:bodyPr wrap="square" lIns="18288" tIns="18288" rIns="18288" bIns="18288" anchor="t">
+          <a:bodyPr wrap="square" anchor="t" lIns="18288" rIns="18288" tIns="18288" bIns="18288">
             <a:spAutoFit/>
           </a:bodyPr>
           <a:lstStyle/>
@@ -14814,7 +15001,7 @@
           <a:noFill/>
         </p:spPr>
         <p:txBody>
-          <a:bodyPr wrap="square" lIns="18288" tIns="18288" rIns="18288" bIns="18288" anchor="t">
+          <a:bodyPr wrap="square" anchor="t" lIns="18288" rIns="18288" tIns="18288" bIns="18288">
             <a:spAutoFit/>
           </a:bodyPr>
           <a:lstStyle/>
@@ -14853,7 +15040,7 @@
           <a:noFill/>
         </p:spPr>
         <p:txBody>
-          <a:bodyPr wrap="square" lIns="18288" tIns="18288" rIns="18288" bIns="18288" anchor="t">
+          <a:bodyPr wrap="square" anchor="t" lIns="18288" rIns="18288" tIns="18288" bIns="18288">
             <a:spAutoFit/>
           </a:bodyPr>
           <a:lstStyle/>
@@ -14916,7 +15103,7 @@
           </a:fontRef>
         </p:style>
         <p:txBody>
-          <a:bodyPr wrap="square" lIns="109728" tIns="54864" rIns="109728" bIns="54864" rtlCol="0" anchor="ctr"/>
+          <a:bodyPr rtlCol="0" anchor="ctr" wrap="square" lIns="109728" rIns="109728" tIns="54864" bIns="54864"/>
           <a:lstStyle/>
           <a:p>
             <a:pPr algn="ctr">
@@ -14998,7 +15185,7 @@
           <a:noFill/>
         </p:spPr>
         <p:txBody>
-          <a:bodyPr wrap="square" lIns="18288" tIns="18288" rIns="18288" bIns="18288" anchor="t">
+          <a:bodyPr wrap="square" anchor="t" lIns="18288" rIns="18288" tIns="18288" bIns="18288">
             <a:spAutoFit/>
           </a:bodyPr>
           <a:lstStyle/>
@@ -15061,7 +15248,7 @@
           </a:fontRef>
         </p:style>
         <p:txBody>
-          <a:bodyPr wrap="square" lIns="109728" tIns="54864" rIns="109728" bIns="54864" rtlCol="0" anchor="ctr"/>
+          <a:bodyPr rtlCol="0" anchor="ctr" wrap="square" lIns="109728" rIns="109728" tIns="54864" bIns="54864"/>
           <a:lstStyle/>
           <a:p>
             <a:pPr algn="ctr">
@@ -15167,7 +15354,7 @@
           </a:fontRef>
         </p:style>
         <p:txBody>
-          <a:bodyPr wrap="square" lIns="109728" tIns="54864" rIns="109728" bIns="54864" rtlCol="0" anchor="ctr"/>
+          <a:bodyPr rtlCol="0" anchor="ctr" wrap="square" lIns="109728" rIns="109728" tIns="54864" bIns="54864"/>
           <a:lstStyle/>
           <a:p>
             <a:pPr algn="ctr">
@@ -15280,7 +15467,7 @@
           </a:fontRef>
         </p:style>
         <p:txBody>
-          <a:bodyPr wrap="square" lIns="109728" tIns="54864" rIns="109728" bIns="54864" rtlCol="0" anchor="ctr"/>
+          <a:bodyPr rtlCol="0" anchor="ctr" wrap="square" lIns="109728" rIns="109728" tIns="54864" bIns="54864"/>
           <a:lstStyle/>
           <a:p>
             <a:pPr algn="ctr">
@@ -15393,7 +15580,7 @@
           </a:fontRef>
         </p:style>
         <p:txBody>
-          <a:bodyPr wrap="square" lIns="109728" tIns="54864" rIns="109728" bIns="54864" rtlCol="0" anchor="ctr"/>
+          <a:bodyPr rtlCol="0" anchor="ctr" wrap="square" lIns="109728" rIns="109728" tIns="54864" bIns="54864"/>
           <a:lstStyle/>
           <a:p>
             <a:pPr algn="ctr">
@@ -15468,7 +15655,7 @@
           </a:fontRef>
         </p:style>
         <p:txBody>
-          <a:bodyPr wrap="square" lIns="109728" tIns="54864" rIns="109728" bIns="54864" rtlCol="0" anchor="ctr"/>
+          <a:bodyPr rtlCol="0" anchor="ctr" wrap="square" lIns="109728" rIns="109728" tIns="54864" bIns="54864"/>
           <a:lstStyle/>
           <a:p>
             <a:pPr algn="ctr">
@@ -15505,7 +15692,7 @@
           <a:noFill/>
         </p:spPr>
         <p:txBody>
-          <a:bodyPr wrap="square" lIns="18288" tIns="18288" rIns="18288" bIns="18288" anchor="t">
+          <a:bodyPr wrap="square" anchor="t" lIns="18288" rIns="18288" tIns="18288" bIns="18288">
             <a:spAutoFit/>
           </a:bodyPr>
           <a:lstStyle/>
@@ -15544,7 +15731,7 @@
           <a:noFill/>
         </p:spPr>
         <p:txBody>
-          <a:bodyPr wrap="square" lIns="18288" tIns="18288" rIns="18288" bIns="18288" anchor="t">
+          <a:bodyPr wrap="square" anchor="t" lIns="18288" rIns="18288" tIns="18288" bIns="18288">
             <a:spAutoFit/>
           </a:bodyPr>
           <a:lstStyle/>
@@ -15618,7 +15805,7 @@
           <a:noFill/>
         </p:spPr>
         <p:txBody>
-          <a:bodyPr wrap="square" lIns="18288" tIns="18288" rIns="18288" bIns="18288" anchor="t">
+          <a:bodyPr wrap="square" anchor="t" lIns="18288" rIns="18288" tIns="18288" bIns="18288">
             <a:spAutoFit/>
           </a:bodyPr>
           <a:lstStyle/>
@@ -15657,7 +15844,7 @@
           <a:noFill/>
         </p:spPr>
         <p:txBody>
-          <a:bodyPr wrap="square" lIns="18288" tIns="18288" rIns="18288" bIns="18288" anchor="t">
+          <a:bodyPr wrap="square" anchor="t" lIns="18288" rIns="18288" tIns="18288" bIns="18288">
             <a:spAutoFit/>
           </a:bodyPr>
           <a:lstStyle/>
@@ -15731,7 +15918,7 @@
           <a:noFill/>
         </p:spPr>
         <p:txBody>
-          <a:bodyPr wrap="square" lIns="18288" tIns="18288" rIns="18288" bIns="18288" anchor="t">
+          <a:bodyPr wrap="square" anchor="t" lIns="18288" rIns="18288" tIns="18288" bIns="18288">
             <a:spAutoFit/>
           </a:bodyPr>
           <a:lstStyle/>
@@ -15770,7 +15957,7 @@
           <a:noFill/>
         </p:spPr>
         <p:txBody>
-          <a:bodyPr wrap="square" lIns="18288" tIns="18288" rIns="18288" bIns="18288" anchor="t">
+          <a:bodyPr wrap="square" anchor="t" lIns="18288" rIns="18288" tIns="18288" bIns="18288">
             <a:spAutoFit/>
           </a:bodyPr>
           <a:lstStyle/>
@@ -15844,7 +16031,7 @@
           <a:noFill/>
         </p:spPr>
         <p:txBody>
-          <a:bodyPr wrap="square" lIns="18288" tIns="18288" rIns="18288" bIns="18288" anchor="t">
+          <a:bodyPr wrap="square" anchor="t" lIns="18288" rIns="18288" tIns="18288" bIns="18288">
             <a:spAutoFit/>
           </a:bodyPr>
           <a:lstStyle/>
@@ -15883,7 +16070,7 @@
           <a:noFill/>
         </p:spPr>
         <p:txBody>
-          <a:bodyPr wrap="square" lIns="18288" tIns="18288" rIns="18288" bIns="18288" anchor="t">
+          <a:bodyPr wrap="square" anchor="t" lIns="18288" rIns="18288" tIns="18288" bIns="18288">
             <a:spAutoFit/>
           </a:bodyPr>
           <a:lstStyle/>
@@ -15957,7 +16144,7 @@
           <a:noFill/>
         </p:spPr>
         <p:txBody>
-          <a:bodyPr wrap="square" lIns="18288" tIns="18288" rIns="18288" bIns="18288" anchor="t">
+          <a:bodyPr wrap="square" anchor="t" lIns="18288" rIns="18288" tIns="18288" bIns="18288">
             <a:spAutoFit/>
           </a:bodyPr>
           <a:lstStyle/>
@@ -15996,7 +16183,7 @@
           <a:noFill/>
         </p:spPr>
         <p:txBody>
-          <a:bodyPr wrap="square" lIns="18288" tIns="18288" rIns="18288" bIns="18288" anchor="t">
+          <a:bodyPr wrap="square" anchor="t" lIns="18288" rIns="18288" tIns="18288" bIns="18288">
             <a:spAutoFit/>
           </a:bodyPr>
           <a:lstStyle/>
@@ -16070,7 +16257,7 @@
           <a:noFill/>
         </p:spPr>
         <p:txBody>
-          <a:bodyPr wrap="square" lIns="18288" tIns="18288" rIns="18288" bIns="18288" anchor="t">
+          <a:bodyPr wrap="square" anchor="t" lIns="18288" rIns="18288" tIns="18288" bIns="18288">
             <a:spAutoFit/>
           </a:bodyPr>
           <a:lstStyle/>
@@ -16109,7 +16296,7 @@
           <a:noFill/>
         </p:spPr>
         <p:txBody>
-          <a:bodyPr wrap="square" lIns="18288" tIns="18288" rIns="18288" bIns="18288" anchor="t">
+          <a:bodyPr wrap="square" anchor="t" lIns="18288" rIns="18288" tIns="18288" bIns="18288">
             <a:spAutoFit/>
           </a:bodyPr>
           <a:lstStyle/>
@@ -16183,7 +16370,7 @@
           <a:noFill/>
         </p:spPr>
         <p:txBody>
-          <a:bodyPr wrap="square" lIns="18288" tIns="18288" rIns="18288" bIns="18288" anchor="t">
+          <a:bodyPr wrap="square" anchor="t" lIns="18288" rIns="18288" tIns="18288" bIns="18288">
             <a:spAutoFit/>
           </a:bodyPr>
           <a:lstStyle/>
@@ -16222,7 +16409,7 @@
           <a:noFill/>
         </p:spPr>
         <p:txBody>
-          <a:bodyPr wrap="square" lIns="18288" tIns="18288" rIns="18288" bIns="18288" anchor="t">
+          <a:bodyPr wrap="square" anchor="t" lIns="18288" rIns="18288" tIns="18288" bIns="18288">
             <a:spAutoFit/>
           </a:bodyPr>
           <a:lstStyle/>
@@ -16283,7 +16470,7 @@
           </a:fontRef>
         </p:style>
         <p:txBody>
-          <a:bodyPr wrap="square" lIns="109728" tIns="54864" rIns="109728" bIns="54864" rtlCol="0" anchor="ctr"/>
+          <a:bodyPr rtlCol="0" anchor="ctr" wrap="square" lIns="109728" rIns="109728" tIns="54864" bIns="54864"/>
           <a:lstStyle/>
           <a:p>
             <a:pPr algn="ctr">
@@ -16330,7 +16517,7 @@
 </file>
 
 <file path=ppt/slides/slide5.xml><?xml version="1.0" encoding="utf-8"?>
-<p:sld xmlns:a="http://schemas.openxmlformats.org/drawingml/2006/main" xmlns:r="http://schemas.openxmlformats.org/officeDocument/2006/relationships" xmlns:p="http://schemas.openxmlformats.org/presentationml/2006/main">
+<p:sld xmlns:a="http://schemas.openxmlformats.org/drawingml/2006/main" xmlns:p="http://schemas.openxmlformats.org/presentationml/2006/main" xmlns:r="http://schemas.openxmlformats.org/officeDocument/2006/relationships">
   <p:cSld>
     <p:bg>
       <p:bgPr>
@@ -16346,14 +16533,7 @@
         <p:cNvGrpSpPr/>
         <p:nvPr/>
       </p:nvGrpSpPr>
-      <p:grpSpPr>
-        <a:xfrm>
-          <a:off x="0" y="0"/>
-          <a:ext cx="0" cy="0"/>
-          <a:chOff x="0" y="0"/>
-          <a:chExt cx="0" cy="0"/>
-        </a:xfrm>
-      </p:grpSpPr>
+      <p:grpSpPr/>
       <p:sp>
         <p:nvSpPr>
           <p:cNvPr id="2" name="TextBox 1"/>
@@ -16371,7 +16551,7 @@
           <a:noFill/>
         </p:spPr>
         <p:txBody>
-          <a:bodyPr wrap="square" lIns="18288" tIns="18288" rIns="18288" bIns="18288" anchor="t">
+          <a:bodyPr wrap="square" anchor="t" lIns="18288" rIns="18288" tIns="18288" bIns="18288">
             <a:spAutoFit/>
           </a:bodyPr>
           <a:lstStyle/>
@@ -16410,7 +16590,7 @@
           <a:noFill/>
         </p:spPr>
         <p:txBody>
-          <a:bodyPr wrap="square" lIns="18288" tIns="18288" rIns="18288" bIns="18288" anchor="t">
+          <a:bodyPr wrap="square" anchor="t" lIns="18288" rIns="18288" tIns="18288" bIns="18288">
             <a:spAutoFit/>
           </a:bodyPr>
           <a:lstStyle/>
@@ -16449,7 +16629,7 @@
           <a:noFill/>
         </p:spPr>
         <p:txBody>
-          <a:bodyPr wrap="square" lIns="18288" tIns="18288" rIns="18288" bIns="18288" anchor="t">
+          <a:bodyPr wrap="square" anchor="t" lIns="18288" rIns="18288" tIns="18288" bIns="18288">
             <a:spAutoFit/>
           </a:bodyPr>
           <a:lstStyle/>
@@ -16488,7 +16668,7 @@
           <a:noFill/>
         </p:spPr>
         <p:txBody>
-          <a:bodyPr wrap="square" lIns="18288" tIns="18288" rIns="18288" bIns="18288" anchor="t">
+          <a:bodyPr wrap="square" anchor="t" lIns="18288" rIns="18288" tIns="18288" bIns="18288">
             <a:spAutoFit/>
           </a:bodyPr>
           <a:lstStyle/>
@@ -16560,7 +16740,7 @@
           </a:fontRef>
         </p:style>
         <p:txBody>
-          <a:bodyPr wrap="square" lIns="109728" tIns="54864" rIns="109728" bIns="54864" rtlCol="0" anchor="ctr"/>
+          <a:bodyPr rtlCol="0" anchor="ctr" wrap="square" lIns="109728" rIns="109728" tIns="54864" bIns="54864"/>
           <a:lstStyle/>
           <a:p>
             <a:pPr algn="ctr">
@@ -16637,7 +16817,7 @@
           </a:fontRef>
         </p:style>
         <p:txBody>
-          <a:bodyPr wrap="square" lIns="109728" tIns="54864" rIns="109728" bIns="54864" rtlCol="0" anchor="ctr"/>
+          <a:bodyPr rtlCol="0" anchor="ctr" wrap="square" lIns="109728" rIns="109728" tIns="54864" bIns="54864"/>
           <a:lstStyle/>
           <a:p>
             <a:pPr algn="ctr">
@@ -16750,7 +16930,7 @@
           </a:fontRef>
         </p:style>
         <p:txBody>
-          <a:bodyPr wrap="square" lIns="109728" tIns="54864" rIns="109728" bIns="54864" rtlCol="0" anchor="ctr"/>
+          <a:bodyPr rtlCol="0" anchor="ctr" wrap="square" lIns="109728" rIns="109728" tIns="54864" bIns="54864"/>
           <a:lstStyle/>
           <a:p>
             <a:pPr algn="ctr">
@@ -16863,7 +17043,7 @@
           </a:fontRef>
         </p:style>
         <p:txBody>
-          <a:bodyPr wrap="square" lIns="109728" tIns="54864" rIns="109728" bIns="54864" rtlCol="0" anchor="ctr"/>
+          <a:bodyPr rtlCol="0" anchor="ctr" wrap="square" lIns="109728" rIns="109728" tIns="54864" bIns="54864"/>
           <a:lstStyle/>
           <a:p>
             <a:pPr algn="ctr">
@@ -16976,7 +17156,7 @@
           </a:fontRef>
         </p:style>
         <p:txBody>
-          <a:bodyPr wrap="square" lIns="109728" tIns="54864" rIns="109728" bIns="54864" rtlCol="0" anchor="ctr"/>
+          <a:bodyPr rtlCol="0" anchor="ctr" wrap="square" lIns="109728" rIns="109728" tIns="54864" bIns="54864"/>
           <a:lstStyle/>
           <a:p>
             <a:pPr algn="ctr">
@@ -17089,7 +17269,7 @@
           </a:fontRef>
         </p:style>
         <p:txBody>
-          <a:bodyPr wrap="square" lIns="109728" tIns="54864" rIns="109728" bIns="54864" rtlCol="0" anchor="ctr"/>
+          <a:bodyPr rtlCol="0" anchor="ctr" wrap="square" lIns="109728" rIns="109728" tIns="54864" bIns="54864"/>
           <a:lstStyle/>
           <a:p>
             <a:pPr algn="ctr">
@@ -17178,7 +17358,7 @@
           <a:noFill/>
         </p:spPr>
         <p:txBody>
-          <a:bodyPr wrap="square" lIns="18288" tIns="18288" rIns="18288" bIns="18288" anchor="t">
+          <a:bodyPr wrap="square" anchor="t" lIns="18288" rIns="18288" tIns="18288" bIns="18288">
             <a:spAutoFit/>
           </a:bodyPr>
           <a:lstStyle/>
@@ -17250,7 +17430,7 @@
           </a:fontRef>
         </p:style>
         <p:txBody>
-          <a:bodyPr wrap="square" lIns="109728" tIns="54864" rIns="109728" bIns="54864" rtlCol="0" anchor="ctr"/>
+          <a:bodyPr rtlCol="0" anchor="ctr" wrap="square" lIns="109728" rIns="109728" tIns="54864" bIns="54864"/>
           <a:lstStyle/>
           <a:p>
             <a:pPr algn="ctr">
@@ -17327,7 +17507,7 @@
           </a:fontRef>
         </p:style>
         <p:txBody>
-          <a:bodyPr wrap="square" lIns="109728" tIns="54864" rIns="109728" bIns="54864" rtlCol="0" anchor="ctr"/>
+          <a:bodyPr rtlCol="0" anchor="ctr" wrap="square" lIns="109728" rIns="109728" tIns="54864" bIns="54864"/>
           <a:lstStyle/>
           <a:p>
             <a:pPr algn="ctr">
@@ -17404,7 +17584,7 @@
           </a:fontRef>
         </p:style>
         <p:txBody>
-          <a:bodyPr wrap="square" lIns="109728" tIns="54864" rIns="109728" bIns="54864" rtlCol="0" anchor="ctr"/>
+          <a:bodyPr rtlCol="0" anchor="ctr" wrap="square" lIns="109728" rIns="109728" tIns="54864" bIns="54864"/>
           <a:lstStyle/>
           <a:p>
             <a:pPr algn="ctr">
@@ -17481,7 +17661,7 @@
           </a:fontRef>
         </p:style>
         <p:txBody>
-          <a:bodyPr wrap="square" lIns="109728" tIns="54864" rIns="109728" bIns="54864" rtlCol="0" anchor="ctr"/>
+          <a:bodyPr rtlCol="0" anchor="ctr" wrap="square" lIns="109728" rIns="109728" tIns="54864" bIns="54864"/>
           <a:lstStyle/>
           <a:p>
             <a:pPr algn="ctr">
@@ -17570,7 +17750,7 @@
           <a:noFill/>
         </p:spPr>
         <p:txBody>
-          <a:bodyPr wrap="square" lIns="18288" tIns="18288" rIns="18288" bIns="18288" anchor="t">
+          <a:bodyPr wrap="square" anchor="t" lIns="18288" rIns="18288" tIns="18288" bIns="18288">
             <a:spAutoFit/>
           </a:bodyPr>
           <a:lstStyle/>
@@ -17739,7 +17919,7 @@
           </a:fontRef>
         </p:style>
         <p:txBody>
-          <a:bodyPr wrap="square" lIns="109728" tIns="54864" rIns="109728" bIns="54864" rtlCol="0" anchor="ctr"/>
+          <a:bodyPr rtlCol="0" anchor="ctr" wrap="square" lIns="109728" rIns="109728" tIns="54864" bIns="54864"/>
           <a:lstStyle/>
           <a:p>
             <a:pPr algn="ctr">
@@ -17800,7 +17980,7 @@
           </a:fontRef>
         </p:style>
         <p:txBody>
-          <a:bodyPr wrap="square" lIns="109728" tIns="54864" rIns="109728" bIns="54864" rtlCol="0" anchor="ctr"/>
+          <a:bodyPr rtlCol="0" anchor="ctr" wrap="square" lIns="109728" rIns="109728" tIns="54864" bIns="54864"/>
           <a:lstStyle/>
           <a:p>
             <a:pPr algn="ctr">
@@ -17829,7 +18009,7 @@
 </file>
 
 <file path=ppt/slides/slide6.xml><?xml version="1.0" encoding="utf-8"?>
-<p:sld xmlns:a="http://schemas.openxmlformats.org/drawingml/2006/main" xmlns:r="http://schemas.openxmlformats.org/officeDocument/2006/relationships" xmlns:p="http://schemas.openxmlformats.org/presentationml/2006/main">
+<p:sld xmlns:a="http://schemas.openxmlformats.org/drawingml/2006/main" xmlns:p="http://schemas.openxmlformats.org/presentationml/2006/main" xmlns:r="http://schemas.openxmlformats.org/officeDocument/2006/relationships">
   <p:cSld>
     <p:bg>
       <p:bgPr>
@@ -17845,14 +18025,7 @@
         <p:cNvGrpSpPr/>
         <p:nvPr/>
       </p:nvGrpSpPr>
-      <p:grpSpPr>
-        <a:xfrm>
-          <a:off x="0" y="0"/>
-          <a:ext cx="0" cy="0"/>
-          <a:chOff x="0" y="0"/>
-          <a:chExt cx="0" cy="0"/>
-        </a:xfrm>
-      </p:grpSpPr>
+      <p:grpSpPr/>
       <p:sp>
         <p:nvSpPr>
           <p:cNvPr id="2" name="TextBox 1"/>
@@ -17870,7 +18043,7 @@
           <a:noFill/>
         </p:spPr>
         <p:txBody>
-          <a:bodyPr wrap="square" lIns="18288" tIns="18288" rIns="18288" bIns="18288" anchor="t">
+          <a:bodyPr wrap="square" anchor="t" lIns="18288" rIns="18288" tIns="18288" bIns="18288">
             <a:spAutoFit/>
           </a:bodyPr>
           <a:lstStyle/>
@@ -17909,7 +18082,7 @@
           <a:noFill/>
         </p:spPr>
         <p:txBody>
-          <a:bodyPr wrap="square" lIns="18288" tIns="18288" rIns="18288" bIns="18288" anchor="t">
+          <a:bodyPr wrap="square" anchor="t" lIns="18288" rIns="18288" tIns="18288" bIns="18288">
             <a:spAutoFit/>
           </a:bodyPr>
           <a:lstStyle/>
@@ -17948,7 +18121,7 @@
           <a:noFill/>
         </p:spPr>
         <p:txBody>
-          <a:bodyPr wrap="square" lIns="18288" tIns="18288" rIns="18288" bIns="18288" anchor="t">
+          <a:bodyPr wrap="square" anchor="t" lIns="18288" rIns="18288" tIns="18288" bIns="18288">
             <a:spAutoFit/>
           </a:bodyPr>
           <a:lstStyle/>
@@ -18009,7 +18182,7 @@
           </a:fontRef>
         </p:style>
         <p:txBody>
-          <a:bodyPr wrap="square" lIns="109728" tIns="54864" rIns="109728" bIns="54864" rtlCol="0" anchor="ctr"/>
+          <a:bodyPr rtlCol="0" anchor="ctr" wrap="square" lIns="109728" rIns="109728" tIns="54864" bIns="54864"/>
           <a:lstStyle/>
           <a:p>
             <a:pPr algn="ctr">
@@ -18106,7 +18279,7 @@
           </a:fontRef>
         </p:style>
         <p:txBody>
-          <a:bodyPr wrap="square" lIns="109728" tIns="54864" rIns="109728" bIns="54864" rtlCol="0" anchor="ctr"/>
+          <a:bodyPr rtlCol="0" anchor="ctr" wrap="square" lIns="109728" rIns="109728" tIns="54864" bIns="54864"/>
           <a:lstStyle/>
           <a:p>
             <a:pPr algn="ctr">
@@ -18210,7 +18383,7 @@
           </a:fontRef>
         </p:style>
         <p:txBody>
-          <a:bodyPr wrap="square" lIns="109728" tIns="54864" rIns="109728" bIns="54864" rtlCol="0" anchor="ctr"/>
+          <a:bodyPr rtlCol="0" anchor="ctr" wrap="square" lIns="109728" rIns="109728" tIns="54864" bIns="54864"/>
           <a:lstStyle/>
           <a:p>
             <a:pPr algn="ctr">
@@ -18283,7 +18456,7 @@
           <a:noFill/>
         </p:spPr>
         <p:txBody>
-          <a:bodyPr wrap="square" lIns="18288" tIns="18288" rIns="18288" bIns="18288" anchor="t">
+          <a:bodyPr wrap="square" anchor="t" lIns="18288" rIns="18288" tIns="18288" bIns="18288">
             <a:spAutoFit/>
           </a:bodyPr>
           <a:lstStyle/>
@@ -18346,7 +18519,7 @@
           </a:fontRef>
         </p:style>
         <p:txBody>
-          <a:bodyPr wrap="square" lIns="109728" tIns="54864" rIns="109728" bIns="54864" rtlCol="0" anchor="ctr"/>
+          <a:bodyPr rtlCol="0" anchor="ctr" wrap="square" lIns="109728" rIns="109728" tIns="54864" bIns="54864"/>
           <a:lstStyle/>
           <a:p>
             <a:pPr algn="ctr">
@@ -18419,7 +18592,7 @@
           <a:noFill/>
         </p:spPr>
         <p:txBody>
-          <a:bodyPr wrap="square" lIns="18288" tIns="18288" rIns="18288" bIns="18288" anchor="t">
+          <a:bodyPr wrap="square" anchor="t" lIns="18288" rIns="18288" tIns="18288" bIns="18288">
             <a:spAutoFit/>
           </a:bodyPr>
           <a:lstStyle/>
@@ -18482,7 +18655,7 @@
           </a:fontRef>
         </p:style>
         <p:txBody>
-          <a:bodyPr wrap="square" lIns="109728" tIns="54864" rIns="109728" bIns="54864" rtlCol="0" anchor="ctr"/>
+          <a:bodyPr rtlCol="0" anchor="ctr" wrap="square" lIns="109728" rIns="109728" tIns="54864" bIns="54864"/>
           <a:lstStyle/>
           <a:p>
             <a:pPr algn="ctr">
@@ -18519,7 +18692,7 @@
           <a:noFill/>
         </p:spPr>
         <p:txBody>
-          <a:bodyPr wrap="square" lIns="18288" tIns="18288" rIns="18288" bIns="18288" anchor="t">
+          <a:bodyPr wrap="square" anchor="t" lIns="18288" rIns="18288" tIns="18288" bIns="18288">
             <a:spAutoFit/>
           </a:bodyPr>
           <a:lstStyle/>
@@ -18550,7 +18723,7 @@
         <p:spPr>
           <a:xfrm>
             <a:off x="594360" y="3474720"/>
-            <a:ext cx="3931920" cy="1280160"/>
+            <a:ext cx="3931920" cy="1325880"/>
           </a:xfrm>
           <a:prstGeom prst="rect">
             <a:avLst/>
@@ -18558,12 +18731,12 @@
           <a:noFill/>
         </p:spPr>
         <p:txBody>
-          <a:bodyPr wrap="square" lIns="18288" tIns="18288" rIns="18288" bIns="18288" anchor="t">
+          <a:bodyPr wrap="square" anchor="t" lIns="18288" rIns="18288" tIns="18288" bIns="18288">
             <a:spAutoFit/>
           </a:bodyPr>
           <a:lstStyle/>
           <a:p>
-            <a:pPr marL="274320" indent="-274320" algn="l">
+            <a:pPr algn="l" marL="274320" indent="-274320">
               <a:spcAft>
                 <a:spcPts val="800"/>
               </a:spcAft>
@@ -18577,11 +18750,11 @@
                 </a:solidFill>
                 <a:latin typeface="Segoe UI"/>
               </a:rPr>
-              <a:t>Raw downloads never overwritten; each keeps its URL, time and checksum</a:t>
-            </a:r>
-          </a:p>
-          <a:p>
-            <a:pPr marL="274320" indent="-274320" algn="l">
+              <a:t>Raw downloads never overwritten; a new one becomes 'latest' only after the whole run succeeds</a:t>
+            </a:r>
+          </a:p>
+          <a:p>
+            <a:pPr algn="l" marL="274320" indent="-274320">
               <a:spcAft>
                 <a:spcPts val="800"/>
               </a:spcAft>
@@ -18595,7 +18768,7 @@
                 </a:solidFill>
                 <a:latin typeface="Segoe UI"/>
               </a:rPr>
-              <a:t>A lineage record per layer: the run that built it and its inputs</a:t>
+              <a:t>A lineage record per layer, and a run record even when a run fails</a:t>
             </a:r>
           </a:p>
         </p:txBody>
@@ -18617,7 +18790,7 @@
           <a:noFill/>
         </p:spPr>
         <p:txBody>
-          <a:bodyPr wrap="square" lIns="18288" tIns="18288" rIns="18288" bIns="18288" anchor="t">
+          <a:bodyPr wrap="square" anchor="t" lIns="18288" rIns="18288" tIns="18288" bIns="18288">
             <a:spAutoFit/>
           </a:bodyPr>
           <a:lstStyle/>
@@ -18678,7 +18851,7 @@
           </a:fontRef>
         </p:style>
         <p:txBody>
-          <a:bodyPr wrap="square" lIns="109728" tIns="54864" rIns="109728" bIns="54864" rtlCol="0" anchor="ctr"/>
+          <a:bodyPr rtlCol="0" anchor="ctr" wrap="square" lIns="109728" rIns="109728" tIns="54864" bIns="54864"/>
           <a:lstStyle/>
           <a:p>
             <a:pPr algn="ctr">
@@ -18753,7 +18926,7 @@
           </a:fontRef>
         </p:style>
         <p:txBody>
-          <a:bodyPr wrap="square" lIns="109728" tIns="54864" rIns="109728" bIns="54864" rtlCol="0" anchor="ctr"/>
+          <a:bodyPr rtlCol="0" anchor="ctr" wrap="square" lIns="109728" rIns="109728" tIns="54864" bIns="54864"/>
           <a:lstStyle/>
           <a:p>
             <a:pPr algn="ctr">
@@ -18828,7 +19001,7 @@
           </a:fontRef>
         </p:style>
         <p:txBody>
-          <a:bodyPr wrap="square" lIns="109728" tIns="54864" rIns="109728" bIns="54864" rtlCol="0" anchor="ctr"/>
+          <a:bodyPr rtlCol="0" anchor="ctr" wrap="square" lIns="109728" rIns="109728" tIns="54864" bIns="54864"/>
           <a:lstStyle/>
           <a:p>
             <a:pPr algn="ctr">
@@ -18903,7 +19076,7 @@
           </a:fontRef>
         </p:style>
         <p:txBody>
-          <a:bodyPr wrap="square" lIns="109728" tIns="54864" rIns="109728" bIns="54864" rtlCol="0" anchor="ctr"/>
+          <a:bodyPr rtlCol="0" anchor="ctr" wrap="square" lIns="109728" rIns="109728" tIns="54864" bIns="54864"/>
           <a:lstStyle/>
           <a:p>
             <a:pPr algn="ctr">
@@ -18948,7 +19121,7 @@
 </file>
 
 <file path=ppt/slides/slide7.xml><?xml version="1.0" encoding="utf-8"?>
-<p:sld xmlns:a="http://schemas.openxmlformats.org/drawingml/2006/main" xmlns:r="http://schemas.openxmlformats.org/officeDocument/2006/relationships" xmlns:p="http://schemas.openxmlformats.org/presentationml/2006/main">
+<p:sld xmlns:a="http://schemas.openxmlformats.org/drawingml/2006/main" xmlns:p="http://schemas.openxmlformats.org/presentationml/2006/main" xmlns:r="http://schemas.openxmlformats.org/officeDocument/2006/relationships">
   <p:cSld>
     <p:bg>
       <p:bgPr>
@@ -18964,14 +19137,7 @@
         <p:cNvGrpSpPr/>
         <p:nvPr/>
       </p:nvGrpSpPr>
-      <p:grpSpPr>
-        <a:xfrm>
-          <a:off x="0" y="0"/>
-          <a:ext cx="0" cy="0"/>
-          <a:chOff x="0" y="0"/>
-          <a:chExt cx="0" cy="0"/>
-        </a:xfrm>
-      </p:grpSpPr>
+      <p:grpSpPr/>
       <p:sp>
         <p:nvSpPr>
           <p:cNvPr id="2" name="TextBox 1"/>
@@ -18989,7 +19155,7 @@
           <a:noFill/>
         </p:spPr>
         <p:txBody>
-          <a:bodyPr wrap="square" lIns="18288" tIns="18288" rIns="18288" bIns="18288" anchor="t">
+          <a:bodyPr wrap="square" anchor="t" lIns="18288" rIns="18288" tIns="18288" bIns="18288">
             <a:spAutoFit/>
           </a:bodyPr>
           <a:lstStyle/>
@@ -19028,7 +19194,7 @@
           <a:noFill/>
         </p:spPr>
         <p:txBody>
-          <a:bodyPr wrap="square" lIns="18288" tIns="18288" rIns="18288" bIns="18288" anchor="t">
+          <a:bodyPr wrap="square" anchor="t" lIns="18288" rIns="18288" tIns="18288" bIns="18288">
             <a:spAutoFit/>
           </a:bodyPr>
           <a:lstStyle/>
@@ -19067,7 +19233,7 @@
           <a:noFill/>
         </p:spPr>
         <p:txBody>
-          <a:bodyPr wrap="square" lIns="18288" tIns="18288" rIns="18288" bIns="18288" anchor="t">
+          <a:bodyPr wrap="square" anchor="t" lIns="18288" rIns="18288" tIns="18288" bIns="18288">
             <a:spAutoFit/>
           </a:bodyPr>
           <a:lstStyle/>
@@ -19106,7 +19272,7 @@
           <a:noFill/>
         </p:spPr>
         <p:txBody>
-          <a:bodyPr wrap="square" lIns="18288" tIns="18288" rIns="18288" bIns="18288" anchor="t">
+          <a:bodyPr wrap="square" anchor="t" lIns="18288" rIns="18288" tIns="18288" bIns="18288">
             <a:spAutoFit/>
           </a:bodyPr>
           <a:lstStyle/>
@@ -19222,7 +19388,7 @@
           </a:fontRef>
         </p:style>
         <p:txBody>
-          <a:bodyPr wrap="square" lIns="109728" tIns="54864" rIns="109728" bIns="54864" rtlCol="0" anchor="t"/>
+          <a:bodyPr rtlCol="0" anchor="t" wrap="square" lIns="109728" rIns="109728" tIns="54864" bIns="54864"/>
           <a:lstStyle/>
           <a:p>
             <a:pPr algn="l">
@@ -19336,7 +19502,7 @@
           </a:fontRef>
         </p:style>
         <p:txBody>
-          <a:bodyPr wrap="square" lIns="109728" tIns="54864" rIns="109728" bIns="54864" rtlCol="0" anchor="t"/>
+          <a:bodyPr rtlCol="0" anchor="t" wrap="square" lIns="109728" rIns="109728" tIns="54864" bIns="54864"/>
           <a:lstStyle/>
           <a:p>
             <a:pPr algn="l">
@@ -19450,7 +19616,7 @@
           </a:fontRef>
         </p:style>
         <p:txBody>
-          <a:bodyPr wrap="square" lIns="109728" tIns="54864" rIns="109728" bIns="54864" rtlCol="0" anchor="t"/>
+          <a:bodyPr rtlCol="0" anchor="t" wrap="square" lIns="109728" rIns="109728" tIns="54864" bIns="54864"/>
           <a:lstStyle/>
           <a:p>
             <a:pPr algn="l">
@@ -19564,7 +19730,7 @@
           </a:fontRef>
         </p:style>
         <p:txBody>
-          <a:bodyPr wrap="square" lIns="109728" tIns="54864" rIns="109728" bIns="54864" rtlCol="0" anchor="t"/>
+          <a:bodyPr rtlCol="0" anchor="t" wrap="square" lIns="109728" rIns="109728" tIns="54864" bIns="54864"/>
           <a:lstStyle/>
           <a:p>
             <a:pPr algn="l">
@@ -19678,7 +19844,7 @@
           </a:fontRef>
         </p:style>
         <p:txBody>
-          <a:bodyPr wrap="square" lIns="109728" tIns="54864" rIns="109728" bIns="54864" rtlCol="0" anchor="t"/>
+          <a:bodyPr rtlCol="0" anchor="t" wrap="square" lIns="109728" rIns="109728" tIns="54864" bIns="54864"/>
           <a:lstStyle/>
           <a:p>
             <a:pPr algn="l">
@@ -19737,7 +19903,7 @@
           </a:fontRef>
         </p:style>
         <p:txBody>
-          <a:bodyPr wrap="square" lIns="109728" tIns="54864" rIns="109728" bIns="54864" rtlCol="0" anchor="ctr"/>
+          <a:bodyPr rtlCol="0" anchor="ctr" wrap="square" lIns="109728" rIns="109728" tIns="54864" bIns="54864"/>
           <a:lstStyle/>
           <a:p>
             <a:pPr algn="ctr">
@@ -19766,7 +19932,7 @@
 </file>
 
 <file path=ppt/slides/slide8.xml><?xml version="1.0" encoding="utf-8"?>
-<p:sld xmlns:a="http://schemas.openxmlformats.org/drawingml/2006/main" xmlns:r="http://schemas.openxmlformats.org/officeDocument/2006/relationships" xmlns:p="http://schemas.openxmlformats.org/presentationml/2006/main">
+<p:sld xmlns:a="http://schemas.openxmlformats.org/drawingml/2006/main" xmlns:p="http://schemas.openxmlformats.org/presentationml/2006/main" xmlns:r="http://schemas.openxmlformats.org/officeDocument/2006/relationships">
   <p:cSld>
     <p:bg>
       <p:bgPr>
@@ -19782,14 +19948,7 @@
         <p:cNvGrpSpPr/>
         <p:nvPr/>
       </p:nvGrpSpPr>
-      <p:grpSpPr>
-        <a:xfrm>
-          <a:off x="0" y="0"/>
-          <a:ext cx="0" cy="0"/>
-          <a:chOff x="0" y="0"/>
-          <a:chExt cx="0" cy="0"/>
-        </a:xfrm>
-      </p:grpSpPr>
+      <p:grpSpPr/>
       <p:sp>
         <p:nvSpPr>
           <p:cNvPr id="2" name="TextBox 1"/>
@@ -19807,7 +19966,7 @@
           <a:noFill/>
         </p:spPr>
         <p:txBody>
-          <a:bodyPr wrap="square" lIns="18288" tIns="18288" rIns="18288" bIns="18288" anchor="t">
+          <a:bodyPr wrap="square" anchor="t" lIns="18288" rIns="18288" tIns="18288" bIns="18288">
             <a:spAutoFit/>
           </a:bodyPr>
           <a:lstStyle/>
@@ -19846,7 +20005,7 @@
           <a:noFill/>
         </p:spPr>
         <p:txBody>
-          <a:bodyPr wrap="square" lIns="18288" tIns="18288" rIns="18288" bIns="18288" anchor="t">
+          <a:bodyPr wrap="square" anchor="t" lIns="18288" rIns="18288" tIns="18288" bIns="18288">
             <a:spAutoFit/>
           </a:bodyPr>
           <a:lstStyle/>
@@ -19885,7 +20044,7 @@
           <a:noFill/>
         </p:spPr>
         <p:txBody>
-          <a:bodyPr wrap="square" lIns="18288" tIns="18288" rIns="18288" bIns="18288" anchor="t">
+          <a:bodyPr wrap="square" anchor="t" lIns="18288" rIns="18288" tIns="18288" bIns="18288">
             <a:spAutoFit/>
           </a:bodyPr>
           <a:lstStyle/>
@@ -19924,7 +20083,7 @@
           <a:noFill/>
         </p:spPr>
         <p:txBody>
-          <a:bodyPr wrap="square" lIns="18288" tIns="18288" rIns="18288" bIns="18288" anchor="t">
+          <a:bodyPr wrap="square" anchor="t" lIns="18288" rIns="18288" tIns="18288" bIns="18288">
             <a:spAutoFit/>
           </a:bodyPr>
           <a:lstStyle/>
@@ -20033,7 +20192,7 @@
           <a:noFill/>
         </p:spPr>
         <p:txBody>
-          <a:bodyPr wrap="square" lIns="18288" tIns="18288" rIns="18288" bIns="18288" anchor="t">
+          <a:bodyPr wrap="square" anchor="t" lIns="18288" rIns="18288" tIns="18288" bIns="18288">
             <a:spAutoFit/>
           </a:bodyPr>
           <a:lstStyle/>
@@ -20107,7 +20266,7 @@
           <a:noFill/>
         </p:spPr>
         <p:txBody>
-          <a:bodyPr wrap="square" lIns="18288" tIns="18288" rIns="18288" bIns="18288" anchor="t">
+          <a:bodyPr wrap="square" anchor="t" lIns="18288" rIns="18288" tIns="18288" bIns="18288">
             <a:spAutoFit/>
           </a:bodyPr>
           <a:lstStyle/>
@@ -20181,7 +20340,7 @@
           <a:noFill/>
         </p:spPr>
         <p:txBody>
-          <a:bodyPr wrap="square" lIns="18288" tIns="18288" rIns="18288" bIns="18288" anchor="t">
+          <a:bodyPr wrap="square" anchor="t" lIns="18288" rIns="18288" tIns="18288" bIns="18288">
             <a:spAutoFit/>
           </a:bodyPr>
           <a:lstStyle/>
@@ -20255,7 +20414,7 @@
           <a:noFill/>
         </p:spPr>
         <p:txBody>
-          <a:bodyPr wrap="square" lIns="18288" tIns="18288" rIns="18288" bIns="18288" anchor="t">
+          <a:bodyPr wrap="square" anchor="t" lIns="18288" rIns="18288" tIns="18288" bIns="18288">
             <a:spAutoFit/>
           </a:bodyPr>
           <a:lstStyle/>
@@ -20329,7 +20488,7 @@
           <a:noFill/>
         </p:spPr>
         <p:txBody>
-          <a:bodyPr wrap="square" lIns="18288" tIns="18288" rIns="18288" bIns="18288" anchor="t">
+          <a:bodyPr wrap="square" anchor="t" lIns="18288" rIns="18288" tIns="18288" bIns="18288">
             <a:spAutoFit/>
           </a:bodyPr>
           <a:lstStyle/>
@@ -20403,7 +20562,7 @@
           <a:noFill/>
         </p:spPr>
         <p:txBody>
-          <a:bodyPr wrap="square" lIns="18288" tIns="18288" rIns="18288" bIns="18288" anchor="t">
+          <a:bodyPr wrap="square" anchor="t" lIns="18288" rIns="18288" tIns="18288" bIns="18288">
             <a:spAutoFit/>
           </a:bodyPr>
           <a:lstStyle/>
@@ -20477,7 +20636,7 @@
           <a:noFill/>
         </p:spPr>
         <p:txBody>
-          <a:bodyPr wrap="square" lIns="18288" tIns="18288" rIns="18288" bIns="18288" anchor="t">
+          <a:bodyPr wrap="square" anchor="t" lIns="18288" rIns="18288" tIns="18288" bIns="18288">
             <a:spAutoFit/>
           </a:bodyPr>
           <a:lstStyle/>
@@ -20540,7 +20699,7 @@
           </a:fontRef>
         </p:style>
         <p:txBody>
-          <a:bodyPr wrap="square" lIns="109728" tIns="54864" rIns="109728" bIns="54864" rtlCol="0" anchor="ctr"/>
+          <a:bodyPr rtlCol="0" anchor="ctr" wrap="square" lIns="109728" rIns="109728" tIns="54864" bIns="54864"/>
           <a:lstStyle/>
           <a:p>
             <a:pPr algn="ctr">
@@ -20613,7 +20772,7 @@
           <a:noFill/>
         </p:spPr>
         <p:txBody>
-          <a:bodyPr wrap="square" lIns="18288" tIns="18288" rIns="18288" bIns="18288" anchor="t">
+          <a:bodyPr wrap="square" anchor="t" lIns="18288" rIns="18288" tIns="18288" bIns="18288">
             <a:spAutoFit/>
           </a:bodyPr>
           <a:lstStyle/>
@@ -20652,7 +20811,7 @@
           <a:noFill/>
         </p:spPr>
         <p:txBody>
-          <a:bodyPr wrap="square" lIns="18288" tIns="18288" rIns="18288" bIns="18288" anchor="t">
+          <a:bodyPr wrap="square" anchor="t" lIns="18288" rIns="18288" tIns="18288" bIns="18288">
             <a:spAutoFit/>
           </a:bodyPr>
           <a:lstStyle/>
@@ -20715,7 +20874,7 @@
           </a:fontRef>
         </p:style>
         <p:txBody>
-          <a:bodyPr wrap="square" lIns="109728" tIns="54864" rIns="109728" bIns="54864" rtlCol="0" anchor="ctr"/>
+          <a:bodyPr rtlCol="0" anchor="ctr" wrap="square" lIns="109728" rIns="109728" tIns="54864" bIns="54864"/>
           <a:lstStyle/>
           <a:p>
             <a:pPr algn="ctr">
@@ -20789,7 +20948,7 @@
           <a:noFill/>
         </p:spPr>
         <p:txBody>
-          <a:bodyPr wrap="square" lIns="18288" tIns="18288" rIns="18288" bIns="18288" anchor="t">
+          <a:bodyPr wrap="square" anchor="t" lIns="18288" rIns="18288" tIns="18288" bIns="18288">
             <a:spAutoFit/>
           </a:bodyPr>
           <a:lstStyle/>
@@ -20863,7 +21022,7 @@
           <a:noFill/>
         </p:spPr>
         <p:txBody>
-          <a:bodyPr wrap="square" lIns="18288" tIns="18288" rIns="18288" bIns="18288" anchor="t">
+          <a:bodyPr wrap="square" anchor="t" lIns="18288" rIns="18288" tIns="18288" bIns="18288">
             <a:spAutoFit/>
           </a:bodyPr>
           <a:lstStyle/>
@@ -20902,12 +21061,12 @@
           <a:noFill/>
         </p:spPr>
         <p:txBody>
-          <a:bodyPr wrap="square" lIns="18288" tIns="18288" rIns="18288" bIns="18288" anchor="t">
+          <a:bodyPr wrap="square" anchor="t" lIns="18288" rIns="18288" tIns="18288" bIns="18288">
             <a:spAutoFit/>
           </a:bodyPr>
           <a:lstStyle/>
           <a:p>
-            <a:pPr marL="274320" indent="-274320" algn="l">
+            <a:pPr algn="l" marL="274320" indent="-274320">
               <a:spcAft>
                 <a:spcPts val="800"/>
               </a:spcAft>
@@ -20934,7 +21093,7 @@
             </a:r>
           </a:p>
           <a:p>
-            <a:pPr marL="274320" indent="-274320" algn="l">
+            <a:pPr algn="l" marL="274320" indent="-274320">
               <a:spcAft>
                 <a:spcPts val="800"/>
               </a:spcAft>
@@ -20994,7 +21153,7 @@
           </a:fontRef>
         </p:style>
         <p:txBody>
-          <a:bodyPr wrap="square" lIns="109728" tIns="54864" rIns="109728" bIns="54864" rtlCol="0" anchor="ctr"/>
+          <a:bodyPr rtlCol="0" anchor="ctr" wrap="square" lIns="109728" rIns="109728" tIns="54864" bIns="54864"/>
           <a:lstStyle/>
           <a:p>
             <a:pPr algn="l">
@@ -21057,7 +21216,7 @@
 </file>
 
 <file path=ppt/slides/slide9.xml><?xml version="1.0" encoding="utf-8"?>
-<p:sld xmlns:a="http://schemas.openxmlformats.org/drawingml/2006/main" xmlns:r="http://schemas.openxmlformats.org/officeDocument/2006/relationships" xmlns:p="http://schemas.openxmlformats.org/presentationml/2006/main">
+<p:sld xmlns:a="http://schemas.openxmlformats.org/drawingml/2006/main" xmlns:p="http://schemas.openxmlformats.org/presentationml/2006/main" xmlns:r="http://schemas.openxmlformats.org/officeDocument/2006/relationships">
   <p:cSld>
     <p:bg>
       <p:bgPr>
@@ -21073,14 +21232,7 @@
         <p:cNvGrpSpPr/>
         <p:nvPr/>
       </p:nvGrpSpPr>
-      <p:grpSpPr>
-        <a:xfrm>
-          <a:off x="0" y="0"/>
-          <a:ext cx="0" cy="0"/>
-          <a:chOff x="0" y="0"/>
-          <a:chExt cx="0" cy="0"/>
-        </a:xfrm>
-      </p:grpSpPr>
+      <p:grpSpPr/>
       <p:sp>
         <p:nvSpPr>
           <p:cNvPr id="2" name="TextBox 1"/>
@@ -21098,7 +21250,7 @@
           <a:noFill/>
         </p:spPr>
         <p:txBody>
-          <a:bodyPr wrap="square" lIns="18288" tIns="18288" rIns="18288" bIns="18288" anchor="t">
+          <a:bodyPr wrap="square" anchor="t" lIns="18288" rIns="18288" tIns="18288" bIns="18288">
             <a:spAutoFit/>
           </a:bodyPr>
           <a:lstStyle/>
@@ -21137,7 +21289,7 @@
           <a:noFill/>
         </p:spPr>
         <p:txBody>
-          <a:bodyPr wrap="square" lIns="18288" tIns="18288" rIns="18288" bIns="18288" anchor="t">
+          <a:bodyPr wrap="square" anchor="t" lIns="18288" rIns="18288" tIns="18288" bIns="18288">
             <a:spAutoFit/>
           </a:bodyPr>
           <a:lstStyle/>
@@ -21154,7 +21306,7 @@
                 </a:solidFill>
                 <a:latin typeface="Segoe UI"/>
               </a:rPr>
-              <a:t>186 automated tests guard the riskiest rules</a:t>
+              <a:t>210 automated tests guard the riskiest rules</a:t>
             </a:r>
           </a:p>
         </p:txBody>
@@ -21176,7 +21328,7 @@
           <a:noFill/>
         </p:spPr>
         <p:txBody>
-          <a:bodyPr wrap="square" lIns="18288" tIns="18288" rIns="18288" bIns="18288" anchor="t">
+          <a:bodyPr wrap="square" anchor="t" lIns="18288" rIns="18288" tIns="18288" bIns="18288">
             <a:spAutoFit/>
           </a:bodyPr>
           <a:lstStyle/>
@@ -21239,11 +21391,10 @@
           </a:fontRef>
         </p:style>
         <p:txBody>
-          <a:bodyPr wrap="square" lIns="109728" tIns="54864" rIns="109728" bIns="54864" rtlCol="0" anchor="ctr"/>
+          <a:bodyPr rtlCol="0" anchor="ctr" wrap="square" lIns="109728" rIns="109728" tIns="54864" bIns="54864"/>
           <a:lstStyle/>
           <a:p>
             <a:pPr algn="ctr"/>
-            <a:endParaRPr/>
           </a:p>
         </p:txBody>
       </p:sp>
@@ -21264,7 +21415,7 @@
           <a:noFill/>
         </p:spPr>
         <p:txBody>
-          <a:bodyPr wrap="square" lIns="18288" tIns="18288" rIns="18288" bIns="18288" anchor="t">
+          <a:bodyPr wrap="square" anchor="t" lIns="18288" rIns="18288" tIns="18288" bIns="18288">
             <a:spAutoFit/>
           </a:bodyPr>
           <a:lstStyle/>
@@ -21281,7 +21432,7 @@
                 </a:solidFill>
                 <a:latin typeface="Segoe UI"/>
               </a:rPr>
-              <a:t>105</a:t>
+              <a:t>126</a:t>
             </a:r>
           </a:p>
         </p:txBody>
@@ -21303,7 +21454,7 @@
           <a:noFill/>
         </p:spPr>
         <p:txBody>
-          <a:bodyPr wrap="square" lIns="18288" tIns="18288" rIns="18288" bIns="18288" anchor="t">
+          <a:bodyPr wrap="square" anchor="t" lIns="18288" rIns="18288" tIns="18288" bIns="18288">
             <a:spAutoFit/>
           </a:bodyPr>
           <a:lstStyle/>
@@ -21342,7 +21493,7 @@
           <a:noFill/>
         </p:spPr>
         <p:txBody>
-          <a:bodyPr wrap="square" lIns="18288" tIns="18288" rIns="18288" bIns="18288" anchor="t">
+          <a:bodyPr wrap="square" anchor="t" lIns="18288" rIns="18288" tIns="18288" bIns="18288">
             <a:spAutoFit/>
           </a:bodyPr>
           <a:lstStyle/>
@@ -21405,11 +21556,10 @@
           </a:fontRef>
         </p:style>
         <p:txBody>
-          <a:bodyPr wrap="square" lIns="109728" tIns="54864" rIns="109728" bIns="54864" rtlCol="0" anchor="ctr"/>
+          <a:bodyPr rtlCol="0" anchor="ctr" wrap="square" lIns="109728" rIns="109728" tIns="54864" bIns="54864"/>
           <a:lstStyle/>
           <a:p>
             <a:pPr algn="ctr"/>
-            <a:endParaRPr/>
           </a:p>
         </p:txBody>
       </p:sp>
@@ -21430,7 +21580,7 @@
           <a:noFill/>
         </p:spPr>
         <p:txBody>
-          <a:bodyPr wrap="square" lIns="18288" tIns="18288" rIns="18288" bIns="18288" anchor="t">
+          <a:bodyPr wrap="square" anchor="t" lIns="18288" rIns="18288" tIns="18288" bIns="18288">
             <a:spAutoFit/>
           </a:bodyPr>
           <a:lstStyle/>
@@ -21447,7 +21597,7 @@
                 </a:solidFill>
                 <a:latin typeface="Segoe UI"/>
               </a:rPr>
-              <a:t>41</a:t>
+              <a:t>42</a:t>
             </a:r>
           </a:p>
         </p:txBody>
@@ -21469,7 +21619,7 @@
           <a:noFill/>
         </p:spPr>
         <p:txBody>
-          <a:bodyPr wrap="square" lIns="18288" tIns="18288" rIns="18288" bIns="18288" anchor="t">
+          <a:bodyPr wrap="square" anchor="t" lIns="18288" rIns="18288" tIns="18288" bIns="18288">
             <a:spAutoFit/>
           </a:bodyPr>
           <a:lstStyle/>
@@ -21508,7 +21658,7 @@
           <a:noFill/>
         </p:spPr>
         <p:txBody>
-          <a:bodyPr wrap="square" lIns="18288" tIns="18288" rIns="18288" bIns="18288" anchor="t">
+          <a:bodyPr wrap="square" anchor="t" lIns="18288" rIns="18288" tIns="18288" bIns="18288">
             <a:spAutoFit/>
           </a:bodyPr>
           <a:lstStyle/>
@@ -21571,11 +21721,10 @@
           </a:fontRef>
         </p:style>
         <p:txBody>
-          <a:bodyPr wrap="square" lIns="109728" tIns="54864" rIns="109728" bIns="54864" rtlCol="0" anchor="ctr"/>
+          <a:bodyPr rtlCol="0" anchor="ctr" wrap="square" lIns="109728" rIns="109728" tIns="54864" bIns="54864"/>
           <a:lstStyle/>
           <a:p>
             <a:pPr algn="ctr"/>
-            <a:endParaRPr/>
           </a:p>
         </p:txBody>
       </p:sp>
@@ -21596,7 +21745,7 @@
           <a:noFill/>
         </p:spPr>
         <p:txBody>
-          <a:bodyPr wrap="square" lIns="18288" tIns="18288" rIns="18288" bIns="18288" anchor="t">
+          <a:bodyPr wrap="square" anchor="t" lIns="18288" rIns="18288" tIns="18288" bIns="18288">
             <a:spAutoFit/>
           </a:bodyPr>
           <a:lstStyle/>
@@ -21613,7 +21762,7 @@
                 </a:solidFill>
                 <a:latin typeface="Segoe UI"/>
               </a:rPr>
-              <a:t>40</a:t>
+              <a:t>42</a:t>
             </a:r>
           </a:p>
         </p:txBody>
@@ -21635,7 +21784,7 @@
           <a:noFill/>
         </p:spPr>
         <p:txBody>
-          <a:bodyPr wrap="square" lIns="18288" tIns="18288" rIns="18288" bIns="18288" anchor="t">
+          <a:bodyPr wrap="square" anchor="t" lIns="18288" rIns="18288" tIns="18288" bIns="18288">
             <a:spAutoFit/>
           </a:bodyPr>
           <a:lstStyle/>
@@ -21674,7 +21823,7 @@
           <a:noFill/>
         </p:spPr>
         <p:txBody>
-          <a:bodyPr wrap="square" lIns="18288" tIns="18288" rIns="18288" bIns="18288" anchor="t">
+          <a:bodyPr wrap="square" anchor="t" lIns="18288" rIns="18288" tIns="18288" bIns="18288">
             <a:spAutoFit/>
           </a:bodyPr>
           <a:lstStyle/>
@@ -21713,12 +21862,12 @@
           <a:noFill/>
         </p:spPr>
         <p:txBody>
-          <a:bodyPr wrap="square" lIns="18288" tIns="18288" rIns="18288" bIns="18288" anchor="t">
+          <a:bodyPr wrap="square" anchor="t" lIns="18288" rIns="18288" tIns="18288" bIns="18288">
             <a:spAutoFit/>
           </a:bodyPr>
           <a:lstStyle/>
           <a:p>
-            <a:pPr marL="274320" indent="-274320" algn="l">
+            <a:pPr algn="l" marL="274320" indent="-274320">
               <a:spcAft>
                 <a:spcPts val="1000"/>
               </a:spcAft>
@@ -21736,7 +21885,7 @@
             </a:r>
           </a:p>
           <a:p>
-            <a:pPr marL="274320" indent="-274320" algn="l">
+            <a:pPr algn="l" marL="274320" indent="-274320">
               <a:spcAft>
                 <a:spcPts val="1000"/>
               </a:spcAft>
@@ -21754,7 +21903,7 @@
             </a:r>
           </a:p>
           <a:p>
-            <a:pPr marL="274320" indent="-274320" algn="l">
+            <a:pPr algn="l" marL="274320" indent="-274320">
               <a:spcAft>
                 <a:spcPts val="1000"/>
               </a:spcAft>
@@ -22112,44 +22261,44 @@
         <a:sysClr val="window" lastClr="FFFFFF"/>
       </a:lt1>
       <a:dk2>
-        <a:srgbClr val="0E2841"/>
+        <a:srgbClr val="1F497D"/>
       </a:dk2>
       <a:lt2>
-        <a:srgbClr val="E8E8E8"/>
+        <a:srgbClr val="EEECE1"/>
       </a:lt2>
       <a:accent1>
-        <a:srgbClr val="156082"/>
+        <a:srgbClr val="4F81BD"/>
       </a:accent1>
       <a:accent2>
-        <a:srgbClr val="E97132"/>
+        <a:srgbClr val="C0504D"/>
       </a:accent2>
       <a:accent3>
-        <a:srgbClr val="196B24"/>
+        <a:srgbClr val="9BBB59"/>
       </a:accent3>
       <a:accent4>
-        <a:srgbClr val="0F9ED5"/>
+        <a:srgbClr val="8064A2"/>
       </a:accent4>
       <a:accent5>
-        <a:srgbClr val="A02B93"/>
+        <a:srgbClr val="4BACC6"/>
       </a:accent5>
       <a:accent6>
-        <a:srgbClr val="4EA72E"/>
+        <a:srgbClr val="F79646"/>
       </a:accent6>
       <a:hlink>
-        <a:srgbClr val="467886"/>
+        <a:srgbClr val="0000FF"/>
       </a:hlink>
       <a:folHlink>
-        <a:srgbClr val="96607D"/>
+        <a:srgbClr val="800080"/>
       </a:folHlink>
     </a:clrScheme>
     <a:fontScheme name="Office">
       <a:majorFont>
-        <a:latin typeface="Aptos Display" panose="02110004020202020204"/>
+        <a:latin typeface="Calibri"/>
         <a:ea typeface=""/>
         <a:cs typeface=""/>
-        <a:font script="Jpan" typeface="游ゴシック Light"/>
+        <a:font script="Jpan" typeface="ＭＳ Ｐゴシック"/>
         <a:font script="Hang" typeface="맑은 고딕"/>
-        <a:font script="Hans" typeface="等线 Light"/>
+        <a:font script="Hans" typeface="宋体"/>
         <a:font script="Hant" typeface="新細明體"/>
         <a:font script="Arab" typeface="Times New Roman"/>
         <a:font script="Hebr" typeface="Times New Roman"/>
@@ -22177,31 +22326,14 @@
         <a:font script="Viet" typeface="Times New Roman"/>
         <a:font script="Uigh" typeface="Microsoft Uighur"/>
         <a:font script="Geor" typeface="Sylfaen"/>
-        <a:font script="Armn" typeface="Arial"/>
-        <a:font script="Bugi" typeface="Leelawadee UI"/>
-        <a:font script="Bopo" typeface="Microsoft JhengHei"/>
-        <a:font script="Java" typeface="Javanese Text"/>
-        <a:font script="Lisu" typeface="Segoe UI"/>
-        <a:font script="Mymr" typeface="Myanmar Text"/>
-        <a:font script="Nkoo" typeface="Ebrima"/>
-        <a:font script="Olck" typeface="Nirmala UI"/>
-        <a:font script="Osma" typeface="Ebrima"/>
-        <a:font script="Phag" typeface="Phagspa"/>
-        <a:font script="Syrn" typeface="Estrangelo Edessa"/>
-        <a:font script="Syrj" typeface="Estrangelo Edessa"/>
-        <a:font script="Syre" typeface="Estrangelo Edessa"/>
-        <a:font script="Sora" typeface="Nirmala UI"/>
-        <a:font script="Tale" typeface="Microsoft Tai Le"/>
-        <a:font script="Talu" typeface="Microsoft New Tai Lue"/>
-        <a:font script="Tfng" typeface="Ebrima"/>
       </a:majorFont>
       <a:minorFont>
-        <a:latin typeface="Aptos" panose="02110004020202020204"/>
+        <a:latin typeface="Calibri"/>
         <a:ea typeface=""/>
         <a:cs typeface=""/>
-        <a:font script="Jpan" typeface="游ゴシック"/>
+        <a:font script="Jpan" typeface="ＭＳ Ｐゴシック"/>
         <a:font script="Hang" typeface="맑은 고딕"/>
-        <a:font script="Hans" typeface="等线"/>
+        <a:font script="Hans" typeface="宋体"/>
         <a:font script="Hant" typeface="新細明體"/>
         <a:font script="Arab" typeface="Arial"/>
         <a:font script="Hebr" typeface="Arial"/>
@@ -22229,23 +22361,6 @@
         <a:font script="Viet" typeface="Arial"/>
         <a:font script="Uigh" typeface="Microsoft Uighur"/>
         <a:font script="Geor" typeface="Sylfaen"/>
-        <a:font script="Armn" typeface="Arial"/>
-        <a:font script="Bugi" typeface="Leelawadee UI"/>
-        <a:font script="Bopo" typeface="Microsoft JhengHei"/>
-        <a:font script="Java" typeface="Javanese Text"/>
-        <a:font script="Lisu" typeface="Segoe UI"/>
-        <a:font script="Mymr" typeface="Myanmar Text"/>
-        <a:font script="Nkoo" typeface="Ebrima"/>
-        <a:font script="Olck" typeface="Nirmala UI"/>
-        <a:font script="Osma" typeface="Ebrima"/>
-        <a:font script="Phag" typeface="Phagspa"/>
-        <a:font script="Syrn" typeface="Estrangelo Edessa"/>
-        <a:font script="Syrj" typeface="Estrangelo Edessa"/>
-        <a:font script="Syre" typeface="Estrangelo Edessa"/>
-        <a:font script="Sora" typeface="Nirmala UI"/>
-        <a:font script="Tale" typeface="Microsoft Tai Le"/>
-        <a:font script="Talu" typeface="Microsoft New Tai Lue"/>
-        <a:font script="Tfng" typeface="Ebrima"/>
       </a:minorFont>
     </a:fontScheme>
     <a:fmtScheme name="Office">
@@ -22257,136 +22372,180 @@
           <a:gsLst>
             <a:gs pos="0">
               <a:schemeClr val="phClr">
-                <a:lumMod val="110000"/>
-                <a:satMod val="105000"/>
-                <a:tint val="67000"/>
+                <a:tint val="50000"/>
+                <a:satMod val="300000"/>
               </a:schemeClr>
             </a:gs>
-            <a:gs pos="50000">
+            <a:gs pos="35000">
               <a:schemeClr val="phClr">
-                <a:lumMod val="105000"/>
-                <a:satMod val="103000"/>
-                <a:tint val="73000"/>
+                <a:tint val="37000"/>
+                <a:satMod val="300000"/>
               </a:schemeClr>
             </a:gs>
             <a:gs pos="100000">
               <a:schemeClr val="phClr">
-                <a:lumMod val="105000"/>
-                <a:satMod val="109000"/>
-                <a:tint val="81000"/>
+                <a:tint val="15000"/>
+                <a:satMod val="350000"/>
               </a:schemeClr>
             </a:gs>
           </a:gsLst>
-          <a:lin ang="5400000" scaled="0"/>
+          <a:lin ang="16200000" scaled="1"/>
         </a:gradFill>
         <a:gradFill rotWithShape="1">
           <a:gsLst>
             <a:gs pos="0">
               <a:schemeClr val="phClr">
-                <a:satMod val="103000"/>
-                <a:lumMod val="102000"/>
-                <a:tint val="94000"/>
-              </a:schemeClr>
-            </a:gs>
-            <a:gs pos="50000">
-              <a:schemeClr val="phClr">
-                <a:satMod val="110000"/>
-                <a:lumMod val="100000"/>
+                <a:tint val="100000"/>
                 <a:shade val="100000"/>
+                <a:satMod val="130000"/>
               </a:schemeClr>
             </a:gs>
             <a:gs pos="100000">
               <a:schemeClr val="phClr">
-                <a:lumMod val="99000"/>
-                <a:satMod val="120000"/>
-                <a:shade val="78000"/>
+                <a:tint val="50000"/>
+                <a:shade val="100000"/>
+                <a:satMod val="350000"/>
               </a:schemeClr>
             </a:gs>
           </a:gsLst>
-          <a:lin ang="5400000" scaled="0"/>
+          <a:lin ang="16200000" scaled="0"/>
         </a:gradFill>
       </a:fillStyleLst>
       <a:lnStyleLst>
-        <a:ln w="12700" cap="flat" cmpd="sng" algn="ctr">
+        <a:ln w="9525" cap="flat" cmpd="sng" algn="ctr">
           <a:solidFill>
-            <a:schemeClr val="phClr"/>
+            <a:schemeClr val="phClr">
+              <a:shade val="95000"/>
+              <a:satMod val="105000"/>
+            </a:schemeClr>
           </a:solidFill>
           <a:prstDash val="solid"/>
-          <a:miter lim="800000"/>
-        </a:ln>
-        <a:ln w="19050" cap="flat" cmpd="sng" algn="ctr">
-          <a:solidFill>
-            <a:schemeClr val="phClr"/>
-          </a:solidFill>
-          <a:prstDash val="solid"/>
-          <a:miter lim="800000"/>
         </a:ln>
         <a:ln w="25400" cap="flat" cmpd="sng" algn="ctr">
           <a:solidFill>
             <a:schemeClr val="phClr"/>
           </a:solidFill>
           <a:prstDash val="solid"/>
-          <a:miter lim="800000"/>
+        </a:ln>
+        <a:ln w="38100" cap="flat" cmpd="sng" algn="ctr">
+          <a:solidFill>
+            <a:schemeClr val="phClr"/>
+          </a:solidFill>
+          <a:prstDash val="solid"/>
         </a:ln>
       </a:lnStyleLst>
       <a:effectStyleLst>
         <a:effectStyle>
-          <a:effectLst/>
-        </a:effectStyle>
-        <a:effectStyle>
-          <a:effectLst/>
+          <a:effectLst>
+            <a:outerShdw blurRad="40000" dist="20000" dir="5400000" rotWithShape="0">
+              <a:srgbClr val="000000">
+                <a:alpha val="38000"/>
+              </a:srgbClr>
+            </a:outerShdw>
+          </a:effectLst>
         </a:effectStyle>
         <a:effectStyle>
           <a:effectLst>
-            <a:outerShdw blurRad="57150" dist="19050" dir="5400000" algn="ctr" rotWithShape="0">
+            <a:outerShdw blurRad="40000" dist="23000" dir="5400000" rotWithShape="0">
               <a:srgbClr val="000000">
-                <a:alpha val="63000"/>
+                <a:alpha val="35000"/>
               </a:srgbClr>
             </a:outerShdw>
           </a:effectLst>
+        </a:effectStyle>
+        <a:effectStyle>
+          <a:effectLst>
+            <a:outerShdw blurRad="40000" dist="23000" dir="5400000" rotWithShape="0">
+              <a:srgbClr val="000000">
+                <a:alpha val="35000"/>
+              </a:srgbClr>
+            </a:outerShdw>
+          </a:effectLst>
+          <a:scene3d>
+            <a:camera prst="orthographicFront">
+              <a:rot lat="0" lon="0" rev="0"/>
+            </a:camera>
+            <a:lightRig rig="threePt" dir="t">
+              <a:rot lat="0" lon="0" rev="1200000"/>
+            </a:lightRig>
+          </a:scene3d>
+          <a:sp3d>
+            <a:bevelT w="63500" h="25400"/>
+          </a:sp3d>
         </a:effectStyle>
       </a:effectStyleLst>
       <a:bgFillStyleLst>
         <a:solidFill>
           <a:schemeClr val="phClr"/>
         </a:solidFill>
-        <a:solidFill>
-          <a:schemeClr val="phClr">
-            <a:tint val="95000"/>
-            <a:satMod val="170000"/>
-          </a:schemeClr>
-        </a:solidFill>
         <a:gradFill rotWithShape="1">
           <a:gsLst>
             <a:gs pos="0">
               <a:schemeClr val="phClr">
-                <a:tint val="93000"/>
-                <a:satMod val="150000"/>
-                <a:shade val="98000"/>
-                <a:lumMod val="102000"/>
+                <a:tint val="40000"/>
+                <a:satMod val="350000"/>
               </a:schemeClr>
             </a:gs>
-            <a:gs pos="50000">
+            <a:gs pos="40000">
               <a:schemeClr val="phClr">
-                <a:tint val="98000"/>
-                <a:satMod val="130000"/>
-                <a:shade val="90000"/>
-                <a:lumMod val="103000"/>
+                <a:tint val="45000"/>
+                <a:shade val="99000"/>
+                <a:satMod val="350000"/>
               </a:schemeClr>
             </a:gs>
             <a:gs pos="100000">
               <a:schemeClr val="phClr">
-                <a:shade val="63000"/>
-                <a:satMod val="120000"/>
+                <a:shade val="20000"/>
+                <a:satMod val="255000"/>
               </a:schemeClr>
             </a:gs>
           </a:gsLst>
-          <a:lin ang="5400000" scaled="0"/>
+          <a:path path="circle">
+            <a:fillToRect l="50000" t="-80000" r="50000" b="180000"/>
+          </a:path>
+        </a:gradFill>
+        <a:gradFill rotWithShape="1">
+          <a:gsLst>
+            <a:gs pos="0">
+              <a:schemeClr val="phClr">
+                <a:tint val="80000"/>
+                <a:satMod val="300000"/>
+              </a:schemeClr>
+            </a:gs>
+            <a:gs pos="100000">
+              <a:schemeClr val="phClr">
+                <a:shade val="30000"/>
+                <a:satMod val="200000"/>
+              </a:schemeClr>
+            </a:gs>
+          </a:gsLst>
+          <a:path path="circle">
+            <a:fillToRect l="50000" t="50000" r="50000" b="50000"/>
+          </a:path>
         </a:gradFill>
       </a:bgFillStyleLst>
     </a:fmtScheme>
   </a:themeElements>
   <a:objectDefaults>
+    <a:spDef>
+      <a:spPr/>
+      <a:bodyPr/>
+      <a:lstStyle/>
+      <a:style>
+        <a:lnRef idx="1">
+          <a:schemeClr val="accent1"/>
+        </a:lnRef>
+        <a:fillRef idx="3">
+          <a:schemeClr val="accent1"/>
+        </a:fillRef>
+        <a:effectRef idx="2">
+          <a:schemeClr val="accent1"/>
+        </a:effectRef>
+        <a:fontRef idx="minor">
+          <a:schemeClr val="lt1"/>
+        </a:fontRef>
+      </a:style>
+    </a:spDef>
     <a:lnDef>
       <a:spPr/>
       <a:bodyPr/>
@@ -22408,10 +22567,5 @@
     </a:lnDef>
   </a:objectDefaults>
   <a:extraClrSchemeLst/>
-  <a:extLst>
-    <a:ext uri="{05A4C25C-085E-4340-85A3-A5531E510DB2}">
-      <thm15:themeFamily xmlns:thm15="http://schemas.microsoft.com/office/thememl/2012/main" name="Office Theme" id="{2E142A2C-CD16-42D6-873A-C26D2A0506FA}" vid="{1BDDFF52-6CD6-40A5-AB3C-68EB2F1E4D0A}"/>
-    </a:ext>
-  </a:extLst>
 </a:theme>
 </file>